--- a/live-fx/business/LiveFX_Pitch_TR.pptx
+++ b/live-fx/business/LiveFX_Pitch_TR.pptx
@@ -123,7 +123,7 @@
   <p:extLst>
     <p:ext uri="{521415D9-36F7-43E2-AB2F-B90AF26B5E84}">
       <p14:sectionLst xmlns:p14="http://schemas.microsoft.com/office/powerpoint/2010/main">
-        <p14:section name="Bugün: LiveFX 2.0" id="{d5619919-751f-df5b-f540-865c84078b51}">
+        <p14:section name="Bugün: LiveFX 2.0" id="{1cf5f461-ac97-35de-dc62-40ba9d0f97e8}">
           <p14:sldIdLst>
             <p14:sldId id="256"/>
             <p14:sldId id="257"/>
@@ -138,7 +138,7 @@
             <p14:sldId id="266"/>
           </p14:sldIdLst>
         </p14:section>
-        <p14:section name="Vizyon 2027–2029" id="{652a5466-8a86-24eb-1184-924cbe3d0390}">
+        <p14:section name="Vizyon 2027–2029" id="{d7a36b27-9c33-909d-2646-ba684a291a9d}">
           <p14:sldIdLst>
             <p14:sldId id="267"/>
             <p14:sldId id="268"/>
@@ -146,7 +146,7 @@
             <p14:sldId id="270"/>
           </p14:sldIdLst>
         </p14:section>
-        <p14:section name="Ekip ve talep" id="{b0459670-c2ea-3887-98f9-31afa849d6b5}">
+        <p14:section name="Ekip ve talep" id="{33250f9f-efd0-1b23-84da-f1874fbaf007}">
           <p14:sldIdLst>
             <p14:sldId id="271"/>
             <p14:sldId id="272"/>
@@ -1556,7 +1556,7 @@
           <a:p>
             <a:r>
               <a:rPr lang="en-US" dirty="0"/>
-              <a:t>Kurucu tek kişide kullanıcı, içerik sağlayıcı ve ürün sorumlusu – ürünün şivelerde, dikey formatta ve Türkçede çalışmasının nedeni bu. Çocuk kitabı yazarı olarak ilk yayınevi ve eğitim örneğini de kendisi getiriyor. Seed yatırımla iki işe alım geliyor; Kelime-Resim için içerik kontrolünü bir eğitim teknolojisi danışma kurulu üstleniyor.</a:t>
+              <a:t>Kurucu tek kişide kullanıcı, içerik sağlayıcı ve ürün sorumlusu – ürünün şivelerde, dikey formatta ve Türkçede çalışmasının nedeni bu. Çocuk kitabı yazarı olarak ilk yayınevi ve eğitim örneğini de kendisi getiriyor. Gönül Demet yatırımcı ilişkilerinden (Investor Relations) sorumlu ve ön tohum turu için iletişim kişisi. Ön tohum yatırımla (500.000 €) iki işe alım geliyor; Kelime-Resim için içerik kontrolünü bir eğitim teknolojisi danışma kurulu üstleniyor.</a:t>
             </a:r>
             <a:endParaRPr lang="en-US" dirty="0"/>
           </a:p>
@@ -1644,7 +1644,7 @@
           <a:p>
             <a:r>
               <a:rPr lang="en-US" dirty="0"/>
-              <a:t>Somut bitirin: İhtiyacımız olan, canlı yayın ekibinde bir muhatap ve 20 üreticiyle 8 haftalık bir pilot. Biz katmanı, paketleri, desteği ve ölçümü (izlenme süresi, hediyeler, canlı yayınlardan klipler) sağlıyoruz. Yeni: Kelime-Resim ve Anlatı Filmi için eğitim kurumları, dil öğrenme platformları ya da yayınevleriyle ikinci bir pilot arıyoruz – ilk yayınevi örneği kurucunun kendi çocuk kitabı serisi. Bu sunum Almanca ve İngilizce de mevcut.</a:t>
+              <a:t>Somut bitirin: İhtiyacımız olan, canlı yayın ekibinde bir muhatap ve 20 üreticiyle 8 haftalık bir pilot. Biz katmanı, paketleri, desteği ve ölçümü (izlenme süresi, hediyeler, canlı yayınlardan klipler) sağlıyoruz. Yeni: Kelime-Resim ve Anlatı Filmi için eğitim kurumları, dil öğrenme platformları ya da yayınevleriyle ikinci bir pilot arıyoruz – ilk yayınevi örneği kurucunun kendi çocuk kitabı serisi. Tur hakkında: LiveFX ve tüm projeleri için 500.000 € ön tohum yatırım, 24 ay. Öneri olarak fon kullanımı: ekip 250 bin €, vizyon hatları 100 bin € (önce Kelime-Resim/dil öğrenme ve hikâye motoru), pazara giriş 75 bin €, hukuk/marka/veri koruma 50 bin €, rezerv 25 bin €. Hiç gelir olmasa bile bu yaklaşık 22 ay yetiyor; temkinli senaryo üç yıl boyunca karşılanıyor (iş planı 11.6). Yatırımcılar için iletişim: Gönül Demet. Bu sunum Almanca ve İngilizce de mevcut.</a:t>
             </a:r>
             <a:endParaRPr lang="en-US" dirty="0"/>
           </a:p>
@@ -2172,7 +2172,7 @@
           <a:p>
             <a:r>
               <a:rPr lang="en-US" dirty="0"/>
-              <a:t>Dürüstçe söyleyin: TAM geniş aralıklı ikincil kaynaklardan geliyor; SAM ve SOM bir araştırma değil, bizim tahminimiz. Mesele tam rakam değil: Ödeme yapan canlı yayıncıların küçük bir payı bile bir ekibi taşır – ve asıl kaldıraç abonelik değil, platform entegrasyonu. Altta yeni: Vizyon komşu pazarlar açıyor – yapay zekâ video 3,67 milyar USD [Kaynak 23], dil öğrenme uygulamaları 1,54 milyar USD [Kaynak 33], video kurgu 2,68 milyar USD [Kaynak 51], Almanya sesli kitap 374 milyon € [Kaynak 19]. Bunları SOM'a bilerek katmıyoruz.</a:t>
+              <a:t>Dürüstçe söyleyin: TAM geniş aralıklı ikincil kaynaklardan geliyor; SAM ve SOM bir araştırma değil, bizim tahminimiz. Mesele tam rakam değil: Ödeme yapan canlı yayıncıların küçük bir payı bile bir ekibi taşır – ve asıl kaldıraç abonelik değil, platform entegrasyonu. Altta yeni: Vizyon komşu pazarlar açıyor – yapay zekâ video 3,67 milyar USD [Kaynak 23], dil öğrenme uygulamaları 1,54 milyar USD [Kaynak 33], video kurgu 2,68 milyar USD [Kaynak 51], Almanya sesli kitap 374 milyon € [Kaynak 19]. Bunları SOM'a bilerek katmıyoruz. SOM iş planıyla aynı (bölüm 6): 3. yılda 5.000–15.000 ücretli kullanıcı; temel senaryo ortalama 7.500 Pro kullanıcıyla hesaplıyor.</a:t>
             </a:r>
             <a:endParaRPr lang="en-US" dirty="0"/>
           </a:p>
@@ -3131,7 +3131,7 @@
                 <a:ea typeface="Arial" pitchFamily="34" charset="-122"/>
                 <a:cs typeface="Arial" pitchFamily="34" charset="-120"/>
               </a:rPr>
-              <a:t>[İsim]</a:t>
+              <a:t>Tuncay Sancak</a:t>
             </a:r>
             <a:pPr indent="0" marL="0">
               <a:buNone/>
@@ -3145,7 +3145,7 @@
                 <a:ea typeface="Arial" pitchFamily="34" charset="-122"/>
                 <a:cs typeface="Arial" pitchFamily="34" charset="-120"/>
               </a:rPr>
-              <a:t>  ·  Kurucu, yazar ve canlı yayıncı</a:t>
+              <a:t>  ·  Kurucu &amp; Mucit, Genel Müdür</a:t>
             </a:r>
             <a:endParaRPr lang="en-US" sz="1300" dirty="0"/>
           </a:p>
@@ -3162,7 +3162,7 @@
                 <a:ea typeface="Arial" pitchFamily="34" charset="-122"/>
                 <a:cs typeface="Arial" pitchFamily="34" charset="-120"/>
               </a:rPr>
-              <a:t>[Tarih]  ·  [E-posta]</a:t>
+              <a:t>Investor Relations: Gönül Demet  ·  [E-posta]  ·  Ekim 2026  ·  Gizli</a:t>
             </a:r>
             <a:endParaRPr lang="en-US" sz="1300" dirty="0"/>
           </a:p>
@@ -3288,8 +3288,8 @@
         </p:nvSpPr>
         <p:spPr>
           <a:xfrm>
-            <a:off x="9357055" y="6473952"/>
-            <a:ext cx="2286000" cy="228600"/>
+            <a:off x="7071055" y="6473952"/>
+            <a:ext cx="4572000" cy="228600"/>
           </a:xfrm>
           <a:prstGeom prst="rect">
             <a:avLst/>
@@ -3313,7 +3313,7 @@
                 <a:ea typeface="Arial" pitchFamily="34" charset="-122"/>
                 <a:cs typeface="Arial" pitchFamily="34" charset="-120"/>
               </a:rPr>
-              <a:t>LiveFX  ·  10</a:t>
+              <a:t>Gizli · Ekim 2026  ·  LiveFX  ·  10</a:t>
             </a:r>
             <a:endParaRPr lang="en-US" sz="900" dirty="0"/>
           </a:p>
@@ -4472,8 +4472,8 @@
         </p:nvSpPr>
         <p:spPr>
           <a:xfrm>
-            <a:off x="9357055" y="6473952"/>
-            <a:ext cx="2286000" cy="228600"/>
+            <a:off x="7071055" y="6473952"/>
+            <a:ext cx="4572000" cy="228600"/>
           </a:xfrm>
           <a:prstGeom prst="rect">
             <a:avLst/>
@@ -4497,7 +4497,7 @@
                 <a:ea typeface="Arial" pitchFamily="34" charset="-122"/>
                 <a:cs typeface="Arial" pitchFamily="34" charset="-120"/>
               </a:rPr>
-              <a:t>LiveFX  ·  11</a:t>
+              <a:t>Gizli · Ekim 2026  ·  LiveFX  ·  11</a:t>
             </a:r>
             <a:endParaRPr lang="en-US" sz="900" dirty="0"/>
           </a:p>
@@ -5453,8 +5453,8 @@
         </p:nvSpPr>
         <p:spPr>
           <a:xfrm>
-            <a:off x="9357055" y="6473952"/>
-            <a:ext cx="2286000" cy="228600"/>
+            <a:off x="7071055" y="6473952"/>
+            <a:ext cx="4572000" cy="228600"/>
           </a:xfrm>
           <a:prstGeom prst="rect">
             <a:avLst/>
@@ -5478,7 +5478,7 @@
                 <a:ea typeface="Arial" pitchFamily="34" charset="-122"/>
                 <a:cs typeface="Arial" pitchFamily="34" charset="-120"/>
               </a:rPr>
-              <a:t>LiveFX  ·  12</a:t>
+              <a:t>Gizli · Ekim 2026  ·  LiveFX  ·  12</a:t>
             </a:r>
             <a:endParaRPr lang="en-US" sz="900" dirty="0"/>
           </a:p>
@@ -7188,8 +7188,8 @@
         </p:nvSpPr>
         <p:spPr>
           <a:xfrm>
-            <a:off x="9357055" y="6473952"/>
-            <a:ext cx="2286000" cy="228600"/>
+            <a:off x="7071055" y="6473952"/>
+            <a:ext cx="4572000" cy="228600"/>
           </a:xfrm>
           <a:prstGeom prst="rect">
             <a:avLst/>
@@ -7213,7 +7213,7 @@
                 <a:ea typeface="Arial" pitchFamily="34" charset="-122"/>
                 <a:cs typeface="Arial" pitchFamily="34" charset="-120"/>
               </a:rPr>
-              <a:t>LiveFX  ·  13</a:t>
+              <a:t>Gizli · Ekim 2026  ·  LiveFX  ·  13</a:t>
             </a:r>
             <a:endParaRPr lang="en-US" sz="900" dirty="0"/>
           </a:p>
@@ -10527,8 +10527,8 @@
         </p:nvSpPr>
         <p:spPr>
           <a:xfrm>
-            <a:off x="9357055" y="6473952"/>
-            <a:ext cx="2286000" cy="228600"/>
+            <a:off x="7071055" y="6473952"/>
+            <a:ext cx="4572000" cy="228600"/>
           </a:xfrm>
           <a:prstGeom prst="rect">
             <a:avLst/>
@@ -10552,7 +10552,7 @@
                 <a:ea typeface="Arial" pitchFamily="34" charset="-122"/>
                 <a:cs typeface="Arial" pitchFamily="34" charset="-120"/>
               </a:rPr>
-              <a:t>LiveFX  ·  14</a:t>
+              <a:t>Gizli · Ekim 2026  ·  LiveFX  ·  14</a:t>
             </a:r>
             <a:endParaRPr lang="en-US" sz="900" dirty="0"/>
           </a:p>
@@ -11995,8 +11995,8 @@
         </p:nvSpPr>
         <p:spPr>
           <a:xfrm>
-            <a:off x="9357055" y="6473952"/>
-            <a:ext cx="2286000" cy="228600"/>
+            <a:off x="7071055" y="6473952"/>
+            <a:ext cx="4572000" cy="228600"/>
           </a:xfrm>
           <a:prstGeom prst="rect">
             <a:avLst/>
@@ -12020,7 +12020,7 @@
                 <a:ea typeface="Arial" pitchFamily="34" charset="-122"/>
                 <a:cs typeface="Arial" pitchFamily="34" charset="-120"/>
               </a:rPr>
-              <a:t>LiveFX  ·  15</a:t>
+              <a:t>Gizli · Ekim 2026  ·  LiveFX  ·  15</a:t>
             </a:r>
             <a:endParaRPr lang="en-US" sz="900" dirty="0"/>
           </a:p>
@@ -14734,7 +14734,7 @@
                 <a:ea typeface="Arial" pitchFamily="34" charset="-122"/>
                 <a:cs typeface="Arial" pitchFamily="34" charset="-120"/>
               </a:rPr>
-              <a:t>KULLANICI, YAZAR, KURUCU</a:t>
+              <a:t>KURUCU, MUCİT, KULLANICI</a:t>
             </a:r>
             <a:endParaRPr lang="en-US" sz="1000" dirty="0"/>
           </a:p>
@@ -14789,8 +14789,8 @@
         </p:nvSpPr>
         <p:spPr>
           <a:xfrm>
-            <a:off x="9357055" y="6473952"/>
-            <a:ext cx="2286000" cy="228600"/>
+            <a:off x="7071055" y="6473952"/>
+            <a:ext cx="4572000" cy="228600"/>
           </a:xfrm>
           <a:prstGeom prst="rect">
             <a:avLst/>
@@ -14814,7 +14814,7 @@
                 <a:ea typeface="Arial" pitchFamily="34" charset="-122"/>
                 <a:cs typeface="Arial" pitchFamily="34" charset="-120"/>
               </a:rPr>
-              <a:t>LiveFX  ·  16</a:t>
+              <a:t>Gizli · Ekim 2026  ·  LiveFX  ·  16</a:t>
             </a:r>
             <a:endParaRPr lang="en-US" sz="900" dirty="0"/>
           </a:p>
@@ -14829,11 +14829,11 @@
         <p:spPr>
           <a:xfrm>
             <a:off x="548640" y="1371600"/>
-            <a:ext cx="5120640" cy="4526280"/>
+            <a:ext cx="5120640" cy="3246120"/>
           </a:xfrm>
           <a:prstGeom prst="roundRect">
             <a:avLst>
-              <a:gd name="adj" fmla="val 2424"/>
+              <a:gd name="adj" fmla="val 3380"/>
             </a:avLst>
           </a:prstGeom>
           <a:solidFill>
@@ -14899,7 +14899,7 @@
               <a:buNone/>
             </a:pPr>
             <a:r>
-              <a:rPr lang="en-US" sz="1200" b="1" dirty="0">
+              <a:rPr lang="en-US" sz="2000" b="1" dirty="0">
                 <a:solidFill>
                   <a:srgbClr val="FFFFFF"/>
                 </a:solidFill>
@@ -14907,9 +14907,9 @@
                 <a:ea typeface="Arial" pitchFamily="34" charset="-122"/>
                 <a:cs typeface="Arial" pitchFamily="34" charset="-120"/>
               </a:rPr>
-              <a:t>[Fotoğraf]</a:t>
-            </a:r>
-            <a:endParaRPr lang="en-US" sz="1200" dirty="0"/>
+              <a:t>TS</a:t>
+            </a:r>
+            <a:endParaRPr lang="en-US" sz="2000" dirty="0"/>
           </a:p>
         </p:txBody>
       </p:sp>
@@ -14948,7 +14948,7 @@
                 <a:ea typeface="Arial" pitchFamily="34" charset="-122"/>
                 <a:cs typeface="Arial" pitchFamily="34" charset="-120"/>
               </a:rPr>
-              <a:t>[İsim]</a:t>
+              <a:t>Tuncay Sancak</a:t>
             </a:r>
             <a:endParaRPr lang="en-US" sz="2200" dirty="0"/>
           </a:p>
@@ -14989,7 +14989,7 @@
                 <a:ea typeface="Arial" pitchFamily="34" charset="-122"/>
                 <a:cs typeface="Arial" pitchFamily="34" charset="-120"/>
               </a:rPr>
-              <a:t>Kurucu · Alman-Türk yazar ve canlı yayıncı</a:t>
+              <a:t>Kurucu &amp; Mucit · Genel Müdür · Alman-Türk yazar ve canlı yayıncı</a:t>
             </a:r>
             <a:endParaRPr lang="en-US" sz="1200" dirty="0"/>
           </a:p>
@@ -15003,8 +15003,8 @@
         </p:nvSpPr>
         <p:spPr>
           <a:xfrm>
-            <a:off x="914400" y="3200400"/>
-            <a:ext cx="4480560" cy="2560320"/>
+            <a:off x="914400" y="3108960"/>
+            <a:ext cx="4480560" cy="1417320"/>
           </a:xfrm>
           <a:prstGeom prst="rect">
             <a:avLst/>
@@ -15020,13 +15020,13 @@
           <a:p>
             <a:pPr marL="203200" indent="-203200">
               <a:spcAft>
-                <a:spcPts val="600"/>
+                <a:spcPts val="400"/>
               </a:spcAft>
               <a:buSzPct val="100000"/>
               <a:buChar char="•"/>
             </a:pPr>
             <a:r>
-              <a:rPr lang="en-US" sz="1250" dirty="0">
+              <a:rPr lang="en-US" sz="1200" dirty="0">
                 <a:solidFill>
                   <a:srgbClr val="FFFFFF"/>
                 </a:solidFill>
@@ -15036,18 +15036,18 @@
               </a:rPr>
               <a:t>Ürün, içerik, topluluk – ve test laboratuvarı olarak kendi yayınları</a:t>
             </a:r>
-            <a:endParaRPr lang="en-US" sz="1250" dirty="0"/>
+            <a:endParaRPr lang="en-US" sz="1200" dirty="0"/>
           </a:p>
           <a:p>
             <a:pPr marL="203200" indent="-203200">
               <a:spcAft>
-                <a:spcPts val="600"/>
+                <a:spcPts val="400"/>
               </a:spcAft>
               <a:buSzPct val="100000"/>
               <a:buChar char="•"/>
             </a:pPr>
             <a:r>
-              <a:rPr lang="en-US" sz="1250" dirty="0">
+              <a:rPr lang="en-US" sz="1200" dirty="0">
                 <a:solidFill>
                   <a:srgbClr val="FFFFFF"/>
                 </a:solidFill>
@@ -15057,18 +15057,18 @@
               </a:rPr>
               <a:t>TR / DE / EN meme ve hikâye paketleri, birinci elden</a:t>
             </a:r>
-            <a:endParaRPr lang="en-US" sz="1250" dirty="0"/>
+            <a:endParaRPr lang="en-US" sz="1200" dirty="0"/>
           </a:p>
           <a:p>
             <a:pPr marL="203200" indent="-203200">
               <a:spcAft>
-                <a:spcPts val="600"/>
+                <a:spcPts val="400"/>
               </a:spcAft>
               <a:buSzPct val="100000"/>
               <a:buChar char="•"/>
             </a:pPr>
             <a:r>
-              <a:rPr lang="en-US" sz="1250" dirty="0">
+              <a:rPr lang="en-US" sz="1200" dirty="0">
                 <a:solidFill>
                   <a:srgbClr val="FFFFFF"/>
                 </a:solidFill>
@@ -15078,18 +15078,18 @@
               </a:rPr>
               <a:t>Nöroçeşitlilik üzerine çocuk kitabı serisi – Kelime-Resim ve Anlatı Filmi'ne köprü</a:t>
             </a:r>
-            <a:endParaRPr lang="en-US" sz="1250" dirty="0"/>
+            <a:endParaRPr lang="en-US" sz="1200" dirty="0"/>
           </a:p>
           <a:p>
             <a:pPr marL="203200" indent="-203200">
               <a:spcAft>
-                <a:spcPts val="600"/>
+                <a:spcPts val="400"/>
               </a:spcAft>
               <a:buSzPct val="100000"/>
               <a:buChar char="•"/>
             </a:pPr>
             <a:r>
-              <a:rPr lang="en-US" sz="1250" dirty="0">
+              <a:rPr lang="en-US" sz="1200" dirty="0">
                 <a:solidFill>
                   <a:srgbClr val="FFFFFF"/>
                 </a:solidFill>
@@ -15099,13 +15099,229 @@
               </a:rPr>
               <a:t>Kitaplar: [Başlık] · Yayınlar: [Platform / @kullanıcı] · [E-posta]</a:t>
             </a:r>
-            <a:endParaRPr lang="en-US" sz="1250" dirty="0"/>
+            <a:endParaRPr lang="en-US" sz="1200" dirty="0"/>
           </a:p>
         </p:txBody>
       </p:sp>
       <p:sp>
         <p:nvSpPr>
           <p:cNvPr id="12" name="Shape 9"/>
+          <p:cNvSpPr/>
+          <p:nvPr/>
+        </p:nvSpPr>
+        <p:spPr>
+          <a:xfrm>
+            <a:off x="548640" y="4754880"/>
+            <a:ext cx="5120640" cy="1143000"/>
+          </a:xfrm>
+          <a:prstGeom prst="roundRect">
+            <a:avLst>
+              <a:gd name="adj" fmla="val 9600"/>
+            </a:avLst>
+          </a:prstGeom>
+          <a:solidFill>
+            <a:srgbClr val="1F2330"/>
+          </a:solidFill>
+          <a:ln w="12700">
+            <a:solidFill>
+              <a:srgbClr val="1F2330"/>
+            </a:solidFill>
+            <a:prstDash val="solid"/>
+          </a:ln>
+        </p:spPr>
+      </p:sp>
+      <p:sp>
+        <p:nvSpPr>
+          <p:cNvPr id="13" name="Shape 10"/>
+          <p:cNvSpPr/>
+          <p:nvPr/>
+        </p:nvSpPr>
+        <p:spPr>
+          <a:xfrm>
+            <a:off x="914400" y="4956048"/>
+            <a:ext cx="731520" cy="731520"/>
+          </a:xfrm>
+          <a:prstGeom prst="ellipse">
+            <a:avLst/>
+          </a:prstGeom>
+          <a:solidFill>
+            <a:srgbClr val="181B23"/>
+          </a:solidFill>
+          <a:ln w="19050">
+            <a:solidFill>
+              <a:srgbClr val="FFD166"/>
+            </a:solidFill>
+            <a:prstDash val="solid"/>
+          </a:ln>
+        </p:spPr>
+      </p:sp>
+      <p:sp>
+        <p:nvSpPr>
+          <p:cNvPr id="14" name="Text 11"/>
+          <p:cNvSpPr txBox="1"/>
+          <p:nvPr/>
+        </p:nvSpPr>
+        <p:spPr>
+          <a:xfrm>
+            <a:off x="914400" y="4956048"/>
+            <a:ext cx="731520" cy="731520"/>
+          </a:xfrm>
+          <a:prstGeom prst="rect">
+            <a:avLst/>
+          </a:prstGeom>
+          <a:noFill/>
+          <a:ln/>
+        </p:spPr>
+        <p:txBody>
+          <a:bodyPr wrap="square" lIns="0" tIns="0" rIns="0" bIns="0" rtlCol="0" anchor="ctr">
+            <a:normAutofit/>
+          </a:bodyPr>
+          <a:lstStyle/>
+          <a:p>
+            <a:pPr algn="ctr" indent="0" marL="0">
+              <a:buNone/>
+            </a:pPr>
+            <a:r>
+              <a:rPr lang="en-US" sz="1500" b="1" dirty="0">
+                <a:solidFill>
+                  <a:srgbClr val="FFD166"/>
+                </a:solidFill>
+                <a:latin typeface="Arial" pitchFamily="34" charset="0"/>
+                <a:ea typeface="Arial" pitchFamily="34" charset="-122"/>
+                <a:cs typeface="Arial" pitchFamily="34" charset="-120"/>
+              </a:rPr>
+              <a:t>GD</a:t>
+            </a:r>
+            <a:endParaRPr lang="en-US" sz="1500" dirty="0"/>
+          </a:p>
+        </p:txBody>
+      </p:sp>
+      <p:sp>
+        <p:nvSpPr>
+          <p:cNvPr id="15" name="Text 12"/>
+          <p:cNvSpPr txBox="1"/>
+          <p:nvPr/>
+        </p:nvSpPr>
+        <p:spPr>
+          <a:xfrm>
+            <a:off x="1874520" y="4882896"/>
+            <a:ext cx="3611880" cy="347472"/>
+          </a:xfrm>
+          <a:prstGeom prst="rect">
+            <a:avLst/>
+          </a:prstGeom>
+          <a:noFill/>
+          <a:ln/>
+        </p:spPr>
+        <p:txBody>
+          <a:bodyPr wrap="square" lIns="0" tIns="0" rIns="0" bIns="0" rtlCol="0" anchor="t">
+            <a:normAutofit/>
+          </a:bodyPr>
+          <a:lstStyle/>
+          <a:p>
+            <a:pPr indent="0" marL="0">
+              <a:buNone/>
+            </a:pPr>
+            <a:r>
+              <a:rPr lang="en-US" sz="1700" b="1" dirty="0">
+                <a:solidFill>
+                  <a:srgbClr val="FFFFFF"/>
+                </a:solidFill>
+                <a:latin typeface="Arial" pitchFamily="34" charset="0"/>
+                <a:ea typeface="Arial" pitchFamily="34" charset="-122"/>
+                <a:cs typeface="Arial" pitchFamily="34" charset="-120"/>
+              </a:rPr>
+              <a:t>Gönül Demet</a:t>
+            </a:r>
+            <a:endParaRPr lang="en-US" sz="1700" dirty="0"/>
+          </a:p>
+        </p:txBody>
+      </p:sp>
+      <p:sp>
+        <p:nvSpPr>
+          <p:cNvPr id="16" name="Text 13"/>
+          <p:cNvSpPr txBox="1"/>
+          <p:nvPr/>
+        </p:nvSpPr>
+        <p:spPr>
+          <a:xfrm>
+            <a:off x="1874520" y="5230368"/>
+            <a:ext cx="3611880" cy="256032"/>
+          </a:xfrm>
+          <a:prstGeom prst="rect">
+            <a:avLst/>
+          </a:prstGeom>
+          <a:noFill/>
+          <a:ln/>
+        </p:spPr>
+        <p:txBody>
+          <a:bodyPr wrap="square" lIns="0" tIns="0" rIns="0" bIns="0" rtlCol="0" anchor="t">
+            <a:normAutofit/>
+          </a:bodyPr>
+          <a:lstStyle/>
+          <a:p>
+            <a:pPr indent="0" marL="0">
+              <a:buNone/>
+            </a:pPr>
+            <a:r>
+              <a:rPr lang="en-US" sz="1150" b="1" dirty="0">
+                <a:solidFill>
+                  <a:srgbClr val="FFD166"/>
+                </a:solidFill>
+                <a:latin typeface="Arial" pitchFamily="34" charset="0"/>
+                <a:ea typeface="Arial" pitchFamily="34" charset="-122"/>
+                <a:cs typeface="Arial" pitchFamily="34" charset="-120"/>
+              </a:rPr>
+              <a:t>Investor Relations (yatırımcı ilişkileri)</a:t>
+            </a:r>
+            <a:endParaRPr lang="en-US" sz="1150" dirty="0"/>
+          </a:p>
+        </p:txBody>
+      </p:sp>
+      <p:sp>
+        <p:nvSpPr>
+          <p:cNvPr id="17" name="Text 14"/>
+          <p:cNvSpPr txBox="1"/>
+          <p:nvPr/>
+        </p:nvSpPr>
+        <p:spPr>
+          <a:xfrm>
+            <a:off x="1874520" y="5504688"/>
+            <a:ext cx="3611880" cy="329184"/>
+          </a:xfrm>
+          <a:prstGeom prst="rect">
+            <a:avLst/>
+          </a:prstGeom>
+          <a:noFill/>
+          <a:ln/>
+        </p:spPr>
+        <p:txBody>
+          <a:bodyPr wrap="square" lIns="0" tIns="0" rIns="0" bIns="0" rtlCol="0" anchor="t">
+            <a:normAutofit/>
+          </a:bodyPr>
+          <a:lstStyle/>
+          <a:p>
+            <a:pPr indent="0" marL="0">
+              <a:buNone/>
+            </a:pPr>
+            <a:r>
+              <a:rPr lang="en-US" sz="1100" dirty="0">
+                <a:solidFill>
+                  <a:srgbClr val="9AA3B5"/>
+                </a:solidFill>
+                <a:latin typeface="Arial" pitchFamily="34" charset="0"/>
+                <a:ea typeface="Arial" pitchFamily="34" charset="-122"/>
+                <a:cs typeface="Arial" pitchFamily="34" charset="-120"/>
+              </a:rPr>
+              <a:t>Yatırımcılar ve ön tohum turu için iletişim kişisi</a:t>
+            </a:r>
+            <a:endParaRPr lang="en-US" sz="1100" dirty="0"/>
+          </a:p>
+        </p:txBody>
+      </p:sp>
+      <p:sp>
+        <p:nvSpPr>
+          <p:cNvPr id="18" name="Shape 15"/>
           <p:cNvSpPr/>
           <p:nvPr/>
         </p:nvSpPr>
@@ -15132,7 +15348,7 @@
       </p:sp>
       <p:sp>
         <p:nvSpPr>
-          <p:cNvPr id="13" name="Shape 10"/>
+          <p:cNvPr id="19" name="Shape 16"/>
           <p:cNvSpPr/>
           <p:nvPr/>
         </p:nvSpPr>
@@ -15157,7 +15373,7 @@
       </p:sp>
       <p:sp>
         <p:nvSpPr>
-          <p:cNvPr id="14" name="Text 11"/>
+          <p:cNvPr id="20" name="Text 17"/>
           <p:cNvSpPr txBox="1"/>
           <p:nvPr/>
         </p:nvSpPr>
@@ -15196,7 +15412,7 @@
       </p:sp>
       <p:sp>
         <p:nvSpPr>
-          <p:cNvPr id="15" name="Text 12"/>
+          <p:cNvPr id="21" name="Text 18"/>
           <p:cNvSpPr txBox="1"/>
           <p:nvPr/>
         </p:nvSpPr>
@@ -15237,7 +15453,7 @@
       </p:sp>
       <p:sp>
         <p:nvSpPr>
-          <p:cNvPr id="16" name="Text 13"/>
+          <p:cNvPr id="22" name="Text 19"/>
           <p:cNvSpPr txBox="1"/>
           <p:nvPr/>
         </p:nvSpPr>
@@ -15278,7 +15494,7 @@
       </p:sp>
       <p:sp>
         <p:nvSpPr>
-          <p:cNvPr id="17" name="Shape 14"/>
+          <p:cNvPr id="23" name="Shape 20"/>
           <p:cNvSpPr/>
           <p:nvPr/>
         </p:nvSpPr>
@@ -15305,7 +15521,7 @@
       </p:sp>
       <p:sp>
         <p:nvSpPr>
-          <p:cNvPr id="18" name="Shape 15"/>
+          <p:cNvPr id="24" name="Shape 21"/>
           <p:cNvSpPr/>
           <p:nvPr/>
         </p:nvSpPr>
@@ -15330,7 +15546,7 @@
       </p:sp>
       <p:sp>
         <p:nvSpPr>
-          <p:cNvPr id="19" name="Text 16"/>
+          <p:cNvPr id="25" name="Text 22"/>
           <p:cNvSpPr txBox="1"/>
           <p:nvPr/>
         </p:nvSpPr>
@@ -15369,7 +15585,7 @@
       </p:sp>
       <p:sp>
         <p:nvSpPr>
-          <p:cNvPr id="20" name="Text 17"/>
+          <p:cNvPr id="26" name="Text 23"/>
           <p:cNvSpPr txBox="1"/>
           <p:nvPr/>
         </p:nvSpPr>
@@ -15410,7 +15626,7 @@
       </p:sp>
       <p:sp>
         <p:nvSpPr>
-          <p:cNvPr id="21" name="Text 18"/>
+          <p:cNvPr id="27" name="Text 24"/>
           <p:cNvSpPr txBox="1"/>
           <p:nvPr/>
         </p:nvSpPr>
@@ -15451,7 +15667,7 @@
       </p:sp>
       <p:sp>
         <p:nvSpPr>
-          <p:cNvPr id="22" name="Shape 19"/>
+          <p:cNvPr id="28" name="Shape 25"/>
           <p:cNvSpPr/>
           <p:nvPr/>
         </p:nvSpPr>
@@ -15478,7 +15694,7 @@
       </p:sp>
       <p:sp>
         <p:nvSpPr>
-          <p:cNvPr id="23" name="Shape 20"/>
+          <p:cNvPr id="29" name="Shape 26"/>
           <p:cNvSpPr/>
           <p:nvPr/>
         </p:nvSpPr>
@@ -15503,7 +15719,7 @@
       </p:sp>
       <p:sp>
         <p:nvSpPr>
-          <p:cNvPr id="24" name="Text 21"/>
+          <p:cNvPr id="30" name="Text 27"/>
           <p:cNvSpPr txBox="1"/>
           <p:nvPr/>
         </p:nvSpPr>
@@ -15542,7 +15758,7 @@
       </p:sp>
       <p:sp>
         <p:nvSpPr>
-          <p:cNvPr id="25" name="Text 22"/>
+          <p:cNvPr id="31" name="Text 28"/>
           <p:cNvSpPr txBox="1"/>
           <p:nvPr/>
         </p:nvSpPr>
@@ -15583,7 +15799,7 @@
       </p:sp>
       <p:sp>
         <p:nvSpPr>
-          <p:cNvPr id="26" name="Text 23"/>
+          <p:cNvPr id="32" name="Text 29"/>
           <p:cNvSpPr txBox="1"/>
           <p:nvPr/>
         </p:nvSpPr>
@@ -15616,7 +15832,7 @@
                 <a:ea typeface="Arial" pitchFamily="34" charset="-122"/>
                 <a:cs typeface="Arial" pitchFamily="34" charset="-120"/>
               </a:rPr>
-              <a:t>[İsim] · [İsim] · Eğitim teknolojisi/didaktik: [İsim]</a:t>
+              <a:t>Aranıyor: TR içerik üreticisi yönetimi · bir platformun eski „Live“ ürün sorumlusu · eğitim teknolojisi/didaktik</a:t>
             </a:r>
             <a:endParaRPr lang="en-US" sz="1200" dirty="0"/>
           </a:p>
@@ -15770,12 +15986,12 @@
         </p:nvSpPr>
         <p:spPr>
           <a:xfrm>
-            <a:off x="548640" y="1828800"/>
-            <a:ext cx="2670734" cy="3246120"/>
+            <a:off x="548640" y="1783080"/>
+            <a:ext cx="2670734" cy="2103120"/>
           </a:xfrm>
           <a:prstGeom prst="roundRect">
             <a:avLst>
-              <a:gd name="adj" fmla="val 4109"/>
+              <a:gd name="adj" fmla="val 5217"/>
             </a:avLst>
           </a:prstGeom>
           <a:solidFill>
@@ -15797,8 +16013,8 @@
         </p:nvSpPr>
         <p:spPr>
           <a:xfrm>
-            <a:off x="777240" y="1993392"/>
-            <a:ext cx="2213534" cy="685800"/>
+            <a:off x="777240" y="1929384"/>
+            <a:ext cx="2213534" cy="457200"/>
           </a:xfrm>
           <a:prstGeom prst="rect">
             <a:avLst/>
@@ -15816,7 +16032,7 @@
               <a:buNone/>
             </a:pPr>
             <a:r>
-              <a:rPr lang="en-US" sz="1800" b="1" dirty="0">
+              <a:rPr lang="en-US" sz="1600" b="1" dirty="0">
                 <a:solidFill>
                   <a:srgbClr val="FF2D75"/>
                 </a:solidFill>
@@ -15826,7 +16042,7 @@
               </a:rPr>
               <a:t>Platform pilotu</a:t>
             </a:r>
-            <a:endParaRPr lang="en-US" sz="1800" dirty="0"/>
+            <a:endParaRPr lang="en-US" sz="1600" dirty="0"/>
           </a:p>
         </p:txBody>
       </p:sp>
@@ -15838,8 +16054,8 @@
         </p:nvSpPr>
         <p:spPr>
           <a:xfrm>
-            <a:off x="777240" y="2724912"/>
-            <a:ext cx="2213534" cy="2286000"/>
+            <a:off x="777240" y="2423160"/>
+            <a:ext cx="2213534" cy="1371600"/>
           </a:xfrm>
           <a:prstGeom prst="rect">
             <a:avLst/>
@@ -15857,7 +16073,7 @@
               <a:buNone/>
             </a:pPr>
             <a:r>
-              <a:rPr lang="en-US" sz="1300" dirty="0">
+              <a:rPr lang="en-US" sz="1250" dirty="0">
                 <a:solidFill>
                   <a:srgbClr val="FFFFFF"/>
                 </a:solidFill>
@@ -15867,7 +16083,7 @@
               </a:rPr>
               <a:t>LiveFX, TikTok LIVE Studio, Instagram Live Producer ya da YouTube Live'da bir özellik olarak. Tarayıcı kaynağı bugün çalışıyor. 8 hafta, 20 üretici; izlenme süresi, hediyeler ve klipler ölçülür.</a:t>
             </a:r>
-            <a:endParaRPr lang="en-US" sz="1300" dirty="0"/>
+            <a:endParaRPr lang="en-US" sz="1250" dirty="0"/>
           </a:p>
         </p:txBody>
       </p:sp>
@@ -15879,121 +16095,12 @@
         </p:nvSpPr>
         <p:spPr>
           <a:xfrm>
-            <a:off x="3356534" y="1828800"/>
-            <a:ext cx="2670734" cy="3246120"/>
+            <a:off x="3356534" y="1783080"/>
+            <a:ext cx="2670734" cy="2103120"/>
           </a:xfrm>
           <a:prstGeom prst="roundRect">
             <a:avLst>
-              <a:gd name="adj" fmla="val 4109"/>
-            </a:avLst>
-          </a:prstGeom>
-          <a:solidFill>
-            <a:srgbClr val="181B23"/>
-          </a:solidFill>
-          <a:ln w="15875">
-            <a:solidFill>
-              <a:srgbClr val="FFD166"/>
-            </a:solidFill>
-            <a:prstDash val="solid"/>
-          </a:ln>
-        </p:spPr>
-      </p:sp>
-      <p:sp>
-        <p:nvSpPr>
-          <p:cNvPr id="9" name="Text 6"/>
-          <p:cNvSpPr txBox="1"/>
-          <p:nvPr/>
-        </p:nvSpPr>
-        <p:spPr>
-          <a:xfrm>
-            <a:off x="3585134" y="1993392"/>
-            <a:ext cx="2213534" cy="685800"/>
-          </a:xfrm>
-          <a:prstGeom prst="rect">
-            <a:avLst/>
-          </a:prstGeom>
-          <a:noFill/>
-          <a:ln/>
-        </p:spPr>
-        <p:txBody>
-          <a:bodyPr wrap="square" lIns="0" tIns="0" rIns="0" bIns="0" rtlCol="0" anchor="t">
-            <a:normAutofit/>
-          </a:bodyPr>
-          <a:lstStyle/>
-          <a:p>
-            <a:pPr indent="0" marL="0">
-              <a:buNone/>
-            </a:pPr>
-            <a:r>
-              <a:rPr lang="en-US" sz="1800" b="1" dirty="0">
-                <a:solidFill>
-                  <a:srgbClr val="FFD166"/>
-                </a:solidFill>
-                <a:latin typeface="Arial" pitchFamily="34" charset="0"/>
-                <a:ea typeface="Arial" pitchFamily="34" charset="-122"/>
-                <a:cs typeface="Arial" pitchFamily="34" charset="-120"/>
-              </a:rPr>
-              <a:t>Eğitim ve dil pilotu</a:t>
-            </a:r>
-            <a:endParaRPr lang="en-US" sz="1800" dirty="0"/>
-          </a:p>
-        </p:txBody>
-      </p:sp>
-      <p:sp>
-        <p:nvSpPr>
-          <p:cNvPr id="10" name="Text 7"/>
-          <p:cNvSpPr txBox="1"/>
-          <p:nvPr/>
-        </p:nvSpPr>
-        <p:spPr>
-          <a:xfrm>
-            <a:off x="3585134" y="2724912"/>
-            <a:ext cx="2213534" cy="2286000"/>
-          </a:xfrm>
-          <a:prstGeom prst="rect">
-            <a:avLst/>
-          </a:prstGeom>
-          <a:noFill/>
-          <a:ln/>
-        </p:spPr>
-        <p:txBody>
-          <a:bodyPr wrap="square" lIns="0" tIns="0" rIns="0" bIns="0" rtlCol="0" anchor="t">
-            <a:normAutofit/>
-          </a:bodyPr>
-          <a:lstStyle/>
-          <a:p>
-            <a:pPr indent="0" marL="0">
-              <a:buNone/>
-            </a:pPr>
-            <a:r>
-              <a:rPr lang="en-US" sz="1300" dirty="0">
-                <a:solidFill>
-                  <a:srgbClr val="FFFFFF"/>
-                </a:solidFill>
-                <a:latin typeface="Arial" pitchFamily="34" charset="0"/>
-                <a:ea typeface="Arial" pitchFamily="34" charset="-122"/>
-                <a:cs typeface="Arial" pitchFamily="34" charset="-120"/>
-              </a:rPr>
-              <a:t>Eğitim kurumları, uyum kursları, okullar, dil öğrenme platformları ve yayınevleri: Kelime-Resim ve Anlatı Filmi'ni [Sayı] kurs/sınıfta ya da [Sayı] kitapla test edin.</a:t>
-            </a:r>
-            <a:endParaRPr lang="en-US" sz="1300" dirty="0"/>
-          </a:p>
-        </p:txBody>
-      </p:sp>
-      <p:sp>
-        <p:nvSpPr>
-          <p:cNvPr id="11" name="Shape 8"/>
-          <p:cNvSpPr/>
-          <p:nvPr/>
-        </p:nvSpPr>
-        <p:spPr>
-          <a:xfrm>
-            <a:off x="6164428" y="1828800"/>
-            <a:ext cx="2670734" cy="3246120"/>
-          </a:xfrm>
-          <a:prstGeom prst="roundRect">
-            <a:avLst>
-              <a:gd name="adj" fmla="val 4109"/>
+              <a:gd name="adj" fmla="val 5217"/>
             </a:avLst>
           </a:prstGeom>
           <a:solidFill>
@@ -16009,14 +16116,14 @@
       </p:sp>
       <p:sp>
         <p:nvSpPr>
-          <p:cNvPr id="12" name="Text 9"/>
-          <p:cNvSpPr txBox="1"/>
-          <p:nvPr/>
-        </p:nvSpPr>
-        <p:spPr>
-          <a:xfrm>
-            <a:off x="6393028" y="1993392"/>
-            <a:ext cx="2213534" cy="685800"/>
+          <p:cNvPr id="9" name="Text 6"/>
+          <p:cNvSpPr txBox="1"/>
+          <p:nvPr/>
+        </p:nvSpPr>
+        <p:spPr>
+          <a:xfrm>
+            <a:off x="3585134" y="1929384"/>
+            <a:ext cx="2213534" cy="457200"/>
           </a:xfrm>
           <a:prstGeom prst="rect">
             <a:avLst/>
@@ -16034,30 +16141,30 @@
               <a:buNone/>
             </a:pPr>
             <a:r>
-              <a:rPr lang="en-US" sz="1800" b="1" dirty="0">
-                <a:solidFill>
-                  <a:srgbClr val="2DFFB5"/>
-                </a:solidFill>
-                <a:latin typeface="Arial" pitchFamily="34" charset="0"/>
-                <a:ea typeface="Arial" pitchFamily="34" charset="-122"/>
-                <a:cs typeface="Arial" pitchFamily="34" charset="-120"/>
-              </a:rPr>
-              <a:t>Ortaklar</a:t>
-            </a:r>
-            <a:endParaRPr lang="en-US" sz="1800" dirty="0"/>
-          </a:p>
-        </p:txBody>
-      </p:sp>
-      <p:sp>
-        <p:nvSpPr>
-          <p:cNvPr id="13" name="Text 10"/>
-          <p:cNvSpPr txBox="1"/>
-          <p:nvPr/>
-        </p:nvSpPr>
-        <p:spPr>
-          <a:xfrm>
-            <a:off x="6393028" y="2724912"/>
-            <a:ext cx="2213534" cy="2286000"/>
+              <a:rPr lang="en-US" sz="1600" b="1" dirty="0">
+                <a:solidFill>
+                  <a:srgbClr val="FFD166"/>
+                </a:solidFill>
+                <a:latin typeface="Arial" pitchFamily="34" charset="0"/>
+                <a:ea typeface="Arial" pitchFamily="34" charset="-122"/>
+                <a:cs typeface="Arial" pitchFamily="34" charset="-120"/>
+              </a:rPr>
+              <a:t>Eğitim ve dil pilotu</a:t>
+            </a:r>
+            <a:endParaRPr lang="en-US" sz="1600" dirty="0"/>
+          </a:p>
+        </p:txBody>
+      </p:sp>
+      <p:sp>
+        <p:nvSpPr>
+          <p:cNvPr id="10" name="Text 7"/>
+          <p:cNvSpPr txBox="1"/>
+          <p:nvPr/>
+        </p:nvSpPr>
+        <p:spPr>
+          <a:xfrm>
+            <a:off x="3585134" y="2423160"/>
+            <a:ext cx="2213534" cy="1371600"/>
           </a:xfrm>
           <a:prstGeom prst="rect">
             <a:avLst/>
@@ -16075,7 +16182,7 @@
               <a:buNone/>
             </a:pPr>
             <a:r>
-              <a:rPr lang="en-US" sz="1300" dirty="0">
+              <a:rPr lang="en-US" sz="1250" dirty="0">
                 <a:solidFill>
                   <a:srgbClr val="FFFFFF"/>
                 </a:solidFill>
@@ -16083,26 +16190,26 @@
                 <a:ea typeface="Arial" pitchFamily="34" charset="-122"/>
                 <a:cs typeface="Arial" pitchFamily="34" charset="-120"/>
               </a:rPr>
-              <a:t>Yayın yazılımları (OBS eklentisi, Streamlabs), TR / DACH üretici ajansları, ses ve ASR sağlayıcıları, editör sağlayıcıları (Studio SDK).</a:t>
-            </a:r>
-            <a:endParaRPr lang="en-US" sz="1300" dirty="0"/>
-          </a:p>
-        </p:txBody>
-      </p:sp>
-      <p:sp>
-        <p:nvSpPr>
-          <p:cNvPr id="14" name="Shape 11"/>
+              <a:t>Eğitim kurumları, uyum kursları, okullar, dil öğrenme platformları ve yayınevleri: Kelime-Resim ve Anlatı Filmi'ni [Sayı] kurs/sınıfta ya da [Sayı] kitapla test edin.</a:t>
+            </a:r>
+            <a:endParaRPr lang="en-US" sz="1250" dirty="0"/>
+          </a:p>
+        </p:txBody>
+      </p:sp>
+      <p:sp>
+        <p:nvSpPr>
+          <p:cNvPr id="11" name="Shape 8"/>
           <p:cNvSpPr/>
           <p:nvPr/>
         </p:nvSpPr>
         <p:spPr>
           <a:xfrm>
-            <a:off x="8972321" y="1828800"/>
-            <a:ext cx="2670734" cy="3246120"/>
+            <a:off x="6164428" y="1783080"/>
+            <a:ext cx="2670734" cy="2103120"/>
           </a:xfrm>
           <a:prstGeom prst="roundRect">
             <a:avLst>
-              <a:gd name="adj" fmla="val 4109"/>
+              <a:gd name="adj" fmla="val 5217"/>
             </a:avLst>
           </a:prstGeom>
           <a:solidFill>
@@ -16118,14 +16225,123 @@
       </p:sp>
       <p:sp>
         <p:nvSpPr>
+          <p:cNvPr id="12" name="Text 9"/>
+          <p:cNvSpPr txBox="1"/>
+          <p:nvPr/>
+        </p:nvSpPr>
+        <p:spPr>
+          <a:xfrm>
+            <a:off x="6393028" y="1929384"/>
+            <a:ext cx="2213534" cy="457200"/>
+          </a:xfrm>
+          <a:prstGeom prst="rect">
+            <a:avLst/>
+          </a:prstGeom>
+          <a:noFill/>
+          <a:ln/>
+        </p:spPr>
+        <p:txBody>
+          <a:bodyPr wrap="square" lIns="0" tIns="0" rIns="0" bIns="0" rtlCol="0" anchor="t">
+            <a:normAutofit/>
+          </a:bodyPr>
+          <a:lstStyle/>
+          <a:p>
+            <a:pPr indent="0" marL="0">
+              <a:buNone/>
+            </a:pPr>
+            <a:r>
+              <a:rPr lang="en-US" sz="1600" b="1" dirty="0">
+                <a:solidFill>
+                  <a:srgbClr val="2DFFB5"/>
+                </a:solidFill>
+                <a:latin typeface="Arial" pitchFamily="34" charset="0"/>
+                <a:ea typeface="Arial" pitchFamily="34" charset="-122"/>
+                <a:cs typeface="Arial" pitchFamily="34" charset="-120"/>
+              </a:rPr>
+              <a:t>Ortaklar</a:t>
+            </a:r>
+            <a:endParaRPr lang="en-US" sz="1600" dirty="0"/>
+          </a:p>
+        </p:txBody>
+      </p:sp>
+      <p:sp>
+        <p:nvSpPr>
+          <p:cNvPr id="13" name="Text 10"/>
+          <p:cNvSpPr txBox="1"/>
+          <p:nvPr/>
+        </p:nvSpPr>
+        <p:spPr>
+          <a:xfrm>
+            <a:off x="6393028" y="2423160"/>
+            <a:ext cx="2213534" cy="1371600"/>
+          </a:xfrm>
+          <a:prstGeom prst="rect">
+            <a:avLst/>
+          </a:prstGeom>
+          <a:noFill/>
+          <a:ln/>
+        </p:spPr>
+        <p:txBody>
+          <a:bodyPr wrap="square" lIns="0" tIns="0" rIns="0" bIns="0" rtlCol="0" anchor="t">
+            <a:normAutofit/>
+          </a:bodyPr>
+          <a:lstStyle/>
+          <a:p>
+            <a:pPr indent="0" marL="0">
+              <a:buNone/>
+            </a:pPr>
+            <a:r>
+              <a:rPr lang="en-US" sz="1250" dirty="0">
+                <a:solidFill>
+                  <a:srgbClr val="FFFFFF"/>
+                </a:solidFill>
+                <a:latin typeface="Arial" pitchFamily="34" charset="0"/>
+                <a:ea typeface="Arial" pitchFamily="34" charset="-122"/>
+                <a:cs typeface="Arial" pitchFamily="34" charset="-120"/>
+              </a:rPr>
+              <a:t>Yayın yazılımları (OBS eklentisi, Streamlabs), TR / DACH üretici ajansları, ses ve ASR sağlayıcıları, editör sağlayıcıları (Studio SDK).</a:t>
+            </a:r>
+            <a:endParaRPr lang="en-US" sz="1250" dirty="0"/>
+          </a:p>
+        </p:txBody>
+      </p:sp>
+      <p:sp>
+        <p:nvSpPr>
+          <p:cNvPr id="14" name="Shape 11"/>
+          <p:cNvSpPr/>
+          <p:nvPr/>
+        </p:nvSpPr>
+        <p:spPr>
+          <a:xfrm>
+            <a:off x="8972321" y="1783080"/>
+            <a:ext cx="2670734" cy="2103120"/>
+          </a:xfrm>
+          <a:prstGeom prst="roundRect">
+            <a:avLst>
+              <a:gd name="adj" fmla="val 5217"/>
+            </a:avLst>
+          </a:prstGeom>
+          <a:solidFill>
+            <a:srgbClr val="181B23"/>
+          </a:solidFill>
+          <a:ln w="15875">
+            <a:solidFill>
+              <a:srgbClr val="5AD1FF"/>
+            </a:solidFill>
+            <a:prstDash val="solid"/>
+          </a:ln>
+        </p:spPr>
+      </p:sp>
+      <p:sp>
+        <p:nvSpPr>
           <p:cNvPr id="15" name="Text 12"/>
           <p:cNvSpPr txBox="1"/>
           <p:nvPr/>
         </p:nvSpPr>
         <p:spPr>
           <a:xfrm>
-            <a:off x="9200921" y="1993392"/>
-            <a:ext cx="2213534" cy="685800"/>
+            <a:off x="9200921" y="1929384"/>
+            <a:ext cx="2213534" cy="457200"/>
           </a:xfrm>
           <a:prstGeom prst="rect">
             <a:avLst/>
@@ -16143,7 +16359,7 @@
               <a:buNone/>
             </a:pPr>
             <a:r>
-              <a:rPr lang="en-US" sz="1800" b="1" dirty="0">
+              <a:rPr lang="en-US" sz="1600" b="1" dirty="0">
                 <a:solidFill>
                   <a:srgbClr val="5AD1FF"/>
                 </a:solidFill>
@@ -16151,9 +16367,9 @@
                 <a:ea typeface="Arial" pitchFamily="34" charset="-122"/>
                 <a:cs typeface="Arial" pitchFamily="34" charset="-120"/>
               </a:rPr>
-              <a:t>Görüşme ve seed</a:t>
-            </a:r>
-            <a:endParaRPr lang="en-US" sz="1800" dirty="0"/>
+              <a:t>Ön tohum: 500.000 €</a:t>
+            </a:r>
+            <a:endParaRPr lang="en-US" sz="1600" dirty="0"/>
           </a:p>
         </p:txBody>
       </p:sp>
@@ -16165,8 +16381,8 @@
         </p:nvSpPr>
         <p:spPr>
           <a:xfrm>
-            <a:off x="9200921" y="2724912"/>
-            <a:ext cx="2213534" cy="2286000"/>
+            <a:off x="9200921" y="2423160"/>
+            <a:ext cx="2213534" cy="1371600"/>
           </a:xfrm>
           <a:prstGeom prst="rect">
             <a:avLst/>
@@ -16184,7 +16400,7 @@
               <a:buNone/>
             </a:pPr>
             <a:r>
-              <a:rPr lang="en-US" sz="1300" dirty="0">
+              <a:rPr lang="en-US" sz="1250" dirty="0">
                 <a:solidFill>
                   <a:srgbClr val="FFFFFF"/>
                 </a:solidFill>
@@ -16192,9 +16408,9 @@
                 <a:ea typeface="Arial" pitchFamily="34" charset="-122"/>
                 <a:cs typeface="Arial" pitchFamily="34" charset="-120"/>
               </a:rPr>
-              <a:t>Satın alma görüşmesi: teknoloji + ekip. Paralelinde: 18 ay için [Sayı] € seed – 2 işe alım, üretici programı, pilotlar.</a:t>
-            </a:r>
-            <a:endParaRPr lang="en-US" sz="1300" dirty="0"/>
+              <a:t>LiveFX 2.0 ve A–D vizyon hatları için (önce Kelime-Resim ve hikâye motoru), 24 ay. Paralelinde satın alma görüşmelerine açığız (teknoloji + ekip).</a:t>
+            </a:r>
+            <a:endParaRPr lang="en-US" sz="1250" dirty="0"/>
           </a:p>
         </p:txBody>
       </p:sp>
@@ -16206,12 +16422,12 @@
         </p:nvSpPr>
         <p:spPr>
           <a:xfrm>
-            <a:off x="548640" y="5303520"/>
-            <a:ext cx="11094415" cy="713232"/>
+            <a:off x="548640" y="4005072"/>
+            <a:ext cx="11094415" cy="1207008"/>
           </a:xfrm>
           <a:prstGeom prst="roundRect">
             <a:avLst>
-              <a:gd name="adj" fmla="val 15385"/>
+              <a:gd name="adj" fmla="val 9091"/>
             </a:avLst>
           </a:prstGeom>
           <a:solidFill>
@@ -16233,6 +16449,734 @@
         </p:nvSpPr>
         <p:spPr>
           <a:xfrm>
+            <a:off x="822960" y="4087368"/>
+            <a:ext cx="10545775" cy="256032"/>
+          </a:xfrm>
+          <a:prstGeom prst="rect">
+            <a:avLst/>
+          </a:prstGeom>
+          <a:noFill/>
+          <a:ln/>
+        </p:spPr>
+        <p:txBody>
+          <a:bodyPr wrap="square" lIns="0" tIns="0" rIns="0" bIns="0" rtlCol="0" anchor="t">
+            <a:normAutofit/>
+          </a:bodyPr>
+          <a:lstStyle/>
+          <a:p>
+            <a:pPr indent="0" marL="0">
+              <a:buNone/>
+            </a:pPr>
+            <a:r>
+              <a:rPr lang="en-US" sz="1200" b="1" dirty="0">
+                <a:solidFill>
+                  <a:srgbClr val="FFD166"/>
+                </a:solidFill>
+                <a:latin typeface="Arial" pitchFamily="34" charset="0"/>
+                <a:ea typeface="Arial" pitchFamily="34" charset="-122"/>
+                <a:cs typeface="Arial" pitchFamily="34" charset="-120"/>
+              </a:rPr>
+              <a:t>500.000 € ön tohum (pre-seed) · 24 ay · fon kullanımı – Öneri – lütfen onaylayın</a:t>
+            </a:r>
+            <a:endParaRPr lang="en-US" sz="1200" dirty="0"/>
+          </a:p>
+        </p:txBody>
+      </p:sp>
+      <p:sp>
+        <p:nvSpPr>
+          <p:cNvPr id="19" name="Shape 16"/>
+          <p:cNvSpPr/>
+          <p:nvPr/>
+        </p:nvSpPr>
+        <p:spPr>
+          <a:xfrm>
+            <a:off x="822960" y="4407408"/>
+            <a:ext cx="5245456" cy="219456"/>
+          </a:xfrm>
+          <a:prstGeom prst="rect">
+            <a:avLst/>
+          </a:prstGeom>
+          <a:solidFill>
+            <a:srgbClr val="FF2D75"/>
+          </a:solidFill>
+          <a:ln w="12700">
+            <a:solidFill>
+              <a:srgbClr val="FF2D75"/>
+            </a:solidFill>
+            <a:prstDash val="solid"/>
+          </a:ln>
+        </p:spPr>
+      </p:sp>
+      <p:sp>
+        <p:nvSpPr>
+          <p:cNvPr id="20" name="Shape 17"/>
+          <p:cNvSpPr/>
+          <p:nvPr/>
+        </p:nvSpPr>
+        <p:spPr>
+          <a:xfrm>
+            <a:off x="6095848" y="4407408"/>
+            <a:ext cx="2081723" cy="219456"/>
+          </a:xfrm>
+          <a:prstGeom prst="rect">
+            <a:avLst/>
+          </a:prstGeom>
+          <a:solidFill>
+            <a:srgbClr val="2DFFB5"/>
+          </a:solidFill>
+          <a:ln w="12700">
+            <a:solidFill>
+              <a:srgbClr val="2DFFB5"/>
+            </a:solidFill>
+            <a:prstDash val="solid"/>
+          </a:ln>
+        </p:spPr>
+      </p:sp>
+      <p:sp>
+        <p:nvSpPr>
+          <p:cNvPr id="21" name="Shape 18"/>
+          <p:cNvSpPr/>
+          <p:nvPr/>
+        </p:nvSpPr>
+        <p:spPr>
+          <a:xfrm>
+            <a:off x="8205003" y="4407408"/>
+            <a:ext cx="1554434" cy="219456"/>
+          </a:xfrm>
+          <a:prstGeom prst="rect">
+            <a:avLst/>
+          </a:prstGeom>
+          <a:solidFill>
+            <a:srgbClr val="FFD166"/>
+          </a:solidFill>
+          <a:ln w="12700">
+            <a:solidFill>
+              <a:srgbClr val="FFD166"/>
+            </a:solidFill>
+            <a:prstDash val="solid"/>
+          </a:ln>
+        </p:spPr>
+      </p:sp>
+      <p:sp>
+        <p:nvSpPr>
+          <p:cNvPr id="22" name="Shape 19"/>
+          <p:cNvSpPr/>
+          <p:nvPr/>
+        </p:nvSpPr>
+        <p:spPr>
+          <a:xfrm>
+            <a:off x="9786869" y="4407408"/>
+            <a:ext cx="1027146" cy="219456"/>
+          </a:xfrm>
+          <a:prstGeom prst="rect">
+            <a:avLst/>
+          </a:prstGeom>
+          <a:solidFill>
+            <a:srgbClr val="5AD1FF"/>
+          </a:solidFill>
+          <a:ln w="12700">
+            <a:solidFill>
+              <a:srgbClr val="5AD1FF"/>
+            </a:solidFill>
+            <a:prstDash val="solid"/>
+          </a:ln>
+        </p:spPr>
+      </p:sp>
+      <p:sp>
+        <p:nvSpPr>
+          <p:cNvPr id="23" name="Shape 20"/>
+          <p:cNvSpPr/>
+          <p:nvPr/>
+        </p:nvSpPr>
+        <p:spPr>
+          <a:xfrm>
+            <a:off x="10841446" y="4407408"/>
+            <a:ext cx="499857" cy="219456"/>
+          </a:xfrm>
+          <a:prstGeom prst="rect">
+            <a:avLst/>
+          </a:prstGeom>
+          <a:solidFill>
+            <a:srgbClr val="9AA3B5"/>
+          </a:solidFill>
+          <a:ln w="12700">
+            <a:solidFill>
+              <a:srgbClr val="9AA3B5"/>
+            </a:solidFill>
+            <a:prstDash val="solid"/>
+          </a:ln>
+        </p:spPr>
+      </p:sp>
+      <p:sp>
+        <p:nvSpPr>
+          <p:cNvPr id="24" name="Shape 21"/>
+          <p:cNvSpPr/>
+          <p:nvPr/>
+        </p:nvSpPr>
+        <p:spPr>
+          <a:xfrm>
+            <a:off x="822960" y="4773168"/>
+            <a:ext cx="109728" cy="109728"/>
+          </a:xfrm>
+          <a:prstGeom prst="ellipse">
+            <a:avLst/>
+          </a:prstGeom>
+          <a:solidFill>
+            <a:srgbClr val="FF2D75"/>
+          </a:solidFill>
+          <a:ln w="12700">
+            <a:solidFill>
+              <a:srgbClr val="FF2D75"/>
+            </a:solidFill>
+            <a:prstDash val="solid"/>
+          </a:ln>
+        </p:spPr>
+      </p:sp>
+      <p:sp>
+        <p:nvSpPr>
+          <p:cNvPr id="25" name="Text 22"/>
+          <p:cNvSpPr txBox="1"/>
+          <p:nvPr/>
+        </p:nvSpPr>
+        <p:spPr>
+          <a:xfrm>
+            <a:off x="1005840" y="4709160"/>
+            <a:ext cx="1834835" cy="237744"/>
+          </a:xfrm>
+          <a:prstGeom prst="rect">
+            <a:avLst/>
+          </a:prstGeom>
+          <a:noFill/>
+          <a:ln/>
+        </p:spPr>
+        <p:txBody>
+          <a:bodyPr wrap="square" lIns="0" tIns="0" rIns="0" bIns="0" rtlCol="0" anchor="t">
+            <a:normAutofit/>
+          </a:bodyPr>
+          <a:lstStyle/>
+          <a:p>
+            <a:pPr indent="0" marL="0">
+              <a:buNone/>
+            </a:pPr>
+            <a:r>
+              <a:rPr lang="en-US" sz="1000" b="1" dirty="0">
+                <a:solidFill>
+                  <a:srgbClr val="FFFFFF"/>
+                </a:solidFill>
+                <a:latin typeface="Arial" pitchFamily="34" charset="0"/>
+                <a:ea typeface="Arial" pitchFamily="34" charset="-122"/>
+                <a:cs typeface="Arial" pitchFamily="34" charset="-120"/>
+              </a:rPr>
+              <a:t>Ürün ve mühendislik</a:t>
+            </a:r>
+            <a:endParaRPr lang="en-US" sz="1000" dirty="0"/>
+          </a:p>
+        </p:txBody>
+      </p:sp>
+      <p:sp>
+        <p:nvSpPr>
+          <p:cNvPr id="26" name="Text 23"/>
+          <p:cNvSpPr txBox="1"/>
+          <p:nvPr/>
+        </p:nvSpPr>
+        <p:spPr>
+          <a:xfrm>
+            <a:off x="1005840" y="4937760"/>
+            <a:ext cx="1834835" cy="219456"/>
+          </a:xfrm>
+          <a:prstGeom prst="rect">
+            <a:avLst/>
+          </a:prstGeom>
+          <a:noFill/>
+          <a:ln/>
+        </p:spPr>
+        <p:txBody>
+          <a:bodyPr wrap="square" lIns="0" tIns="0" rIns="0" bIns="0" rtlCol="0" anchor="t">
+            <a:normAutofit/>
+          </a:bodyPr>
+          <a:lstStyle/>
+          <a:p>
+            <a:pPr indent="0" marL="0">
+              <a:buNone/>
+            </a:pPr>
+            <a:r>
+              <a:rPr lang="en-US" sz="1000" dirty="0">
+                <a:solidFill>
+                  <a:srgbClr val="9AA3B5"/>
+                </a:solidFill>
+                <a:latin typeface="Arial" pitchFamily="34" charset="0"/>
+                <a:ea typeface="Arial" pitchFamily="34" charset="-122"/>
+                <a:cs typeface="Arial" pitchFamily="34" charset="-120"/>
+              </a:rPr>
+              <a:t>250 bin € · %50</a:t>
+            </a:r>
+            <a:endParaRPr lang="en-US" sz="1000" dirty="0"/>
+          </a:p>
+        </p:txBody>
+      </p:sp>
+      <p:sp>
+        <p:nvSpPr>
+          <p:cNvPr id="27" name="Shape 24"/>
+          <p:cNvSpPr/>
+          <p:nvPr/>
+        </p:nvSpPr>
+        <p:spPr>
+          <a:xfrm>
+            <a:off x="2932115" y="4773168"/>
+            <a:ext cx="109728" cy="109728"/>
+          </a:xfrm>
+          <a:prstGeom prst="ellipse">
+            <a:avLst/>
+          </a:prstGeom>
+          <a:solidFill>
+            <a:srgbClr val="2DFFB5"/>
+          </a:solidFill>
+          <a:ln w="12700">
+            <a:solidFill>
+              <a:srgbClr val="2DFFB5"/>
+            </a:solidFill>
+            <a:prstDash val="solid"/>
+          </a:ln>
+        </p:spPr>
+      </p:sp>
+      <p:sp>
+        <p:nvSpPr>
+          <p:cNvPr id="28" name="Text 25"/>
+          <p:cNvSpPr txBox="1"/>
+          <p:nvPr/>
+        </p:nvSpPr>
+        <p:spPr>
+          <a:xfrm>
+            <a:off x="3114995" y="4709160"/>
+            <a:ext cx="1834835" cy="237744"/>
+          </a:xfrm>
+          <a:prstGeom prst="rect">
+            <a:avLst/>
+          </a:prstGeom>
+          <a:noFill/>
+          <a:ln/>
+        </p:spPr>
+        <p:txBody>
+          <a:bodyPr wrap="square" lIns="0" tIns="0" rIns="0" bIns="0" rtlCol="0" anchor="t">
+            <a:normAutofit/>
+          </a:bodyPr>
+          <a:lstStyle/>
+          <a:p>
+            <a:pPr indent="0" marL="0">
+              <a:buNone/>
+            </a:pPr>
+            <a:r>
+              <a:rPr lang="en-US" sz="1000" b="1" dirty="0">
+                <a:solidFill>
+                  <a:srgbClr val="FFFFFF"/>
+                </a:solidFill>
+                <a:latin typeface="Arial" pitchFamily="34" charset="0"/>
+                <a:ea typeface="Arial" pitchFamily="34" charset="-122"/>
+                <a:cs typeface="Arial" pitchFamily="34" charset="-120"/>
+              </a:rPr>
+              <a:t>Vizyon hatları A–D</a:t>
+            </a:r>
+            <a:endParaRPr lang="en-US" sz="1000" dirty="0"/>
+          </a:p>
+        </p:txBody>
+      </p:sp>
+      <p:sp>
+        <p:nvSpPr>
+          <p:cNvPr id="29" name="Text 26"/>
+          <p:cNvSpPr txBox="1"/>
+          <p:nvPr/>
+        </p:nvSpPr>
+        <p:spPr>
+          <a:xfrm>
+            <a:off x="3114995" y="4937760"/>
+            <a:ext cx="1834835" cy="219456"/>
+          </a:xfrm>
+          <a:prstGeom prst="rect">
+            <a:avLst/>
+          </a:prstGeom>
+          <a:noFill/>
+          <a:ln/>
+        </p:spPr>
+        <p:txBody>
+          <a:bodyPr wrap="square" lIns="0" tIns="0" rIns="0" bIns="0" rtlCol="0" anchor="t">
+            <a:normAutofit/>
+          </a:bodyPr>
+          <a:lstStyle/>
+          <a:p>
+            <a:pPr indent="0" marL="0">
+              <a:buNone/>
+            </a:pPr>
+            <a:r>
+              <a:rPr lang="en-US" sz="1000" dirty="0">
+                <a:solidFill>
+                  <a:srgbClr val="9AA3B5"/>
+                </a:solidFill>
+                <a:latin typeface="Arial" pitchFamily="34" charset="0"/>
+                <a:ea typeface="Arial" pitchFamily="34" charset="-122"/>
+                <a:cs typeface="Arial" pitchFamily="34" charset="-120"/>
+              </a:rPr>
+              <a:t>100 bin € · %20</a:t>
+            </a:r>
+            <a:endParaRPr lang="en-US" sz="1000" dirty="0"/>
+          </a:p>
+        </p:txBody>
+      </p:sp>
+      <p:sp>
+        <p:nvSpPr>
+          <p:cNvPr id="30" name="Shape 27"/>
+          <p:cNvSpPr/>
+          <p:nvPr/>
+        </p:nvSpPr>
+        <p:spPr>
+          <a:xfrm>
+            <a:off x="5041270" y="4773168"/>
+            <a:ext cx="109728" cy="109728"/>
+          </a:xfrm>
+          <a:prstGeom prst="ellipse">
+            <a:avLst/>
+          </a:prstGeom>
+          <a:solidFill>
+            <a:srgbClr val="FFD166"/>
+          </a:solidFill>
+          <a:ln w="12700">
+            <a:solidFill>
+              <a:srgbClr val="FFD166"/>
+            </a:solidFill>
+            <a:prstDash val="solid"/>
+          </a:ln>
+        </p:spPr>
+      </p:sp>
+      <p:sp>
+        <p:nvSpPr>
+          <p:cNvPr id="31" name="Text 28"/>
+          <p:cNvSpPr txBox="1"/>
+          <p:nvPr/>
+        </p:nvSpPr>
+        <p:spPr>
+          <a:xfrm>
+            <a:off x="5224150" y="4709160"/>
+            <a:ext cx="1834835" cy="237744"/>
+          </a:xfrm>
+          <a:prstGeom prst="rect">
+            <a:avLst/>
+          </a:prstGeom>
+          <a:noFill/>
+          <a:ln/>
+        </p:spPr>
+        <p:txBody>
+          <a:bodyPr wrap="square" lIns="0" tIns="0" rIns="0" bIns="0" rtlCol="0" anchor="t">
+            <a:normAutofit/>
+          </a:bodyPr>
+          <a:lstStyle/>
+          <a:p>
+            <a:pPr indent="0" marL="0">
+              <a:buNone/>
+            </a:pPr>
+            <a:r>
+              <a:rPr lang="en-US" sz="1000" b="1" dirty="0">
+                <a:solidFill>
+                  <a:srgbClr val="FFFFFF"/>
+                </a:solidFill>
+                <a:latin typeface="Arial" pitchFamily="34" charset="0"/>
+                <a:ea typeface="Arial" pitchFamily="34" charset="-122"/>
+                <a:cs typeface="Arial" pitchFamily="34" charset="-120"/>
+              </a:rPr>
+              <a:t>Pazara giriş ve pilotlar</a:t>
+            </a:r>
+            <a:endParaRPr lang="en-US" sz="1000" dirty="0"/>
+          </a:p>
+        </p:txBody>
+      </p:sp>
+      <p:sp>
+        <p:nvSpPr>
+          <p:cNvPr id="32" name="Text 29"/>
+          <p:cNvSpPr txBox="1"/>
+          <p:nvPr/>
+        </p:nvSpPr>
+        <p:spPr>
+          <a:xfrm>
+            <a:off x="5224150" y="4937760"/>
+            <a:ext cx="1834835" cy="219456"/>
+          </a:xfrm>
+          <a:prstGeom prst="rect">
+            <a:avLst/>
+          </a:prstGeom>
+          <a:noFill/>
+          <a:ln/>
+        </p:spPr>
+        <p:txBody>
+          <a:bodyPr wrap="square" lIns="0" tIns="0" rIns="0" bIns="0" rtlCol="0" anchor="t">
+            <a:normAutofit/>
+          </a:bodyPr>
+          <a:lstStyle/>
+          <a:p>
+            <a:pPr indent="0" marL="0">
+              <a:buNone/>
+            </a:pPr>
+            <a:r>
+              <a:rPr lang="en-US" sz="1000" dirty="0">
+                <a:solidFill>
+                  <a:srgbClr val="9AA3B5"/>
+                </a:solidFill>
+                <a:latin typeface="Arial" pitchFamily="34" charset="0"/>
+                <a:ea typeface="Arial" pitchFamily="34" charset="-122"/>
+                <a:cs typeface="Arial" pitchFamily="34" charset="-120"/>
+              </a:rPr>
+              <a:t>75 bin € · %15</a:t>
+            </a:r>
+            <a:endParaRPr lang="en-US" sz="1000" dirty="0"/>
+          </a:p>
+        </p:txBody>
+      </p:sp>
+      <p:sp>
+        <p:nvSpPr>
+          <p:cNvPr id="33" name="Shape 30"/>
+          <p:cNvSpPr/>
+          <p:nvPr/>
+        </p:nvSpPr>
+        <p:spPr>
+          <a:xfrm>
+            <a:off x="7150425" y="4773168"/>
+            <a:ext cx="109728" cy="109728"/>
+          </a:xfrm>
+          <a:prstGeom prst="ellipse">
+            <a:avLst/>
+          </a:prstGeom>
+          <a:solidFill>
+            <a:srgbClr val="5AD1FF"/>
+          </a:solidFill>
+          <a:ln w="12700">
+            <a:solidFill>
+              <a:srgbClr val="5AD1FF"/>
+            </a:solidFill>
+            <a:prstDash val="solid"/>
+          </a:ln>
+        </p:spPr>
+      </p:sp>
+      <p:sp>
+        <p:nvSpPr>
+          <p:cNvPr id="34" name="Text 31"/>
+          <p:cNvSpPr txBox="1"/>
+          <p:nvPr/>
+        </p:nvSpPr>
+        <p:spPr>
+          <a:xfrm>
+            <a:off x="7333305" y="4709160"/>
+            <a:ext cx="1834835" cy="237744"/>
+          </a:xfrm>
+          <a:prstGeom prst="rect">
+            <a:avLst/>
+          </a:prstGeom>
+          <a:noFill/>
+          <a:ln/>
+        </p:spPr>
+        <p:txBody>
+          <a:bodyPr wrap="square" lIns="0" tIns="0" rIns="0" bIns="0" rtlCol="0" anchor="t">
+            <a:normAutofit/>
+          </a:bodyPr>
+          <a:lstStyle/>
+          <a:p>
+            <a:pPr indent="0" marL="0">
+              <a:buNone/>
+            </a:pPr>
+            <a:r>
+              <a:rPr lang="en-US" sz="1000" b="1" dirty="0">
+                <a:solidFill>
+                  <a:srgbClr val="FFFFFF"/>
+                </a:solidFill>
+                <a:latin typeface="Arial" pitchFamily="34" charset="0"/>
+                <a:ea typeface="Arial" pitchFamily="34" charset="-122"/>
+                <a:cs typeface="Arial" pitchFamily="34" charset="-120"/>
+              </a:rPr>
+              <a:t>Hukuk, marka, veri koruma</a:t>
+            </a:r>
+            <a:endParaRPr lang="en-US" sz="1000" dirty="0"/>
+          </a:p>
+        </p:txBody>
+      </p:sp>
+      <p:sp>
+        <p:nvSpPr>
+          <p:cNvPr id="35" name="Text 32"/>
+          <p:cNvSpPr txBox="1"/>
+          <p:nvPr/>
+        </p:nvSpPr>
+        <p:spPr>
+          <a:xfrm>
+            <a:off x="7333305" y="4937760"/>
+            <a:ext cx="1834835" cy="219456"/>
+          </a:xfrm>
+          <a:prstGeom prst="rect">
+            <a:avLst/>
+          </a:prstGeom>
+          <a:noFill/>
+          <a:ln/>
+        </p:spPr>
+        <p:txBody>
+          <a:bodyPr wrap="square" lIns="0" tIns="0" rIns="0" bIns="0" rtlCol="0" anchor="t">
+            <a:normAutofit/>
+          </a:bodyPr>
+          <a:lstStyle/>
+          <a:p>
+            <a:pPr indent="0" marL="0">
+              <a:buNone/>
+            </a:pPr>
+            <a:r>
+              <a:rPr lang="en-US" sz="1000" dirty="0">
+                <a:solidFill>
+                  <a:srgbClr val="9AA3B5"/>
+                </a:solidFill>
+                <a:latin typeface="Arial" pitchFamily="34" charset="0"/>
+                <a:ea typeface="Arial" pitchFamily="34" charset="-122"/>
+                <a:cs typeface="Arial" pitchFamily="34" charset="-120"/>
+              </a:rPr>
+              <a:t>50 bin € · %10</a:t>
+            </a:r>
+            <a:endParaRPr lang="en-US" sz="1000" dirty="0"/>
+          </a:p>
+        </p:txBody>
+      </p:sp>
+      <p:sp>
+        <p:nvSpPr>
+          <p:cNvPr id="36" name="Shape 33"/>
+          <p:cNvSpPr/>
+          <p:nvPr/>
+        </p:nvSpPr>
+        <p:spPr>
+          <a:xfrm>
+            <a:off x="9259580" y="4773168"/>
+            <a:ext cx="109728" cy="109728"/>
+          </a:xfrm>
+          <a:prstGeom prst="ellipse">
+            <a:avLst/>
+          </a:prstGeom>
+          <a:solidFill>
+            <a:srgbClr val="9AA3B5"/>
+          </a:solidFill>
+          <a:ln w="12700">
+            <a:solidFill>
+              <a:srgbClr val="9AA3B5"/>
+            </a:solidFill>
+            <a:prstDash val="solid"/>
+          </a:ln>
+        </p:spPr>
+      </p:sp>
+      <p:sp>
+        <p:nvSpPr>
+          <p:cNvPr id="37" name="Text 34"/>
+          <p:cNvSpPr txBox="1"/>
+          <p:nvPr/>
+        </p:nvSpPr>
+        <p:spPr>
+          <a:xfrm>
+            <a:off x="9442460" y="4709160"/>
+            <a:ext cx="1834835" cy="237744"/>
+          </a:xfrm>
+          <a:prstGeom prst="rect">
+            <a:avLst/>
+          </a:prstGeom>
+          <a:noFill/>
+          <a:ln/>
+        </p:spPr>
+        <p:txBody>
+          <a:bodyPr wrap="square" lIns="0" tIns="0" rIns="0" bIns="0" rtlCol="0" anchor="t">
+            <a:normAutofit/>
+          </a:bodyPr>
+          <a:lstStyle/>
+          <a:p>
+            <a:pPr indent="0" marL="0">
+              <a:buNone/>
+            </a:pPr>
+            <a:r>
+              <a:rPr lang="en-US" sz="1000" b="1" dirty="0">
+                <a:solidFill>
+                  <a:srgbClr val="FFFFFF"/>
+                </a:solidFill>
+                <a:latin typeface="Arial" pitchFamily="34" charset="0"/>
+                <a:ea typeface="Arial" pitchFamily="34" charset="-122"/>
+                <a:cs typeface="Arial" pitchFamily="34" charset="-120"/>
+              </a:rPr>
+              <a:t>Rezerv</a:t>
+            </a:r>
+            <a:endParaRPr lang="en-US" sz="1000" dirty="0"/>
+          </a:p>
+        </p:txBody>
+      </p:sp>
+      <p:sp>
+        <p:nvSpPr>
+          <p:cNvPr id="38" name="Text 35"/>
+          <p:cNvSpPr txBox="1"/>
+          <p:nvPr/>
+        </p:nvSpPr>
+        <p:spPr>
+          <a:xfrm>
+            <a:off x="9442460" y="4937760"/>
+            <a:ext cx="1834835" cy="219456"/>
+          </a:xfrm>
+          <a:prstGeom prst="rect">
+            <a:avLst/>
+          </a:prstGeom>
+          <a:noFill/>
+          <a:ln/>
+        </p:spPr>
+        <p:txBody>
+          <a:bodyPr wrap="square" lIns="0" tIns="0" rIns="0" bIns="0" rtlCol="0" anchor="t">
+            <a:normAutofit/>
+          </a:bodyPr>
+          <a:lstStyle/>
+          <a:p>
+            <a:pPr indent="0" marL="0">
+              <a:buNone/>
+            </a:pPr>
+            <a:r>
+              <a:rPr lang="en-US" sz="1000" dirty="0">
+                <a:solidFill>
+                  <a:srgbClr val="9AA3B5"/>
+                </a:solidFill>
+                <a:latin typeface="Arial" pitchFamily="34" charset="0"/>
+                <a:ea typeface="Arial" pitchFamily="34" charset="-122"/>
+                <a:cs typeface="Arial" pitchFamily="34" charset="-120"/>
+              </a:rPr>
+              <a:t>25 bin € · %5</a:t>
+            </a:r>
+            <a:endParaRPr lang="en-US" sz="1000" dirty="0"/>
+          </a:p>
+        </p:txBody>
+      </p:sp>
+      <p:sp>
+        <p:nvSpPr>
+          <p:cNvPr id="39" name="Shape 36"/>
+          <p:cNvSpPr/>
+          <p:nvPr/>
+        </p:nvSpPr>
+        <p:spPr>
+          <a:xfrm>
+            <a:off x="548640" y="5303520"/>
+            <a:ext cx="11094415" cy="713232"/>
+          </a:xfrm>
+          <a:prstGeom prst="roundRect">
+            <a:avLst>
+              <a:gd name="adj" fmla="val 15385"/>
+            </a:avLst>
+          </a:prstGeom>
+          <a:solidFill>
+            <a:srgbClr val="1F2330"/>
+          </a:solidFill>
+          <a:ln w="12700">
+            <a:solidFill>
+              <a:srgbClr val="1F2330"/>
+            </a:solidFill>
+            <a:prstDash val="solid"/>
+          </a:ln>
+        </p:spPr>
+      </p:sp>
+      <p:sp>
+        <p:nvSpPr>
+          <p:cNvPr id="40" name="Text 37"/>
+          <p:cNvSpPr txBox="1"/>
+          <p:nvPr/>
+        </p:nvSpPr>
+        <p:spPr>
+          <a:xfrm>
             <a:off x="822960" y="5321808"/>
             <a:ext cx="10545775" cy="676656"/>
           </a:xfrm>
@@ -16260,7 +17204,7 @@
                 <a:ea typeface="Arial" pitchFamily="34" charset="-122"/>
                 <a:cs typeface="Arial" pitchFamily="34" charset="-120"/>
               </a:rPr>
-              <a:t>İletişim: [E-posta]   ·   Demo: [Bağlantı]   ·   Kod ve doküman: live-fx/   ·   [İsim]</a:t>
+              <a:t>Tuncay Sancak, Kurucu &amp; Genel Müdür   ·   Investor Relations: Gönül Demet   ·   [E-posta]   ·   Demo: [Bağlantı]</a:t>
             </a:r>
             <a:endParaRPr lang="en-US" sz="1500" dirty="0"/>
           </a:p>
@@ -16268,7 +17212,7 @@
       </p:sp>
       <p:sp>
         <p:nvSpPr>
-          <p:cNvPr id="19" name="Text 16"/>
+          <p:cNvPr id="41" name="Text 38"/>
           <p:cNvSpPr txBox="1"/>
           <p:nvPr/>
         </p:nvSpPr>
@@ -16309,14 +17253,14 @@
       </p:sp>
       <p:sp>
         <p:nvSpPr>
-          <p:cNvPr id="20" name="Text 17"/>
-          <p:cNvSpPr txBox="1"/>
-          <p:nvPr/>
-        </p:nvSpPr>
-        <p:spPr>
-          <a:xfrm>
-            <a:off x="9357055" y="6473952"/>
-            <a:ext cx="2286000" cy="228600"/>
+          <p:cNvPr id="42" name="Text 39"/>
+          <p:cNvSpPr txBox="1"/>
+          <p:nvPr/>
+        </p:nvSpPr>
+        <p:spPr>
+          <a:xfrm>
+            <a:off x="7071055" y="6473952"/>
+            <a:ext cx="4572000" cy="228600"/>
           </a:xfrm>
           <a:prstGeom prst="rect">
             <a:avLst/>
@@ -16340,7 +17284,7 @@
                 <a:ea typeface="Arial" pitchFamily="34" charset="-122"/>
                 <a:cs typeface="Arial" pitchFamily="34" charset="-120"/>
               </a:rPr>
-              <a:t>LiveFX  ·  17</a:t>
+              <a:t>Gizli · Ekim 2026  ·  LiveFX  ·  17</a:t>
             </a:r>
             <a:endParaRPr lang="en-US" sz="900" dirty="0"/>
           </a:p>
@@ -16466,8 +17410,8 @@
         </p:nvSpPr>
         <p:spPr>
           <a:xfrm>
-            <a:off x="9357055" y="6473952"/>
-            <a:ext cx="2286000" cy="228600"/>
+            <a:off x="7071055" y="6473952"/>
+            <a:ext cx="4572000" cy="228600"/>
           </a:xfrm>
           <a:prstGeom prst="rect">
             <a:avLst/>
@@ -16491,7 +17435,7 @@
                 <a:ea typeface="Arial" pitchFamily="34" charset="-122"/>
                 <a:cs typeface="Arial" pitchFamily="34" charset="-120"/>
               </a:rPr>
-              <a:t>LiveFX  ·  2</a:t>
+              <a:t>Gizli · Ekim 2026  ·  LiveFX  ·  2</a:t>
             </a:r>
             <a:endParaRPr lang="en-US" sz="900" dirty="0"/>
           </a:p>
@@ -17160,7 +18104,7 @@
                 <a:ea typeface="Arial" pitchFamily="34" charset="-122"/>
                 <a:cs typeface="Arial" pitchFamily="34" charset="-120"/>
               </a:rPr>
-              <a:t>“‘Efsane’ diyorum – ve hiçbir şey olmuyor, klavyeye kendim uzanmazsam.”  – [İsim], kendi yayınından</a:t>
+              <a:t>“‘Efsane’ diyorum – ve hiçbir şey olmuyor, klavyeye kendim uzanmazsam.”  – Tuncay Sancak, kendi yayınından</a:t>
             </a:r>
             <a:endParaRPr lang="en-US" sz="1400" dirty="0"/>
           </a:p>
@@ -17286,8 +18230,8 @@
         </p:nvSpPr>
         <p:spPr>
           <a:xfrm>
-            <a:off x="9357055" y="6473952"/>
-            <a:ext cx="2286000" cy="228600"/>
+            <a:off x="7071055" y="6473952"/>
+            <a:ext cx="4572000" cy="228600"/>
           </a:xfrm>
           <a:prstGeom prst="rect">
             <a:avLst/>
@@ -17311,7 +18255,7 @@
                 <a:ea typeface="Arial" pitchFamily="34" charset="-122"/>
                 <a:cs typeface="Arial" pitchFamily="34" charset="-120"/>
               </a:rPr>
-              <a:t>LiveFX  ·  3</a:t>
+              <a:t>Gizli · Ekim 2026  ·  LiveFX  ·  3</a:t>
             </a:r>
             <a:endParaRPr lang="en-US" sz="900" dirty="0"/>
           </a:p>
@@ -18924,8 +19868,8 @@
         </p:nvSpPr>
         <p:spPr>
           <a:xfrm>
-            <a:off x="9357055" y="6473952"/>
-            <a:ext cx="2286000" cy="228600"/>
+            <a:off x="7071055" y="6473952"/>
+            <a:ext cx="4572000" cy="228600"/>
           </a:xfrm>
           <a:prstGeom prst="rect">
             <a:avLst/>
@@ -18949,7 +19893,7 @@
                 <a:ea typeface="Arial" pitchFamily="34" charset="-122"/>
                 <a:cs typeface="Arial" pitchFamily="34" charset="-120"/>
               </a:rPr>
-              <a:t>LiveFX  ·  4</a:t>
+              <a:t>Gizli · Ekim 2026  ·  LiveFX  ·  4</a:t>
             </a:r>
             <a:endParaRPr lang="en-US" sz="900" dirty="0"/>
           </a:p>
@@ -19338,8 +20282,8 @@
         </p:nvSpPr>
         <p:spPr>
           <a:xfrm>
-            <a:off x="9357055" y="6473952"/>
-            <a:ext cx="2286000" cy="228600"/>
+            <a:off x="7071055" y="6473952"/>
+            <a:ext cx="4572000" cy="228600"/>
           </a:xfrm>
           <a:prstGeom prst="rect">
             <a:avLst/>
@@ -19363,7 +20307,7 @@
                 <a:ea typeface="Arial" pitchFamily="34" charset="-122"/>
                 <a:cs typeface="Arial" pitchFamily="34" charset="-120"/>
               </a:rPr>
-              <a:t>LiveFX  ·  5</a:t>
+              <a:t>Gizli · Ekim 2026  ·  LiveFX  ·  5</a:t>
             </a:r>
             <a:endParaRPr lang="en-US" sz="900" dirty="0"/>
           </a:p>
@@ -20673,8 +21617,8 @@
         </p:nvSpPr>
         <p:spPr>
           <a:xfrm>
-            <a:off x="9357055" y="6473952"/>
-            <a:ext cx="2286000" cy="228600"/>
+            <a:off x="7071055" y="6473952"/>
+            <a:ext cx="4572000" cy="228600"/>
           </a:xfrm>
           <a:prstGeom prst="rect">
             <a:avLst/>
@@ -20698,7 +21642,7 @@
                 <a:ea typeface="Arial" pitchFamily="34" charset="-122"/>
                 <a:cs typeface="Arial" pitchFamily="34" charset="-120"/>
               </a:rPr>
-              <a:t>LiveFX  ·  6</a:t>
+              <a:t>Gizli · Ekim 2026  ·  LiveFX  ·  6</a:t>
             </a:r>
             <a:endParaRPr lang="en-US" sz="900" dirty="0"/>
           </a:p>
@@ -21438,8 +22382,8 @@
         </p:nvSpPr>
         <p:spPr>
           <a:xfrm>
-            <a:off x="9357055" y="6473952"/>
-            <a:ext cx="2286000" cy="228600"/>
+            <a:off x="7071055" y="6473952"/>
+            <a:ext cx="4572000" cy="228600"/>
           </a:xfrm>
           <a:prstGeom prst="rect">
             <a:avLst/>
@@ -21463,7 +22407,7 @@
                 <a:ea typeface="Arial" pitchFamily="34" charset="-122"/>
                 <a:cs typeface="Arial" pitchFamily="34" charset="-120"/>
               </a:rPr>
-              <a:t>LiveFX  ·  7</a:t>
+              <a:t>Gizli · Ekim 2026  ·  LiveFX  ·  7</a:t>
             </a:r>
             <a:endParaRPr lang="en-US" sz="900" dirty="0"/>
           </a:p>
@@ -21929,7 +22873,7 @@
                 <a:ea typeface="Arial" pitchFamily="34" charset="-122"/>
                 <a:cs typeface="Arial" pitchFamily="34" charset="-120"/>
               </a:rPr>
-              <a:t>20–40 bin Pro abone × ayda 9,99 € ≈ 2,4–4,8 milyon € ARR (DACH + Türkiye + EN niş)</a:t>
+              <a:t>5.000–15.000 ücretli Pro kullanıcı × ayda 9,99 € ≈ 0,6–1,8 milyon € ARR (iş planıyla aynı; DACH + Türkiye + EN niş)</a:t>
             </a:r>
             <a:endParaRPr lang="en-US" sz="1050" dirty="0"/>
           </a:p>
@@ -22573,8 +23517,8 @@
         </p:nvSpPr>
         <p:spPr>
           <a:xfrm>
-            <a:off x="9357055" y="6473952"/>
-            <a:ext cx="2286000" cy="228600"/>
+            <a:off x="7071055" y="6473952"/>
+            <a:ext cx="4572000" cy="228600"/>
           </a:xfrm>
           <a:prstGeom prst="rect">
             <a:avLst/>
@@ -22598,7 +23542,7 @@
                 <a:ea typeface="Arial" pitchFamily="34" charset="-122"/>
                 <a:cs typeface="Arial" pitchFamily="34" charset="-120"/>
               </a:rPr>
-              <a:t>LiveFX  ·  8</a:t>
+              <a:t>Gizli · Ekim 2026  ·  LiveFX  ·  8</a:t>
             </a:r>
             <a:endParaRPr lang="en-US" sz="900" dirty="0"/>
           </a:p>
@@ -23567,8 +24511,8 @@
         </p:nvSpPr>
         <p:spPr>
           <a:xfrm>
-            <a:off x="9357055" y="6473952"/>
-            <a:ext cx="2286000" cy="228600"/>
+            <a:off x="7071055" y="6473952"/>
+            <a:ext cx="4572000" cy="228600"/>
           </a:xfrm>
           <a:prstGeom prst="rect">
             <a:avLst/>
@@ -23592,7 +24536,7 @@
                 <a:ea typeface="Arial" pitchFamily="34" charset="-122"/>
                 <a:cs typeface="Arial" pitchFamily="34" charset="-120"/>
               </a:rPr>
-              <a:t>LiveFX  ·  9</a:t>
+              <a:t>Gizli · Ekim 2026  ·  LiveFX  ·  9</a:t>
             </a:r>
             <a:endParaRPr lang="en-US" sz="900" dirty="0"/>
           </a:p>

--- a/live-fx/business/LiveFX_Pitch_TR.pptx
+++ b/live-fx/business/LiveFX_Pitch_TR.pptx
@@ -22,9 +22,11 @@
     <p:sldId id="270" r:id="rId16"/>
     <p:sldId id="271" r:id="rId17"/>
     <p:sldId id="272" r:id="rId18"/>
+    <p:sldId id="273" r:id="rId19"/>
+    <p:sldId id="274" r:id="rId20"/>
   </p:sldIdLst>
   <p:notesMasterIdLst>
-    <p:notesMasterId r:id="rId19"/>
+    <p:notesMasterId r:id="rId21"/>
   </p:notesMasterIdLst>
   <p:sldSz cx="12192000" cy="6858000"/>
   <p:notesSz cx="6858000" cy="12192000"/>
@@ -123,7 +125,7 @@
   <p:extLst>
     <p:ext uri="{521415D9-36F7-43E2-AB2F-B90AF26B5E84}">
       <p14:sectionLst xmlns:p14="http://schemas.microsoft.com/office/powerpoint/2010/main">
-        <p14:section name="Bugün: LiveFX 2.0" id="{1cf5f461-ac97-35de-dc62-40ba9d0f97e8}">
+        <p14:section name="Bugün: LiveFX 2.1" id="{289d13c8-e197-a19e-330d-f765c58d7e57}">
           <p14:sldIdLst>
             <p14:sldId id="256"/>
             <p14:sldId id="257"/>
@@ -138,7 +140,7 @@
             <p14:sldId id="266"/>
           </p14:sldIdLst>
         </p14:section>
-        <p14:section name="Vizyon 2027–2029" id="{d7a36b27-9c33-909d-2646-ba684a291a9d}">
+        <p14:section name="Vizyon 2027–2029" id="{1a17b2a7-b126-1fa3-18b3-661115ade20d}">
           <p14:sldIdLst>
             <p14:sldId id="267"/>
             <p14:sldId id="268"/>
@@ -146,10 +148,12 @@
             <p14:sldId id="270"/>
           </p14:sldIdLst>
         </p14:section>
-        <p14:section name="Ekip ve talep" id="{33250f9f-efd0-1b23-84da-f1874fbaf007}">
+        <p14:section name="Ekip ve talep" id="{7bb417d3-51e7-73e3-0228-de58a3d64c97}">
           <p14:sldIdLst>
             <p14:sldId id="271"/>
             <p14:sldId id="272"/>
+            <p14:sldId id="273"/>
+            <p14:sldId id="274"/>
           </p14:sldIdLst>
         </p14:section>
       </p14:sectionLst>
@@ -1116,7 +1120,7 @@
           <a:p>
             <a:r>
               <a:rPr lang="en-US" dirty="0"/>
-              <a:t>Kaldıraca göre sıralama: Mobil SDK en büyük sorunu çözüyor (OBS kullanmayan telefon yayıncıları). Platform entegrasyonu bu sunumun talebi. Yapay zekâ ile anlama ve hikâye motoru teknik farkımız. Önemli: Sahneler bir video yapay zekâsı tarafından üretilmiyor, prosedürel olarak çiziliyor – sonraki dört slayta köprü bu.</a:t>
+              <a:t>Para ve kanıta göre sıralı: 250 bin € bizi bir geliştiriciyle 18 ay taşıyor. Önce Pro aboneliği ve mobil uygulama/PWA, paralelde ilk vizyon hattı olarak Kelime-Resim, ardından DE/EN ve bir platform ya da eğitim pilotu. Her adımın bir kapısı var (sonraki slaytlar). 18. ayda yaklaşık 350 bin €'luk tohum turunu topluyoruz – hikâye motoru, otomatik kurgu ve VR/AR ancak o zaman başlıyor. Böylece küçük ekip odaklı kalıyor.</a:t>
             </a:r>
             <a:endParaRPr lang="en-US" dirty="0"/>
           </a:p>
@@ -1292,7 +1296,7 @@
           <a:p>
             <a:r>
               <a:rPr lang="en-US" dirty="0"/>
-              <a:t>Şöyle görünüyor: Yayıncı konuşmaktan başka bir şey yapmıyor. “Geceydi” – gökyüzü kararıyor. “Bir kız ormana gitti” – ağaçlar büyüyor, karakter içeri yürüyor. “Yağmur başladı” – yağmur yağıyor, atmosfer döngüsü değişiyor. “Birden bir ejderha” – şimşek, kamera sarsıntısı, ejderha. Teknik olarak: Bir cümle 200–500 baytlık bir fark üretiyor, sahneler dakikada 1–3 kez değişiyor, çizim en fazla 1.200 parçacıklı tek bir Canvas'ta – efekt motorumuz bu bütçeyi bugün bile OBS'in yanında tutuyor. Maliyet: Video yapay zekâsı liste fiyatıyla saniyesi 0,05 USD (Veo 3.1 Lite, 720p) ile 0,75 USD arasında [Kaynak 24, 25], yani saati 180–2.700 USD – ve canlı hiç mümkün değil. LiveFX: yapay zekâsız 0 €, isteğe bağlı metin yapay zekâsıyla saati 0,25–0,75 USD. Pazar: Almanya sesli kitap 374 milyon € [Kaynak 19], Almanya'da 23,8 milyon kişi her hafta podcast dinliyor [Kaynak 20], YouTube'da 1 milyardan fazla podcast izleyicisi [Kaynak 21]; yapay zekâ video pazarı 2036'ya kadar 3,67'den 24,89 milyar USD'ye büyüyor [Kaynak 23]. Takvim: Almanca MVP 2027 2. çeyrek, TR/EN ve dünya paketleri 2027 3. çeyrek. İlk yayınevi örneği: kurucunun kendi çocuk kitabı serisi.</a:t>
+              <a:t>Şöyle görünüyor: Yayıncı konuşmaktan başka bir şey yapmıyor. “Geceydi” – gökyüzü kararıyor. “Bir kız ormana gitti” – ağaçlar büyüyor, karakter içeri yürüyor. “Yağmur başladı” – yağmur yağıyor, atmosfer döngüsü değişiyor. “Birden bir ejderha” – şimşek, kamera sarsıntısı, ejderha. Teknik olarak: Bir cümle 200–500 baytlık bir fark üretiyor, sahneler dakikada 1–3 kez değişiyor, çizim en fazla 1.200 parçacıklı tek bir Canvas'ta – efekt motorumuz bu bütçeyi bugün bile OBS'in yanında tutuyor. Maliyet: Video yapay zekâsı liste fiyatıyla saniyesi 0,05 USD (Veo 3.1 Lite, 720p) ile 0,75 USD arasında [Kaynak 24, 25], yani saati 180–2.700 USD – ve canlı hiç mümkün değil. LiveFX: yapay zekâsız 0 €, isteğe bağlı metin yapay zekâsıyla saati 0,25–0,75 USD. Pazar: Almanya sesli kitap 374 milyon € [Kaynak 19], Almanya'da 23,8 milyon kişi her hafta podcast dinliyor [Kaynak 20], YouTube'da 1 milyardan fazla podcast izleyicisi [Kaynak 21]; yapay zekâ video pazarı 2036'ya kadar 3,67'den 24,89 milyar USD'ye büyüyor [Kaynak 23]. Takvim: hikâye motoru 2. kapıdan sonra sonraki turdan finanse ediliyor – 19. aydan itibaren (2028 2. yarı) Almanca MVP, ardından TR/EN ve dünya paketleri. İlk yayınevi örneği: kurucunun kendi çocuk kitabı serisi.</a:t>
             </a:r>
             <a:endParaRPr lang="en-US" dirty="0"/>
           </a:p>
@@ -1468,7 +1472,7 @@
           <a:p>
             <a:r>
               <a:rPr lang="en-US" dirty="0"/>
-              <a:t>Aynı araca açılan iki kapı. Birincisi, canlı → öne çıkanlar: Sunucumuz bugün bile her tetikleyiciyi, her hediyeyi, her sohbet mesajını zaman damgasıyla biliyor – bundan yayın başına 3–5 klip çıkıyor. İkincisi, otomatik kurgu: 20 dakikalık bir MP4 pencereye sürükleniyor, Whisper tarayıcıda yerel olarak transkript çıkarıyor [Kaynak 60], LiveFX efektleri, sahneleri ve kesmeleri taşınabilir çipler olarak yerleştiriyor, dışa aktarım WebCodecs ve cihazın donanım kodlayıcısıyla yapılıyor [Kaynak 57, 58, 59]. Dosya bilgisayardan hiç çıkmıyor, video başına marjinal maliyet sıfır. Mekânlar: Sahne ve sınıf bugün bile çalışıyor (tam ekran, telefon reji masası olarak). Resimli sesli kitap ve telefonda AR 2027'de geliyor. WebXR [Kaynak 47, 48] ve Meta Ray-Ban Display gibi ekranlı gözlükler [Kaynak 46] vizyon – IDC 2026 için 13,6 milyon akıllı gözlük bekliyor [Kaynak 45], ekranlı gözlükler bunun yalnızca küçük bir kısmı. Rekabete dürüst bakış: CapCut'ın 736 milyon aylık aktif kullanıcısı var [Kaynak 52]; evrensel bir editör olarak değil, ses → efekt, sahneler, TR/DE ve yerel işlemeyle yarışıyoruz. Alıcı sinyali: Canva 2026'da Cavalry ve MangoAI'ı satın aldı [Kaynak 56].</a:t>
+              <a:t>Aynı araca açılan iki kapı. Birincisi, canlı → öne çıkanlar: Sunucumuz bugün bile her tetikleyiciyi, her hediyeyi, her sohbet mesajını zaman damgasıyla biliyor – bundan yayın başına 3–5 klip çıkıyor. İkincisi, otomatik kurgu: 20 dakikalık bir MP4 pencereye sürükleniyor, Whisper tarayıcıda yerel olarak transkript çıkarıyor [Kaynak 60], LiveFX efektleri, sahneleri ve kesmeleri taşınabilir çipler olarak yerleştiriyor, dışa aktarım WebCodecs ve cihazın donanım kodlayıcısıyla yapılıyor [Kaynak 57, 58, 59]. Dosya bilgisayardan hiç çıkmıyor, video başına marjinal maliyet sıfır. Mekânlar: Sahne ve sınıf bugün bile çalışıyor (tam ekran, telefon reji masası olarak). Resimli sesli kitap ve telefonda AR, 2. kapıdan sonra sonraki turla geliyor. WebXR [Kaynak 47, 48] ve Meta Ray-Ban Display gibi ekranlı gözlükler [Kaynak 46] vizyon – IDC 2026 için 13,6 milyon akıllı gözlük bekliyor [Kaynak 45], ekranlı gözlükler bunun yalnızca küçük bir kısmı. Rekabete dürüst bakış: CapCut'ın 736 milyon aylık aktif kullanıcısı var [Kaynak 52]; evrensel bir editör olarak değil, ses → efekt, sahneler, TR/DE ve yerel işlemeyle yarışıyoruz. Alıcı sinyali: Canva 2026'da Cavalry ve MangoAI'ı satın aldı [Kaynak 56].</a:t>
             </a:r>
             <a:endParaRPr lang="en-US" dirty="0"/>
           </a:p>
@@ -1556,7 +1560,7 @@
           <a:p>
             <a:r>
               <a:rPr lang="en-US" dirty="0"/>
-              <a:t>Kurucu tek kişide kullanıcı, içerik sağlayıcı ve ürün sorumlusu – ürünün şivelerde, dikey formatta ve Türkçede çalışmasının nedeni bu. Çocuk kitabı yazarı olarak ilk yayınevi ve eğitim örneğini de kendisi getiriyor. Gönül Demet yatırımcı ilişkilerinden (Investor Relations) sorumlu ve ön tohum turu için iletişim kişisi. Ön tohum yatırımla (500.000 €) iki işe alım geliyor; Kelime-Resim için içerik kontrolünü bir eğitim teknolojisi danışma kurulu üstleniyor.</a:t>
+              <a:t>Kurucu tek kişide kullanıcı, içerik sağlayıcı ve ürün sorumlusu – ürünün şivelerde, dikey formatta ve Türkçede çalışmasının nedeni bu. Çocuk kitabı yazarı olarak ilk yayınevi ve eğitim örneğini de kendisi getiriyor. Gönül Demet yatırımcı ilişkilerinden (Investor Relations) sorumlu ve ön tohum turu için iletişim kişisi. Ön tohum yatırım (250.000 €) bir işe alımı finanse ediyor – 3. aydan itibaren bir mobil/web geliştirici; diğer işe alımlar 2. kapıdan sonra tohum turuyla geliyor; Kelime-Resim için içerik kontrolünü bir eğitim teknolojisi danışma kurulu üstleniyor.</a:t>
             </a:r>
             <a:endParaRPr lang="en-US" dirty="0"/>
           </a:p>
@@ -1644,7 +1648,7 @@
           <a:p>
             <a:r>
               <a:rPr lang="en-US" dirty="0"/>
-              <a:t>Somut bitirin: İhtiyacımız olan, canlı yayın ekibinde bir muhatap ve 20 üreticiyle 8 haftalık bir pilot. Biz katmanı, paketleri, desteği ve ölçümü (izlenme süresi, hediyeler, canlı yayınlardan klipler) sağlıyoruz. Yeni: Kelime-Resim ve Anlatı Filmi için eğitim kurumları, dil öğrenme platformları ya da yayınevleriyle ikinci bir pilot arıyoruz – ilk yayınevi örneği kurucunun kendi çocuk kitabı serisi. Tur hakkında: LiveFX ve tüm projeleri için 500.000 € ön tohum yatırım, 24 ay. Öneri olarak fon kullanımı: ekip 250 bin €, vizyon hatları 100 bin € (önce Kelime-Resim/dil öğrenme ve hikâye motoru), pazara giriş 75 bin €, hukuk/marka/veri koruma 50 bin €, rezerv 25 bin €. Hiç gelir olmasa bile bu yaklaşık 22 ay yetiyor; temkinli senaryo üç yıl boyunca karşılanıyor (iş planı 11.6). Yatırımcılar için iletişim: Gönül Demet. Bu sunum Almanca ve İngilizce de mevcut.</a:t>
+              <a:t>Rakamlar tek slaytta. Temel senaryo: gelir 2027'deki 51 bin €'dan 2031'de 3,15 milyon €'ya çıkıyor; FAVÖK 2028'de pozitife dönüyor ve 22. aydan itibaren kalıcı. Temkinli senaryoda 2031 geliri 602 bin €, iyimserde 7,44 milyon € – 4. ve 5. yıllar ileriye taşındı. Nakit ömrü: hiç gelir olmasa bile 250 bin € 18 ay yetiyor. 18. ayda senaryoya göre 49 ile 369 bin € arasında nakit bekliyoruz – ve 2. kapıdan sonra yaklaşık 350 bin €'luk bir tohum turu topluyoruz. Değerleme: teklifimiz %10 karşılığında 250.000 €, yani 2,25 milyon € yatırım öncesi ve 2,5 milyon € yatırım sonrası değer. Gelir öncesi dört yaygın yöntem 2,35 ile 3,0 milyon € arasında sonuç veriyor – Berkus 2,35 milyon €, DACH aralığının alt kısmındaki bir referansla Scorecard 2,95 milyon €, yukarı potansiyel senaryosunda VC yöntemi 2,43 milyon €, Risk Faktörü Toplamı 3,0 milyon €; ağırlıklı 2,71 milyon €. Yani teklif, her referans yönteminin altında adil ve yatırımcı dostu bir giriş fiyatı. Neden: 575+ otomatik testli çalışan ürün, kendi fikrî mülkiyeti ve içeriği, Türkçe niş dahil üç dil, tek motor üzerinde dört vizyon seçeneği ve sermaye verimliliği – v2.1'e kadar dış sermaye olmadan geliştirildi. Dürüst olmak gerekirse aleyhte: tek kurucu, henüz gelir yok. Alternatif olarak 2,25 milyon € tavanlı, %20 iskontolu, faizsiz bir SAFE. Müzakere temeli, vergi ve hukuk danışmanıyla kontrol edilecek.</a:t>
             </a:r>
             <a:endParaRPr lang="en-US" dirty="0"/>
           </a:p>
@@ -1668,6 +1672,182 @@
             <a:fld id="{F7021451-1387-4CA6-816F-3879F97B5CBC}" type="slidenum">
               <a:rPr lang="en-US"/>
               <a:t>17</a:t>
+            </a:fld>
+            <a:endParaRPr lang="en-US"/>
+          </a:p>
+        </p:txBody>
+      </p:sp>
+    </p:spTree>
+    <p:extLst>
+      <p:ext uri="{BB962C8B-B14F-4D97-AF65-F5344CB8AC3E}">
+        <p14:creationId xmlns:p14="http://schemas.microsoft.com/office/powerpoint/2010/main" val="1024086991"/>
+      </p:ext>
+    </p:extLst>
+  </p:cSld>
+  <p:clrMapOvr>
+    <a:masterClrMapping/>
+  </p:clrMapOvr>
+</p:notes>
+</file>
+
+<file path=ppt/notesSlides/notesSlide18.xml><?xml version="1.0" encoding="utf-8"?>
+<p:notes xmlns:a="http://schemas.openxmlformats.org/drawingml/2006/main" xmlns:r="http://schemas.openxmlformats.org/officeDocument/2006/relationships" xmlns:p="http://schemas.openxmlformats.org/presentationml/2006/main">
+  <p:cSld>
+    <p:spTree>
+      <p:nvGrpSpPr>
+        <p:cNvPr id="1" name=""/>
+        <p:cNvGrpSpPr/>
+        <p:nvPr/>
+      </p:nvGrpSpPr>
+      <p:grpSpPr>
+        <a:xfrm>
+          <a:off x="0" y="0"/>
+          <a:ext cx="0" cy="0"/>
+          <a:chOff x="0" y="0"/>
+          <a:chExt cx="0" cy="0"/>
+        </a:xfrm>
+      </p:grpSpPr>
+      <p:sp>
+        <p:nvSpPr>
+          <p:cNvPr id="2" name="Slide Image Placeholder 1"/>
+          <p:cNvSpPr>
+            <a:spLocks noGrp="1" noRot="1" noChangeAspect="1"/>
+          </p:cNvSpPr>
+          <p:nvPr>
+            <p:ph type="sldImg"/>
+          </p:nvPr>
+        </p:nvSpPr>
+        <p:spPr/>
+      </p:sp>
+      <p:sp>
+        <p:nvSpPr>
+          <p:cNvPr id="3" name="Notes Placeholder 2"/>
+          <p:cNvSpPr>
+            <a:spLocks noGrp="1"/>
+          </p:cNvSpPr>
+          <p:nvPr>
+            <p:ph type="body" idx="1"/>
+          </p:nvPr>
+        </p:nvSpPr>
+        <p:spPr/>
+        <p:txBody>
+          <a:bodyPr/>
+          <a:lstStyle/>
+          <a:p>
+            <a:r>
+              <a:rPr lang="en-US" dirty="0"/>
+              <a:t>18 ayda dört kapı – her biri bir sonraki bütçeyi açıyor. 3. ay: Pro aboneliği yayında ve geliştirici ekipte. 6. ay: hedef 10.000 kayıtlı kullanıcı ve 400 ödeme yapan Pro; eşik 4.000 ve 120. 12. ay: 20.000 kullanıcı, 800 Pro, 8.073 € MRR, çalışan bir platform ya da eğitim pilotu. 18. ay 2. kapı: 50.000 kullanıcı, 2.000 Pro, 22.586 € MRR, Kelime-Resim için beş ödeme yapan okul ya da kurs. Tohum turunun temeli bu. Bunların hepsi hedef – henüz hiçbirine ulaşılmadı.</a:t>
+            </a:r>
+            <a:endParaRPr lang="en-US" dirty="0"/>
+          </a:p>
+        </p:txBody>
+      </p:sp>
+      <p:sp>
+        <p:nvSpPr>
+          <p:cNvPr id="4" name="Slide Number Placeholder 3"/>
+          <p:cNvSpPr>
+            <a:spLocks noGrp="1"/>
+          </p:cNvSpPr>
+          <p:nvPr>
+            <p:ph type="sldNum" sz="quarter" idx="10"/>
+          </p:nvPr>
+        </p:nvSpPr>
+        <p:spPr/>
+        <p:txBody>
+          <a:bodyPr/>
+          <a:lstStyle/>
+          <a:p>
+            <a:fld id="{F7021451-1387-4CA6-816F-3879F97B5CBC}" type="slidenum">
+              <a:rPr lang="en-US"/>
+              <a:t>18</a:t>
+            </a:fld>
+            <a:endParaRPr lang="en-US"/>
+          </a:p>
+        </p:txBody>
+      </p:sp>
+    </p:spTree>
+    <p:extLst>
+      <p:ext uri="{BB962C8B-B14F-4D97-AF65-F5344CB8AC3E}">
+        <p14:creationId xmlns:p14="http://schemas.microsoft.com/office/powerpoint/2010/main" val="1024086991"/>
+      </p:ext>
+    </p:extLst>
+  </p:cSld>
+  <p:clrMapOvr>
+    <a:masterClrMapping/>
+  </p:clrMapOvr>
+</p:notes>
+</file>
+
+<file path=ppt/notesSlides/notesSlide19.xml><?xml version="1.0" encoding="utf-8"?>
+<p:notes xmlns:a="http://schemas.openxmlformats.org/drawingml/2006/main" xmlns:r="http://schemas.openxmlformats.org/officeDocument/2006/relationships" xmlns:p="http://schemas.openxmlformats.org/presentationml/2006/main">
+  <p:cSld>
+    <p:spTree>
+      <p:nvGrpSpPr>
+        <p:cNvPr id="1" name=""/>
+        <p:cNvGrpSpPr/>
+        <p:nvPr/>
+      </p:nvGrpSpPr>
+      <p:grpSpPr>
+        <a:xfrm>
+          <a:off x="0" y="0"/>
+          <a:ext cx="0" cy="0"/>
+          <a:chOff x="0" y="0"/>
+          <a:chExt cx="0" cy="0"/>
+        </a:xfrm>
+      </p:grpSpPr>
+      <p:sp>
+        <p:nvSpPr>
+          <p:cNvPr id="2" name="Slide Image Placeholder 1"/>
+          <p:cNvSpPr>
+            <a:spLocks noGrp="1" noRot="1" noChangeAspect="1"/>
+          </p:cNvSpPr>
+          <p:nvPr>
+            <p:ph type="sldImg"/>
+          </p:nvPr>
+        </p:nvSpPr>
+        <p:spPr/>
+      </p:sp>
+      <p:sp>
+        <p:nvSpPr>
+          <p:cNvPr id="3" name="Notes Placeholder 2"/>
+          <p:cNvSpPr>
+            <a:spLocks noGrp="1"/>
+          </p:cNvSpPr>
+          <p:nvPr>
+            <p:ph type="body" idx="1"/>
+          </p:nvPr>
+        </p:nvSpPr>
+        <p:spPr/>
+        <p:txBody>
+          <a:bodyPr/>
+          <a:lstStyle/>
+          <a:p>
+            <a:r>
+              <a:rPr lang="en-US" dirty="0"/>
+              <a:t>Somut bitirin: canlı yayın ekibinde bir muhatap ve 20 içerik üreticisiyle 8 haftalık bir pilot istiyoruz. Overlay'i, paketleri, desteği ve ölçümü (izlenme süresi, hediyeler, canlı yayınlardan klipler) biz sağlıyoruz. Kelime-Resim için eğitim kurumları, dil öğrenme platformları ya da yayınevleriyle ikinci bir pilot arıyoruz – ilk yayınevi örneği kurucunun kendi çocuk kitabı serisi. Tura gelince: 18 ay için 250.000 € ön tohum. Önerilen fon kullanımı: ekip ve ürün 125 bin €, pazara giriş ve pilotlar 50 bin €, Kelime-Resim 37,5 bin €, hukuk/marka/veri koruma 25 bin €, yedek 12,5 bin €. Hiç gelir olmasa bile bu 18 ay yetiyor. Teklifimiz: 250.000 € karşılığında %10 – 2,25 milyon € yatırım öncesi, 2,5 milyon € yatırım sonrası değer, her yaygın referans yönteminin altında – ya da 2,25 milyon € tavanlı ve %20 iskontolu bir SAFE; müzakere temeli, vergi ve hukuk danışmanıyla kontrol edilecek. Hikâye motoru, otomatik kurgu ve VR/AR, 2. kapıdan sonra yaklaşık 350 bin €'luk tohum turuyla geliyor. Yatırımcı iletişimi: Gönül Demet. Bu sunum Almanca ve İngilizce olarak da mevcut.</a:t>
+            </a:r>
+            <a:endParaRPr lang="en-US" dirty="0"/>
+          </a:p>
+        </p:txBody>
+      </p:sp>
+      <p:sp>
+        <p:nvSpPr>
+          <p:cNvPr id="4" name="Slide Number Placeholder 3"/>
+          <p:cNvSpPr>
+            <a:spLocks noGrp="1"/>
+          </p:cNvSpPr>
+          <p:nvPr>
+            <p:ph type="sldNum" sz="quarter" idx="10"/>
+          </p:nvPr>
+        </p:nvSpPr>
+        <p:spPr/>
+        <p:txBody>
+          <a:bodyPr/>
+          <a:lstStyle/>
+          <a:p>
+            <a:fld id="{F7021451-1387-4CA6-816F-3879F97B5CBC}" type="slidenum">
+              <a:rPr lang="en-US"/>
+              <a:t>19</a:t>
             </a:fld>
             <a:endParaRPr lang="en-US"/>
           </a:p>
@@ -1996,7 +2176,7 @@
           <a:p>
             <a:r>
               <a:rPr lang="en-US" dirty="0"/>
-              <a:t>Bu artık bir prototip değil: 0.1'den 2.0'a sürümler, birim ve uçtan uca testler, DE/TR kılavuzlar. 2.0 sahne ve satış için bir sağlamlaştırma sürümüydü. İki şeyin altını çizin: (1) kendi seslerimiz ve paketlerimiz = telif ihlali yok, (2) izleyici tetikleyicileri gelir modeline köprü – bir hediye bugün bile bir efekti tetikleyebiliyor.</a:t>
+              <a:t>Bu artık bir prototip değil: 0.1'den 2.1'e sürümler, birim ve uçtan uca testler, Almanca ve Türkçe kılavuzlar. Sürüm 2.1 ürünü daha hafif ve daha güvenli yaptı: ortalama %63–69 daha az kare süresiyle performans modu, MIT lisanslı 143 ücretsiz çıkartma, üç dilde metin çıkartma paketleri ve gençleri koruma filtreli KLIPY ve GIPHY ile güvenli GIF arama – Google, Tenor API'sini Haziran 2026'da kapattı. İki noktayı vurgulayın: (1) kendi seslerimiz, ücretsiz çıkartmalar ve bağlantılı GIF'ler telif ihlali uyarısı yok demek, (2) izleyici tetikleyicileri gelire giden köprü – bir hediye bugün bile efekt tetikleyebiliyor.</a:t>
             </a:r>
             <a:endParaRPr lang="en-US" dirty="0"/>
           </a:p>
@@ -2928,7 +3108,7 @@
                 <a:ea typeface="Arial" pitchFamily="34" charset="-122"/>
                 <a:cs typeface="Arial" pitchFamily="34" charset="-120"/>
               </a:rPr>
-              <a:t>LIVE MEME ENGINE  ·  v2.0</a:t>
+              <a:t>LIVE MEME ENGINE  ·  v2.1</a:t>
             </a:r>
             <a:endParaRPr lang="en-US" sz="1100" dirty="0"/>
           </a:p>
@@ -4417,7 +4597,7 @@
                 <a:ea typeface="Arial" pitchFamily="34" charset="-122"/>
                 <a:cs typeface="Arial" pitchFamily="34" charset="-120"/>
               </a:rPr>
-              <a:t>KALDIRACA GÖRE SIRALI</a:t>
+              <a:t>18 AY, KAPILARLA</a:t>
             </a:r>
             <a:endParaRPr lang="en-US" sz="1000" dirty="0"/>
           </a:p>
@@ -4458,7 +4638,7 @@
                 <a:ea typeface="Arial" pitchFamily="34" charset="-122"/>
                 <a:cs typeface="Arial" pitchFamily="34" charset="-120"/>
               </a:rPr>
-              <a:t>Yol haritası</a:t>
+              <a:t>Yol haritası: 2. kapıya kadar yalın, sonra tohum turu</a:t>
             </a:r>
             <a:endParaRPr lang="en-US" sz="3200" dirty="0"/>
           </a:p>
@@ -4586,7 +4766,7 @@
                 <a:ea typeface="Arial" pitchFamily="34" charset="-122"/>
                 <a:cs typeface="Arial" pitchFamily="34" charset="-120"/>
               </a:rPr>
-              <a:t>2026 4. çeyrek</a:t>
+              <a:t>2027 1. çeyrek · 1.–3. ay</a:t>
             </a:r>
             <a:endParaRPr lang="en-US" sz="1300" dirty="0"/>
           </a:p>
@@ -4654,7 +4834,7 @@
                 <a:ea typeface="Arial" pitchFamily="34" charset="-122"/>
                 <a:cs typeface="Arial" pitchFamily="34" charset="-120"/>
               </a:rPr>
-              <a:t>Yerel mobil SDK</a:t>
+              <a:t>Pro aboneliği yayında</a:t>
             </a:r>
             <a:endParaRPr lang="en-US" sz="1600" dirty="0"/>
           </a:p>
@@ -4695,7 +4875,7 @@
                 <a:ea typeface="Arial" pitchFamily="34" charset="-122"/>
                 <a:cs typeface="Arial" pitchFamily="34" charset="-120"/>
               </a:rPr>
-              <a:t>Efektler yalnızca OBS'te değil, doğrudan kamera uygulamasında · kararlı çevrimdışı tanıma · 10 üretici testi</a:t>
+              <a:t>Ön tohum tamamlandı · mobil/web geliştirici ekipte (3. ay) · TR lansmanı · G0 kapısı</a:t>
             </a:r>
             <a:endParaRPr lang="en-US" sz="1200" dirty="0"/>
           </a:p>
@@ -4761,7 +4941,7 @@
                 <a:ea typeface="Arial" pitchFamily="34" charset="-122"/>
                 <a:cs typeface="Arial" pitchFamily="34" charset="-120"/>
               </a:rPr>
-              <a:t>2027 1. çeyrek</a:t>
+              <a:t>2027 2. çeyrek · 4.–6. ay</a:t>
             </a:r>
             <a:endParaRPr lang="en-US" sz="1300" dirty="0"/>
           </a:p>
@@ -4829,7 +5009,7 @@
                 <a:ea typeface="Arial" pitchFamily="34" charset="-122"/>
                 <a:cs typeface="Arial" pitchFamily="34" charset="-120"/>
               </a:rPr>
-              <a:t>Platform entegrasyonu</a:t>
+              <a:t>Mobil uygulama/PWA + Kelime-Resim</a:t>
             </a:r>
             <a:endParaRPr lang="en-US" sz="1600" dirty="0"/>
           </a:p>
@@ -4870,7 +5050,7 @@
                 <a:ea typeface="Arial" pitchFamily="34" charset="-122"/>
                 <a:cs typeface="Arial" pitchFamily="34" charset="-120"/>
               </a:rPr>
-              <a:t>TikTok LIVE Studio eklentisi / Instagram Live Producer · kurulum programı · pazaryeri beta · öne çıkanları bul</a:t>
+              <a:t>300 kelimeli ve okuma destekli Kelime-Resim · 20 beta içerik üreticisi TR/DE · G1 kapısı</a:t>
             </a:r>
             <a:endParaRPr lang="en-US" sz="1200" dirty="0"/>
           </a:p>
@@ -4928,7 +5108,7 @@
               <a:buNone/>
             </a:pPr>
             <a:r>
-              <a:rPr lang="en-US" sz="1300" b="1" dirty="0">
+              <a:rPr lang="en-US" sz="1250" b="1" dirty="0">
                 <a:solidFill>
                   <a:srgbClr val="FFD166"/>
                 </a:solidFill>
@@ -4936,9 +5116,9 @@
                 <a:ea typeface="Arial" pitchFamily="34" charset="-122"/>
                 <a:cs typeface="Arial" pitchFamily="34" charset="-120"/>
               </a:rPr>
-              <a:t>2027 2. çeyrek</a:t>
-            </a:r>
-            <a:endParaRPr lang="en-US" sz="1300" dirty="0"/>
+              <a:t>2027 3.–4. çeyrek · 7.–12. ay</a:t>
+            </a:r>
+            <a:endParaRPr lang="en-US" sz="1250" dirty="0"/>
           </a:p>
         </p:txBody>
       </p:sp>
@@ -5004,7 +5184,7 @@
                 <a:ea typeface="Arial" pitchFamily="34" charset="-122"/>
                 <a:cs typeface="Arial" pitchFamily="34" charset="-120"/>
               </a:rPr>
-              <a:t>Yapay zekâ ile anlama v2</a:t>
+              <a:t>DE/EN + pilotlar</a:t>
             </a:r>
             <a:endParaRPr lang="en-US" sz="1600" dirty="0"/>
           </a:p>
@@ -5045,7 +5225,7 @@
                 <a:ea typeface="Arial" pitchFamily="34" charset="-122"/>
                 <a:cs typeface="Arial" pitchFamily="34" charset="-120"/>
               </a:rPr>
-              <a:t>Duygu, bağlam, ironi · cümle başına çoklu tetikleme · Pro aboneliği · canlı ticaret tetikleyicileri</a:t>
+              <a:t>DE/EN lansmanı · pazar yerleri · ajans lisansı · platform ya da eğitim pilotu · G2a kapısı</a:t>
             </a:r>
             <a:endParaRPr lang="en-US" sz="1200" dirty="0"/>
           </a:p>
@@ -5111,7 +5291,7 @@
                 <a:ea typeface="Arial" pitchFamily="34" charset="-122"/>
                 <a:cs typeface="Arial" pitchFamily="34" charset="-120"/>
               </a:rPr>
-              <a:t>2027 3.–4. çeyrek</a:t>
+              <a:t>2028 1. yarı · 13.–18. ay</a:t>
             </a:r>
             <a:endParaRPr lang="en-US" sz="1300" dirty="0"/>
           </a:p>
@@ -5179,7 +5359,7 @@
                 <a:ea typeface="Arial" pitchFamily="34" charset="-122"/>
                 <a:cs typeface="Arial" pitchFamily="34" charset="-120"/>
               </a:rPr>
-              <a:t>Hikâye motoru</a:t>
+              <a:t>2. kapı → tohum turu</a:t>
             </a:r>
             <a:endParaRPr lang="en-US" sz="1600" dirty="0"/>
           </a:p>
@@ -5220,7 +5400,7 @@
                 <a:ea typeface="Arial" pitchFamily="34" charset="-122"/>
                 <a:cs typeface="Arial" pitchFamily="34" charset="-120"/>
               </a:rPr>
-              <a:t>Bütün hikâyeler sahne dizisi olarak · prosedürel çizilen sahneler (Anlatı Filmi) · izleyici hediyeli efektler · platform pilotu</a:t>
+              <a:t>Kelime-Resim pilotu değerlendirildi · ~350 bin € tohum turu · 19. aydan itibaren: hikâye motoru, Studio, Mekânlar, büyüme ekibi</a:t>
             </a:r>
             <a:endParaRPr lang="en-US" sz="1200" dirty="0"/>
           </a:p>
@@ -5261,7 +5441,7 @@
                 <a:ea typeface="Arial" pitchFamily="34" charset="-122"/>
                 <a:cs typeface="Arial" pitchFamily="34" charset="-120"/>
               </a:rPr>
-              <a:t>Mobil SDK en büyük sorunu çözer (OBS'siz telefon yayıncıları). Platform entegrasyonu bu sunumun talebi. Yapay zekâ ile anlama ve hikâye motoru teknik farkımız – ve 2027–2029 vizyonuna giriş.</a:t>
+              <a:t>18. aya kadar yalın: bir geliştirici, Pro aboneliği, mobil uygulama/PWA, Kelime-Resim. Hikâye motoru (Anlatı Filmi), otomatik kurgu (Studio) ve VR/AR (Mekânlar) 2. kapıdan sonra sonraki turdan finanse ediliyor.</a:t>
             </a:r>
             <a:endParaRPr lang="en-US" sz="1200" dirty="0"/>
           </a:p>
@@ -13258,7 +13438,7 @@
                 <a:ea typeface="Arial" pitchFamily="34" charset="-122"/>
                 <a:cs typeface="Arial" pitchFamily="34" charset="-120"/>
               </a:rPr>
-              <a:t>2027</a:t>
+              <a:t>sonraki tur</a:t>
             </a:r>
             <a:endParaRPr lang="en-US" sz="950" dirty="0"/>
           </a:p>
@@ -13367,7 +13547,7 @@
                 <a:ea typeface="Arial" pitchFamily="34" charset="-122"/>
                 <a:cs typeface="Arial" pitchFamily="34" charset="-120"/>
               </a:rPr>
-              <a:t>2027</a:t>
+              <a:t>sonraki tur</a:t>
             </a:r>
             <a:endParaRPr lang="en-US" sz="950" dirty="0"/>
           </a:p>
@@ -13476,7 +13656,7 @@
                 <a:ea typeface="Arial" pitchFamily="34" charset="-122"/>
                 <a:cs typeface="Arial" pitchFamily="34" charset="-120"/>
               </a:rPr>
-              <a:t>Vizyon 2028</a:t>
+              <a:t>Vizyon 2029</a:t>
             </a:r>
             <a:endParaRPr lang="en-US" sz="950" dirty="0"/>
           </a:p>
@@ -13585,7 +13765,7 @@
                 <a:ea typeface="Arial" pitchFamily="34" charset="-122"/>
                 <a:cs typeface="Arial" pitchFamily="34" charset="-120"/>
               </a:rPr>
-              <a:t>Vizyon 2028</a:t>
+              <a:t>Vizyon 2029</a:t>
             </a:r>
             <a:endParaRPr lang="en-US" sz="950" dirty="0"/>
           </a:p>
@@ -15445,7 +15625,7 @@
                 <a:ea typeface="Arial" pitchFamily="34" charset="-122"/>
                 <a:cs typeface="Arial" pitchFamily="34" charset="-120"/>
               </a:rPr>
-              <a:t>[Açık pozisyon] – Teknik lider</a:t>
+              <a:t>[Açık pozisyon] – Mobil/web geliştirici</a:t>
             </a:r>
             <a:endParaRPr lang="en-US" sz="1500" dirty="0"/>
           </a:p>
@@ -15486,7 +15666,7 @@
                 <a:ea typeface="Arial" pitchFamily="34" charset="-122"/>
                 <a:cs typeface="Arial" pitchFamily="34" charset="-120"/>
               </a:rPr>
-              <a:t>Ses / gerçek zamanlı, mobil SDK, Canvas/WebGPU</a:t>
+              <a:t>Ön tohumdan ilk işe alım (3. ay): iOS/Android, PWA, sonra SDK</a:t>
             </a:r>
             <a:endParaRPr lang="en-US" sz="1200" dirty="0"/>
           </a:p>
@@ -15659,7 +15839,7 @@
                 <a:ea typeface="Arial" pitchFamily="34" charset="-122"/>
                 <a:cs typeface="Arial" pitchFamily="34" charset="-120"/>
               </a:rPr>
-              <a:t>Büyüme TR + DACH, üretici programı, eğitim satışı</a:t>
+              <a:t>Büyüme TR + DACH, üretici programı, eğitim satışı – tohum turuyla</a:t>
             </a:r>
             <a:endParaRPr lang="en-US" sz="1200" dirty="0"/>
           </a:p>
@@ -15870,6 +16050,5010 @@
           <a:chExt cx="0" cy="0"/>
         </a:xfrm>
       </p:grpSpPr>
+      <p:sp>
+        <p:nvSpPr>
+          <p:cNvPr id="2" name="Kicker"/>
+          <p:cNvSpPr txBox="1"/>
+          <p:nvPr/>
+        </p:nvSpPr>
+        <p:spPr>
+          <a:xfrm>
+            <a:off x="548640" y="182880"/>
+            <a:ext cx="8229600" cy="237744"/>
+          </a:xfrm>
+          <a:prstGeom prst="rect">
+            <a:avLst/>
+          </a:prstGeom>
+          <a:noFill/>
+          <a:ln/>
+        </p:spPr>
+        <p:txBody>
+          <a:bodyPr wrap="square" lIns="0" tIns="0" rIns="0" bIns="0" rtlCol="0" anchor="ctr"/>
+          <a:lstStyle/>
+          <a:p>
+            <a:pPr indent="0" marL="0">
+              <a:buNone/>
+            </a:pPr>
+            <a:r>
+              <a:rPr lang="en-US" sz="1000" b="1" spc="300" kern="0" dirty="0">
+                <a:solidFill>
+                  <a:srgbClr val="FFD166"/>
+                </a:solidFill>
+                <a:latin typeface="Arial" pitchFamily="34" charset="0"/>
+                <a:ea typeface="Arial" pitchFamily="34" charset="-122"/>
+                <a:cs typeface="Arial" pitchFamily="34" charset="-120"/>
+              </a:rPr>
+              <a:t>FINANSAL TABLO VE DEĞERLEME · TAHMIN</a:t>
+            </a:r>
+            <a:endParaRPr lang="en-US" sz="1000" dirty="0"/>
+          </a:p>
+        </p:txBody>
+      </p:sp>
+      <p:sp>
+        <p:nvSpPr>
+          <p:cNvPr id="3" name="Titel"/>
+          <p:cNvSpPr txBox="1"/>
+          <p:nvPr/>
+        </p:nvSpPr>
+        <p:spPr>
+          <a:xfrm>
+            <a:off x="548640" y="438912"/>
+            <a:ext cx="11094415" cy="777240"/>
+          </a:xfrm>
+          <a:prstGeom prst="rect">
+            <a:avLst/>
+          </a:prstGeom>
+          <a:noFill/>
+          <a:ln/>
+        </p:spPr>
+        <p:txBody>
+          <a:bodyPr wrap="square" lIns="0" tIns="0" rIns="0" bIns="0" rtlCol="0" anchor="t">
+            <a:normAutofit/>
+          </a:bodyPr>
+          <a:lstStyle/>
+          <a:p>
+            <a:pPr indent="0" marL="0">
+              <a:buNone/>
+            </a:pPr>
+            <a:r>
+              <a:rPr lang="en-US" sz="3200" b="1" dirty="0">
+                <a:solidFill>
+                  <a:srgbClr val="FFFFFF"/>
+                </a:solidFill>
+                <a:latin typeface="Arial" pitchFamily="34" charset="0"/>
+                <a:ea typeface="Arial" pitchFamily="34" charset="-122"/>
+                <a:cs typeface="Arial" pitchFamily="34" charset="-120"/>
+              </a:rPr>
+              <a:t>18 ay için 250 bin € – ardından tohum turu</a:t>
+            </a:r>
+            <a:endParaRPr lang="en-US" sz="3200" dirty="0"/>
+          </a:p>
+        </p:txBody>
+      </p:sp>
+      <p:sp>
+        <p:nvSpPr>
+          <p:cNvPr id="4" name="Fuß"/>
+          <p:cNvSpPr txBox="1"/>
+          <p:nvPr/>
+        </p:nvSpPr>
+        <p:spPr>
+          <a:xfrm>
+            <a:off x="7071055" y="6473952"/>
+            <a:ext cx="4572000" cy="228600"/>
+          </a:xfrm>
+          <a:prstGeom prst="rect">
+            <a:avLst/>
+          </a:prstGeom>
+          <a:noFill/>
+          <a:ln/>
+        </p:spPr>
+        <p:txBody>
+          <a:bodyPr wrap="square" lIns="0" tIns="0" rIns="0" bIns="0" rtlCol="0" anchor="ctr"/>
+          <a:lstStyle/>
+          <a:p>
+            <a:pPr algn="r" indent="0" marL="0">
+              <a:buNone/>
+            </a:pPr>
+            <a:r>
+              <a:rPr lang="en-US" sz="900" dirty="0">
+                <a:solidFill>
+                  <a:srgbClr val="6B7280"/>
+                </a:solidFill>
+                <a:latin typeface="Arial" pitchFamily="34" charset="0"/>
+                <a:ea typeface="Arial" pitchFamily="34" charset="-122"/>
+                <a:cs typeface="Arial" pitchFamily="34" charset="-120"/>
+              </a:rPr>
+              <a:t>Gizli · Ekim 2026  ·  LiveFX  ·  17</a:t>
+            </a:r>
+            <a:endParaRPr lang="en-US" sz="900" dirty="0"/>
+          </a:p>
+        </p:txBody>
+      </p:sp>
+      <p:sp>
+        <p:nvSpPr>
+          <p:cNvPr id="6" name="Text 3"/>
+          <p:cNvSpPr txBox="1"/>
+          <p:nvPr/>
+        </p:nvSpPr>
+        <p:spPr>
+          <a:xfrm>
+            <a:off x="548640" y="1298448"/>
+            <a:ext cx="6583680" cy="292608"/>
+          </a:xfrm>
+          <a:prstGeom prst="rect">
+            <a:avLst/>
+          </a:prstGeom>
+          <a:noFill/>
+          <a:ln/>
+        </p:spPr>
+        <p:txBody>
+          <a:bodyPr wrap="square" lIns="0" tIns="0" rIns="0" bIns="0" rtlCol="0" anchor="t">
+            <a:normAutofit/>
+          </a:bodyPr>
+          <a:lstStyle/>
+          <a:p>
+            <a:pPr indent="0" marL="0">
+              <a:buNone/>
+            </a:pPr>
+            <a:r>
+              <a:rPr lang="en-US" sz="1300" b="1" dirty="0">
+                <a:solidFill>
+                  <a:srgbClr val="FFD166"/>
+                </a:solidFill>
+                <a:latin typeface="Arial" pitchFamily="34" charset="0"/>
+                <a:ea typeface="Arial" pitchFamily="34" charset="-122"/>
+                <a:cs typeface="Arial" pitchFamily="34" charset="-120"/>
+              </a:rPr>
+              <a:t>5 yıllık gelir tablosu, temel senaryo (bin €)</a:t>
+            </a:r>
+            <a:endParaRPr lang="en-US" sz="1300" dirty="0"/>
+          </a:p>
+        </p:txBody>
+      </p:sp>
+      <p:graphicFrame>
+        <p:nvGraphicFramePr>
+          <p:cNvPr id="18" name="Table 0"/>
+          <p:cNvGraphicFramePr>
+            <a:graphicFrameLocks noGrp="1"/>
+          </p:cNvGraphicFramePr>
+          <p:nvPr>
+            <p:extLst>
+              <p:ext uri="{D42A27DB-BD31-4B8C-83A1-F6EECF244321}">
+                <p14:modId xmlns:p14="http://schemas.microsoft.com/office/powerpoint/2010/main" val="1579011935"/>
+              </p:ext>
+            </p:extLst>
+          </p:nvPr>
+        </p:nvGraphicFramePr>
+        <p:xfrm>
+          <a:off x="548640" y="1645920"/>
+          <a:ext cx="6583680" cy="914400"/>
+        </p:xfrm>
+        <a:graphic>
+          <a:graphicData uri="http://schemas.openxmlformats.org/drawingml/2006/table">
+            <a:tbl>
+              <a:tblPr/>
+              <a:tblGrid>
+                <a:gridCol w="1600200"/>
+                <a:gridCol w="996696"/>
+                <a:gridCol w="996696"/>
+                <a:gridCol w="996696"/>
+                <a:gridCol w="996696"/>
+                <a:gridCol w="996696"/>
+              </a:tblGrid>
+              <a:tr h="365760">
+                <a:tc>
+                  <a:txBody>
+                    <a:bodyPr/>
+                    <a:lstStyle/>
+                    <a:p>
+                      <a:pPr algn="l" indent="0" marL="0">
+                        <a:buNone/>
+                      </a:pPr>
+                      <a:r>
+                        <a:rPr lang="en-US" sz="1200" b="1" dirty="0">
+                          <a:solidFill>
+                            <a:srgbClr val="FFD166"/>
+                          </a:solidFill>
+                          <a:latin typeface="Arial" pitchFamily="34" charset="0"/>
+                          <a:ea typeface="Arial" pitchFamily="34" charset="-122"/>
+                          <a:cs typeface="Arial" pitchFamily="34" charset="-120"/>
+                        </a:rPr>
+                        <a:t>bin €</a:t>
+                      </a:r>
+                      <a:endParaRPr lang="en-US" sz="1200" dirty="0">
+                        <a:latin typeface="Arial" charset="0"/>
+                        <a:ea typeface="Arial" charset="0"/>
+                        <a:cs typeface="Arial" charset="0"/>
+                      </a:endParaRPr>
+                    </a:p>
+                  </a:txBody>
+                  <a:tcPr marL="91440" marR="91440" marT="0" marB="0" anchor="ctr">
+                    <a:lnL w="12700" cap="flat" cmpd="sng" algn="ctr">
+                      <a:solidFill>
+                        <a:srgbClr val="0F1115"/>
+                      </a:solidFill>
+                      <a:prstDash val="solid"/>
+                      <a:round/>
+                      <a:headEnd type="none" w="med" len="med"/>
+                      <a:tailEnd type="none" w="med" len="med"/>
+                    </a:lnL>
+                    <a:lnR w="12700" cap="flat" cmpd="sng" algn="ctr">
+                      <a:solidFill>
+                        <a:srgbClr val="0F1115"/>
+                      </a:solidFill>
+                      <a:prstDash val="solid"/>
+                      <a:round/>
+                      <a:headEnd type="none" w="med" len="med"/>
+                      <a:tailEnd type="none" w="med" len="med"/>
+                    </a:lnR>
+                    <a:lnT w="12700" cap="flat" cmpd="sng" algn="ctr">
+                      <a:solidFill>
+                        <a:srgbClr val="0F1115"/>
+                      </a:solidFill>
+                      <a:prstDash val="solid"/>
+                      <a:round/>
+                      <a:headEnd type="none" w="med" len="med"/>
+                      <a:tailEnd type="none" w="med" len="med"/>
+                    </a:lnT>
+                    <a:lnB w="12700" cap="flat" cmpd="sng" algn="ctr">
+                      <a:solidFill>
+                        <a:srgbClr val="0F1115"/>
+                      </a:solidFill>
+                      <a:prstDash val="solid"/>
+                      <a:round/>
+                      <a:headEnd type="none" w="med" len="med"/>
+                      <a:tailEnd type="none" w="med" len="med"/>
+                    </a:lnB>
+                    <a:solidFill>
+                      <a:srgbClr val="1F2330"/>
+                    </a:solidFill>
+                  </a:tcPr>
+                </a:tc>
+                <a:tc>
+                  <a:txBody>
+                    <a:bodyPr/>
+                    <a:lstStyle/>
+                    <a:p>
+                      <a:pPr algn="r" indent="0" marL="0">
+                        <a:buNone/>
+                      </a:pPr>
+                      <a:r>
+                        <a:rPr lang="en-US" sz="1200" b="1" dirty="0">
+                          <a:solidFill>
+                            <a:srgbClr val="FFD166"/>
+                          </a:solidFill>
+                          <a:latin typeface="Arial" pitchFamily="34" charset="0"/>
+                          <a:ea typeface="Arial" pitchFamily="34" charset="-122"/>
+                          <a:cs typeface="Arial" pitchFamily="34" charset="-120"/>
+                        </a:rPr>
+                        <a:t>2027</a:t>
+                      </a:r>
+                      <a:endParaRPr lang="en-US" sz="1200" dirty="0">
+                        <a:latin typeface="Arial" charset="0"/>
+                        <a:ea typeface="Arial" charset="0"/>
+                        <a:cs typeface="Arial" charset="0"/>
+                      </a:endParaRPr>
+                    </a:p>
+                  </a:txBody>
+                  <a:tcPr marL="91440" marR="91440" marT="0" marB="0" anchor="ctr">
+                    <a:lnL w="12700" cap="flat" cmpd="sng" algn="ctr">
+                      <a:solidFill>
+                        <a:srgbClr val="0F1115"/>
+                      </a:solidFill>
+                      <a:prstDash val="solid"/>
+                      <a:round/>
+                      <a:headEnd type="none" w="med" len="med"/>
+                      <a:tailEnd type="none" w="med" len="med"/>
+                    </a:lnL>
+                    <a:lnR w="12700" cap="flat" cmpd="sng" algn="ctr">
+                      <a:solidFill>
+                        <a:srgbClr val="0F1115"/>
+                      </a:solidFill>
+                      <a:prstDash val="solid"/>
+                      <a:round/>
+                      <a:headEnd type="none" w="med" len="med"/>
+                      <a:tailEnd type="none" w="med" len="med"/>
+                    </a:lnR>
+                    <a:lnT w="12700" cap="flat" cmpd="sng" algn="ctr">
+                      <a:solidFill>
+                        <a:srgbClr val="0F1115"/>
+                      </a:solidFill>
+                      <a:prstDash val="solid"/>
+                      <a:round/>
+                      <a:headEnd type="none" w="med" len="med"/>
+                      <a:tailEnd type="none" w="med" len="med"/>
+                    </a:lnT>
+                    <a:lnB w="12700" cap="flat" cmpd="sng" algn="ctr">
+                      <a:solidFill>
+                        <a:srgbClr val="0F1115"/>
+                      </a:solidFill>
+                      <a:prstDash val="solid"/>
+                      <a:round/>
+                      <a:headEnd type="none" w="med" len="med"/>
+                      <a:tailEnd type="none" w="med" len="med"/>
+                    </a:lnB>
+                    <a:solidFill>
+                      <a:srgbClr val="1F2330"/>
+                    </a:solidFill>
+                  </a:tcPr>
+                </a:tc>
+                <a:tc>
+                  <a:txBody>
+                    <a:bodyPr/>
+                    <a:lstStyle/>
+                    <a:p>
+                      <a:pPr algn="r" indent="0" marL="0">
+                        <a:buNone/>
+                      </a:pPr>
+                      <a:r>
+                        <a:rPr lang="en-US" sz="1200" b="1" dirty="0">
+                          <a:solidFill>
+                            <a:srgbClr val="FFD166"/>
+                          </a:solidFill>
+                          <a:latin typeface="Arial" pitchFamily="34" charset="0"/>
+                          <a:ea typeface="Arial" pitchFamily="34" charset="-122"/>
+                          <a:cs typeface="Arial" pitchFamily="34" charset="-120"/>
+                        </a:rPr>
+                        <a:t>2028</a:t>
+                      </a:r>
+                      <a:endParaRPr lang="en-US" sz="1200" dirty="0">
+                        <a:latin typeface="Arial" charset="0"/>
+                        <a:ea typeface="Arial" charset="0"/>
+                        <a:cs typeface="Arial" charset="0"/>
+                      </a:endParaRPr>
+                    </a:p>
+                  </a:txBody>
+                  <a:tcPr marL="91440" marR="91440" marT="0" marB="0" anchor="ctr">
+                    <a:lnL w="12700" cap="flat" cmpd="sng" algn="ctr">
+                      <a:solidFill>
+                        <a:srgbClr val="0F1115"/>
+                      </a:solidFill>
+                      <a:prstDash val="solid"/>
+                      <a:round/>
+                      <a:headEnd type="none" w="med" len="med"/>
+                      <a:tailEnd type="none" w="med" len="med"/>
+                    </a:lnL>
+                    <a:lnR w="12700" cap="flat" cmpd="sng" algn="ctr">
+                      <a:solidFill>
+                        <a:srgbClr val="0F1115"/>
+                      </a:solidFill>
+                      <a:prstDash val="solid"/>
+                      <a:round/>
+                      <a:headEnd type="none" w="med" len="med"/>
+                      <a:tailEnd type="none" w="med" len="med"/>
+                    </a:lnR>
+                    <a:lnT w="12700" cap="flat" cmpd="sng" algn="ctr">
+                      <a:solidFill>
+                        <a:srgbClr val="0F1115"/>
+                      </a:solidFill>
+                      <a:prstDash val="solid"/>
+                      <a:round/>
+                      <a:headEnd type="none" w="med" len="med"/>
+                      <a:tailEnd type="none" w="med" len="med"/>
+                    </a:lnT>
+                    <a:lnB w="12700" cap="flat" cmpd="sng" algn="ctr">
+                      <a:solidFill>
+                        <a:srgbClr val="0F1115"/>
+                      </a:solidFill>
+                      <a:prstDash val="solid"/>
+                      <a:round/>
+                      <a:headEnd type="none" w="med" len="med"/>
+                      <a:tailEnd type="none" w="med" len="med"/>
+                    </a:lnB>
+                    <a:solidFill>
+                      <a:srgbClr val="1F2330"/>
+                    </a:solidFill>
+                  </a:tcPr>
+                </a:tc>
+                <a:tc>
+                  <a:txBody>
+                    <a:bodyPr/>
+                    <a:lstStyle/>
+                    <a:p>
+                      <a:pPr algn="r" indent="0" marL="0">
+                        <a:buNone/>
+                      </a:pPr>
+                      <a:r>
+                        <a:rPr lang="en-US" sz="1200" b="1" dirty="0">
+                          <a:solidFill>
+                            <a:srgbClr val="FFD166"/>
+                          </a:solidFill>
+                          <a:latin typeface="Arial" pitchFamily="34" charset="0"/>
+                          <a:ea typeface="Arial" pitchFamily="34" charset="-122"/>
+                          <a:cs typeface="Arial" pitchFamily="34" charset="-120"/>
+                        </a:rPr>
+                        <a:t>2029</a:t>
+                      </a:r>
+                      <a:endParaRPr lang="en-US" sz="1200" dirty="0">
+                        <a:latin typeface="Arial" charset="0"/>
+                        <a:ea typeface="Arial" charset="0"/>
+                        <a:cs typeface="Arial" charset="0"/>
+                      </a:endParaRPr>
+                    </a:p>
+                  </a:txBody>
+                  <a:tcPr marL="91440" marR="91440" marT="0" marB="0" anchor="ctr">
+                    <a:lnL w="12700" cap="flat" cmpd="sng" algn="ctr">
+                      <a:solidFill>
+                        <a:srgbClr val="0F1115"/>
+                      </a:solidFill>
+                      <a:prstDash val="solid"/>
+                      <a:round/>
+                      <a:headEnd type="none" w="med" len="med"/>
+                      <a:tailEnd type="none" w="med" len="med"/>
+                    </a:lnL>
+                    <a:lnR w="12700" cap="flat" cmpd="sng" algn="ctr">
+                      <a:solidFill>
+                        <a:srgbClr val="0F1115"/>
+                      </a:solidFill>
+                      <a:prstDash val="solid"/>
+                      <a:round/>
+                      <a:headEnd type="none" w="med" len="med"/>
+                      <a:tailEnd type="none" w="med" len="med"/>
+                    </a:lnR>
+                    <a:lnT w="12700" cap="flat" cmpd="sng" algn="ctr">
+                      <a:solidFill>
+                        <a:srgbClr val="0F1115"/>
+                      </a:solidFill>
+                      <a:prstDash val="solid"/>
+                      <a:round/>
+                      <a:headEnd type="none" w="med" len="med"/>
+                      <a:tailEnd type="none" w="med" len="med"/>
+                    </a:lnT>
+                    <a:lnB w="12700" cap="flat" cmpd="sng" algn="ctr">
+                      <a:solidFill>
+                        <a:srgbClr val="0F1115"/>
+                      </a:solidFill>
+                      <a:prstDash val="solid"/>
+                      <a:round/>
+                      <a:headEnd type="none" w="med" len="med"/>
+                      <a:tailEnd type="none" w="med" len="med"/>
+                    </a:lnB>
+                    <a:solidFill>
+                      <a:srgbClr val="1F2330"/>
+                    </a:solidFill>
+                  </a:tcPr>
+                </a:tc>
+                <a:tc>
+                  <a:txBody>
+                    <a:bodyPr/>
+                    <a:lstStyle/>
+                    <a:p>
+                      <a:pPr algn="r" indent="0" marL="0">
+                        <a:buNone/>
+                      </a:pPr>
+                      <a:r>
+                        <a:rPr lang="en-US" sz="1200" b="1" dirty="0">
+                          <a:solidFill>
+                            <a:srgbClr val="FFD166"/>
+                          </a:solidFill>
+                          <a:latin typeface="Arial" pitchFamily="34" charset="0"/>
+                          <a:ea typeface="Arial" pitchFamily="34" charset="-122"/>
+                          <a:cs typeface="Arial" pitchFamily="34" charset="-120"/>
+                        </a:rPr>
+                        <a:t>2030</a:t>
+                      </a:r>
+                      <a:endParaRPr lang="en-US" sz="1200" dirty="0">
+                        <a:latin typeface="Arial" charset="0"/>
+                        <a:ea typeface="Arial" charset="0"/>
+                        <a:cs typeface="Arial" charset="0"/>
+                      </a:endParaRPr>
+                    </a:p>
+                  </a:txBody>
+                  <a:tcPr marL="91440" marR="91440" marT="0" marB="0" anchor="ctr">
+                    <a:lnL w="12700" cap="flat" cmpd="sng" algn="ctr">
+                      <a:solidFill>
+                        <a:srgbClr val="0F1115"/>
+                      </a:solidFill>
+                      <a:prstDash val="solid"/>
+                      <a:round/>
+                      <a:headEnd type="none" w="med" len="med"/>
+                      <a:tailEnd type="none" w="med" len="med"/>
+                    </a:lnL>
+                    <a:lnR w="12700" cap="flat" cmpd="sng" algn="ctr">
+                      <a:solidFill>
+                        <a:srgbClr val="0F1115"/>
+                      </a:solidFill>
+                      <a:prstDash val="solid"/>
+                      <a:round/>
+                      <a:headEnd type="none" w="med" len="med"/>
+                      <a:tailEnd type="none" w="med" len="med"/>
+                    </a:lnR>
+                    <a:lnT w="12700" cap="flat" cmpd="sng" algn="ctr">
+                      <a:solidFill>
+                        <a:srgbClr val="0F1115"/>
+                      </a:solidFill>
+                      <a:prstDash val="solid"/>
+                      <a:round/>
+                      <a:headEnd type="none" w="med" len="med"/>
+                      <a:tailEnd type="none" w="med" len="med"/>
+                    </a:lnT>
+                    <a:lnB w="12700" cap="flat" cmpd="sng" algn="ctr">
+                      <a:solidFill>
+                        <a:srgbClr val="0F1115"/>
+                      </a:solidFill>
+                      <a:prstDash val="solid"/>
+                      <a:round/>
+                      <a:headEnd type="none" w="med" len="med"/>
+                      <a:tailEnd type="none" w="med" len="med"/>
+                    </a:lnB>
+                    <a:solidFill>
+                      <a:srgbClr val="1F2330"/>
+                    </a:solidFill>
+                  </a:tcPr>
+                </a:tc>
+                <a:tc>
+                  <a:txBody>
+                    <a:bodyPr/>
+                    <a:lstStyle/>
+                    <a:p>
+                      <a:pPr algn="r" indent="0" marL="0">
+                        <a:buNone/>
+                      </a:pPr>
+                      <a:r>
+                        <a:rPr lang="en-US" sz="1200" b="1" dirty="0">
+                          <a:solidFill>
+                            <a:srgbClr val="FFD166"/>
+                          </a:solidFill>
+                          <a:latin typeface="Arial" pitchFamily="34" charset="0"/>
+                          <a:ea typeface="Arial" pitchFamily="34" charset="-122"/>
+                          <a:cs typeface="Arial" pitchFamily="34" charset="-120"/>
+                        </a:rPr>
+                        <a:t>2031</a:t>
+                      </a:r>
+                      <a:endParaRPr lang="en-US" sz="1200" dirty="0">
+                        <a:latin typeface="Arial" charset="0"/>
+                        <a:ea typeface="Arial" charset="0"/>
+                        <a:cs typeface="Arial" charset="0"/>
+                      </a:endParaRPr>
+                    </a:p>
+                  </a:txBody>
+                  <a:tcPr marL="91440" marR="91440" marT="0" marB="0" anchor="ctr">
+                    <a:lnL w="12700" cap="flat" cmpd="sng" algn="ctr">
+                      <a:solidFill>
+                        <a:srgbClr val="0F1115"/>
+                      </a:solidFill>
+                      <a:prstDash val="solid"/>
+                      <a:round/>
+                      <a:headEnd type="none" w="med" len="med"/>
+                      <a:tailEnd type="none" w="med" len="med"/>
+                    </a:lnL>
+                    <a:lnR w="12700" cap="flat" cmpd="sng" algn="ctr">
+                      <a:solidFill>
+                        <a:srgbClr val="0F1115"/>
+                      </a:solidFill>
+                      <a:prstDash val="solid"/>
+                      <a:round/>
+                      <a:headEnd type="none" w="med" len="med"/>
+                      <a:tailEnd type="none" w="med" len="med"/>
+                    </a:lnR>
+                    <a:lnT w="12700" cap="flat" cmpd="sng" algn="ctr">
+                      <a:solidFill>
+                        <a:srgbClr val="0F1115"/>
+                      </a:solidFill>
+                      <a:prstDash val="solid"/>
+                      <a:round/>
+                      <a:headEnd type="none" w="med" len="med"/>
+                      <a:tailEnd type="none" w="med" len="med"/>
+                    </a:lnT>
+                    <a:lnB w="12700" cap="flat" cmpd="sng" algn="ctr">
+                      <a:solidFill>
+                        <a:srgbClr val="0F1115"/>
+                      </a:solidFill>
+                      <a:prstDash val="solid"/>
+                      <a:round/>
+                      <a:headEnd type="none" w="med" len="med"/>
+                      <a:tailEnd type="none" w="med" len="med"/>
+                    </a:lnB>
+                    <a:solidFill>
+                      <a:srgbClr val="1F2330"/>
+                    </a:solidFill>
+                  </a:tcPr>
+                </a:tc>
+              </a:tr>
+              <a:tr h="365760">
+                <a:tc>
+                  <a:txBody>
+                    <a:bodyPr/>
+                    <a:lstStyle/>
+                    <a:p>
+                      <a:pPr algn="l" indent="0" marL="0">
+                        <a:buNone/>
+                      </a:pPr>
+                      <a:r>
+                        <a:rPr lang="en-US" sz="1200" b="1" dirty="0">
+                          <a:solidFill>
+                            <a:srgbClr val="9AA3B5"/>
+                          </a:solidFill>
+                          <a:latin typeface="Arial" pitchFamily="34" charset="0"/>
+                          <a:ea typeface="Arial" pitchFamily="34" charset="-122"/>
+                          <a:cs typeface="Arial" pitchFamily="34" charset="-120"/>
+                        </a:rPr>
+                        <a:t>Gelir</a:t>
+                      </a:r>
+                      <a:endParaRPr lang="en-US" sz="1200" dirty="0">
+                        <a:latin typeface="Arial" charset="0"/>
+                        <a:ea typeface="Arial" charset="0"/>
+                        <a:cs typeface="Arial" charset="0"/>
+                      </a:endParaRPr>
+                    </a:p>
+                  </a:txBody>
+                  <a:tcPr marL="91440" marR="91440" marT="0" marB="0" anchor="ctr">
+                    <a:lnL w="12700" cap="flat" cmpd="sng" algn="ctr">
+                      <a:solidFill>
+                        <a:srgbClr val="0F1115"/>
+                      </a:solidFill>
+                      <a:prstDash val="solid"/>
+                      <a:round/>
+                      <a:headEnd type="none" w="med" len="med"/>
+                      <a:tailEnd type="none" w="med" len="med"/>
+                    </a:lnL>
+                    <a:lnR w="12700" cap="flat" cmpd="sng" algn="ctr">
+                      <a:solidFill>
+                        <a:srgbClr val="0F1115"/>
+                      </a:solidFill>
+                      <a:prstDash val="solid"/>
+                      <a:round/>
+                      <a:headEnd type="none" w="med" len="med"/>
+                      <a:tailEnd type="none" w="med" len="med"/>
+                    </a:lnR>
+                    <a:lnT w="12700" cap="flat" cmpd="sng" algn="ctr">
+                      <a:solidFill>
+                        <a:srgbClr val="0F1115"/>
+                      </a:solidFill>
+                      <a:prstDash val="solid"/>
+                      <a:round/>
+                      <a:headEnd type="none" w="med" len="med"/>
+                      <a:tailEnd type="none" w="med" len="med"/>
+                    </a:lnT>
+                    <a:lnB w="12700" cap="flat" cmpd="sng" algn="ctr">
+                      <a:solidFill>
+                        <a:srgbClr val="0F1115"/>
+                      </a:solidFill>
+                      <a:prstDash val="solid"/>
+                      <a:round/>
+                      <a:headEnd type="none" w="med" len="med"/>
+                      <a:tailEnd type="none" w="med" len="med"/>
+                    </a:lnB>
+                    <a:solidFill>
+                      <a:srgbClr val="181B23"/>
+                    </a:solidFill>
+                  </a:tcPr>
+                </a:tc>
+                <a:tc>
+                  <a:txBody>
+                    <a:bodyPr/>
+                    <a:lstStyle/>
+                    <a:p>
+                      <a:pPr algn="r" indent="0" marL="0">
+                        <a:buNone/>
+                      </a:pPr>
+                      <a:r>
+                        <a:rPr lang="en-US" sz="1200" dirty="0">
+                          <a:solidFill>
+                            <a:srgbClr val="FFFFFF"/>
+                          </a:solidFill>
+                          <a:latin typeface="Arial" pitchFamily="34" charset="0"/>
+                          <a:ea typeface="Arial" pitchFamily="34" charset="-122"/>
+                          <a:cs typeface="Arial" pitchFamily="34" charset="-120"/>
+                        </a:rPr>
+                        <a:t>51</a:t>
+                      </a:r>
+                      <a:endParaRPr lang="en-US" sz="1200" dirty="0">
+                        <a:latin typeface="Arial" charset="0"/>
+                        <a:ea typeface="Arial" charset="0"/>
+                        <a:cs typeface="Arial" charset="0"/>
+                      </a:endParaRPr>
+                    </a:p>
+                  </a:txBody>
+                  <a:tcPr marL="91440" marR="91440" marT="0" marB="0" anchor="ctr">
+                    <a:lnL w="12700" cap="flat" cmpd="sng" algn="ctr">
+                      <a:solidFill>
+                        <a:srgbClr val="0F1115"/>
+                      </a:solidFill>
+                      <a:prstDash val="solid"/>
+                      <a:round/>
+                      <a:headEnd type="none" w="med" len="med"/>
+                      <a:tailEnd type="none" w="med" len="med"/>
+                    </a:lnL>
+                    <a:lnR w="12700" cap="flat" cmpd="sng" algn="ctr">
+                      <a:solidFill>
+                        <a:srgbClr val="0F1115"/>
+                      </a:solidFill>
+                      <a:prstDash val="solid"/>
+                      <a:round/>
+                      <a:headEnd type="none" w="med" len="med"/>
+                      <a:tailEnd type="none" w="med" len="med"/>
+                    </a:lnR>
+                    <a:lnT w="12700" cap="flat" cmpd="sng" algn="ctr">
+                      <a:solidFill>
+                        <a:srgbClr val="0F1115"/>
+                      </a:solidFill>
+                      <a:prstDash val="solid"/>
+                      <a:round/>
+                      <a:headEnd type="none" w="med" len="med"/>
+                      <a:tailEnd type="none" w="med" len="med"/>
+                    </a:lnT>
+                    <a:lnB w="12700" cap="flat" cmpd="sng" algn="ctr">
+                      <a:solidFill>
+                        <a:srgbClr val="0F1115"/>
+                      </a:solidFill>
+                      <a:prstDash val="solid"/>
+                      <a:round/>
+                      <a:headEnd type="none" w="med" len="med"/>
+                      <a:tailEnd type="none" w="med" len="med"/>
+                    </a:lnB>
+                    <a:solidFill>
+                      <a:srgbClr val="181B23"/>
+                    </a:solidFill>
+                  </a:tcPr>
+                </a:tc>
+                <a:tc>
+                  <a:txBody>
+                    <a:bodyPr/>
+                    <a:lstStyle/>
+                    <a:p>
+                      <a:pPr algn="r" indent="0" marL="0">
+                        <a:buNone/>
+                      </a:pPr>
+                      <a:r>
+                        <a:rPr lang="en-US" sz="1200" dirty="0">
+                          <a:solidFill>
+                            <a:srgbClr val="FFFFFF"/>
+                          </a:solidFill>
+                          <a:latin typeface="Arial" pitchFamily="34" charset="0"/>
+                          <a:ea typeface="Arial" pitchFamily="34" charset="-122"/>
+                          <a:cs typeface="Arial" pitchFamily="34" charset="-120"/>
+                        </a:rPr>
+                        <a:t>336</a:t>
+                      </a:r>
+                      <a:endParaRPr lang="en-US" sz="1200" dirty="0">
+                        <a:latin typeface="Arial" charset="0"/>
+                        <a:ea typeface="Arial" charset="0"/>
+                        <a:cs typeface="Arial" charset="0"/>
+                      </a:endParaRPr>
+                    </a:p>
+                  </a:txBody>
+                  <a:tcPr marL="91440" marR="91440" marT="0" marB="0" anchor="ctr">
+                    <a:lnL w="12700" cap="flat" cmpd="sng" algn="ctr">
+                      <a:solidFill>
+                        <a:srgbClr val="0F1115"/>
+                      </a:solidFill>
+                      <a:prstDash val="solid"/>
+                      <a:round/>
+                      <a:headEnd type="none" w="med" len="med"/>
+                      <a:tailEnd type="none" w="med" len="med"/>
+                    </a:lnL>
+                    <a:lnR w="12700" cap="flat" cmpd="sng" algn="ctr">
+                      <a:solidFill>
+                        <a:srgbClr val="0F1115"/>
+                      </a:solidFill>
+                      <a:prstDash val="solid"/>
+                      <a:round/>
+                      <a:headEnd type="none" w="med" len="med"/>
+                      <a:tailEnd type="none" w="med" len="med"/>
+                    </a:lnR>
+                    <a:lnT w="12700" cap="flat" cmpd="sng" algn="ctr">
+                      <a:solidFill>
+                        <a:srgbClr val="0F1115"/>
+                      </a:solidFill>
+                      <a:prstDash val="solid"/>
+                      <a:round/>
+                      <a:headEnd type="none" w="med" len="med"/>
+                      <a:tailEnd type="none" w="med" len="med"/>
+                    </a:lnT>
+                    <a:lnB w="12700" cap="flat" cmpd="sng" algn="ctr">
+                      <a:solidFill>
+                        <a:srgbClr val="0F1115"/>
+                      </a:solidFill>
+                      <a:prstDash val="solid"/>
+                      <a:round/>
+                      <a:headEnd type="none" w="med" len="med"/>
+                      <a:tailEnd type="none" w="med" len="med"/>
+                    </a:lnB>
+                    <a:solidFill>
+                      <a:srgbClr val="181B23"/>
+                    </a:solidFill>
+                  </a:tcPr>
+                </a:tc>
+                <a:tc>
+                  <a:txBody>
+                    <a:bodyPr/>
+                    <a:lstStyle/>
+                    <a:p>
+                      <a:pPr algn="r" indent="0" marL="0">
+                        <a:buNone/>
+                      </a:pPr>
+                      <a:r>
+                        <a:rPr lang="en-US" sz="1200" dirty="0">
+                          <a:solidFill>
+                            <a:srgbClr val="FFFFFF"/>
+                          </a:solidFill>
+                          <a:latin typeface="Arial" pitchFamily="34" charset="0"/>
+                          <a:ea typeface="Arial" pitchFamily="34" charset="-122"/>
+                          <a:cs typeface="Arial" pitchFamily="34" charset="-120"/>
+                        </a:rPr>
+                        <a:t>1.038</a:t>
+                      </a:r>
+                      <a:endParaRPr lang="en-US" sz="1200" dirty="0">
+                        <a:latin typeface="Arial" charset="0"/>
+                        <a:ea typeface="Arial" charset="0"/>
+                        <a:cs typeface="Arial" charset="0"/>
+                      </a:endParaRPr>
+                    </a:p>
+                  </a:txBody>
+                  <a:tcPr marL="91440" marR="91440" marT="0" marB="0" anchor="ctr">
+                    <a:lnL w="12700" cap="flat" cmpd="sng" algn="ctr">
+                      <a:solidFill>
+                        <a:srgbClr val="0F1115"/>
+                      </a:solidFill>
+                      <a:prstDash val="solid"/>
+                      <a:round/>
+                      <a:headEnd type="none" w="med" len="med"/>
+                      <a:tailEnd type="none" w="med" len="med"/>
+                    </a:lnL>
+                    <a:lnR w="12700" cap="flat" cmpd="sng" algn="ctr">
+                      <a:solidFill>
+                        <a:srgbClr val="0F1115"/>
+                      </a:solidFill>
+                      <a:prstDash val="solid"/>
+                      <a:round/>
+                      <a:headEnd type="none" w="med" len="med"/>
+                      <a:tailEnd type="none" w="med" len="med"/>
+                    </a:lnR>
+                    <a:lnT w="12700" cap="flat" cmpd="sng" algn="ctr">
+                      <a:solidFill>
+                        <a:srgbClr val="0F1115"/>
+                      </a:solidFill>
+                      <a:prstDash val="solid"/>
+                      <a:round/>
+                      <a:headEnd type="none" w="med" len="med"/>
+                      <a:tailEnd type="none" w="med" len="med"/>
+                    </a:lnT>
+                    <a:lnB w="12700" cap="flat" cmpd="sng" algn="ctr">
+                      <a:solidFill>
+                        <a:srgbClr val="0F1115"/>
+                      </a:solidFill>
+                      <a:prstDash val="solid"/>
+                      <a:round/>
+                      <a:headEnd type="none" w="med" len="med"/>
+                      <a:tailEnd type="none" w="med" len="med"/>
+                    </a:lnB>
+                    <a:solidFill>
+                      <a:srgbClr val="181B23"/>
+                    </a:solidFill>
+                  </a:tcPr>
+                </a:tc>
+                <a:tc>
+                  <a:txBody>
+                    <a:bodyPr/>
+                    <a:lstStyle/>
+                    <a:p>
+                      <a:pPr algn="r" indent="0" marL="0">
+                        <a:buNone/>
+                      </a:pPr>
+                      <a:r>
+                        <a:rPr lang="en-US" sz="1200" dirty="0">
+                          <a:solidFill>
+                            <a:srgbClr val="FFFFFF"/>
+                          </a:solidFill>
+                          <a:latin typeface="Arial" pitchFamily="34" charset="0"/>
+                          <a:ea typeface="Arial" pitchFamily="34" charset="-122"/>
+                          <a:cs typeface="Arial" pitchFamily="34" charset="-120"/>
+                        </a:rPr>
+                        <a:t>1.984</a:t>
+                      </a:r>
+                      <a:endParaRPr lang="en-US" sz="1200" dirty="0">
+                        <a:latin typeface="Arial" charset="0"/>
+                        <a:ea typeface="Arial" charset="0"/>
+                        <a:cs typeface="Arial" charset="0"/>
+                      </a:endParaRPr>
+                    </a:p>
+                  </a:txBody>
+                  <a:tcPr marL="91440" marR="91440" marT="0" marB="0" anchor="ctr">
+                    <a:lnL w="12700" cap="flat" cmpd="sng" algn="ctr">
+                      <a:solidFill>
+                        <a:srgbClr val="0F1115"/>
+                      </a:solidFill>
+                      <a:prstDash val="solid"/>
+                      <a:round/>
+                      <a:headEnd type="none" w="med" len="med"/>
+                      <a:tailEnd type="none" w="med" len="med"/>
+                    </a:lnL>
+                    <a:lnR w="12700" cap="flat" cmpd="sng" algn="ctr">
+                      <a:solidFill>
+                        <a:srgbClr val="0F1115"/>
+                      </a:solidFill>
+                      <a:prstDash val="solid"/>
+                      <a:round/>
+                      <a:headEnd type="none" w="med" len="med"/>
+                      <a:tailEnd type="none" w="med" len="med"/>
+                    </a:lnR>
+                    <a:lnT w="12700" cap="flat" cmpd="sng" algn="ctr">
+                      <a:solidFill>
+                        <a:srgbClr val="0F1115"/>
+                      </a:solidFill>
+                      <a:prstDash val="solid"/>
+                      <a:round/>
+                      <a:headEnd type="none" w="med" len="med"/>
+                      <a:tailEnd type="none" w="med" len="med"/>
+                    </a:lnT>
+                    <a:lnB w="12700" cap="flat" cmpd="sng" algn="ctr">
+                      <a:solidFill>
+                        <a:srgbClr val="0F1115"/>
+                      </a:solidFill>
+                      <a:prstDash val="solid"/>
+                      <a:round/>
+                      <a:headEnd type="none" w="med" len="med"/>
+                      <a:tailEnd type="none" w="med" len="med"/>
+                    </a:lnB>
+                    <a:solidFill>
+                      <a:srgbClr val="181B23"/>
+                    </a:solidFill>
+                  </a:tcPr>
+                </a:tc>
+                <a:tc>
+                  <a:txBody>
+                    <a:bodyPr/>
+                    <a:lstStyle/>
+                    <a:p>
+                      <a:pPr algn="r" indent="0" marL="0">
+                        <a:buNone/>
+                      </a:pPr>
+                      <a:r>
+                        <a:rPr lang="en-US" sz="1200" dirty="0">
+                          <a:solidFill>
+                            <a:srgbClr val="FFFFFF"/>
+                          </a:solidFill>
+                          <a:latin typeface="Arial" pitchFamily="34" charset="0"/>
+                          <a:ea typeface="Arial" pitchFamily="34" charset="-122"/>
+                          <a:cs typeface="Arial" pitchFamily="34" charset="-120"/>
+                        </a:rPr>
+                        <a:t>3.152</a:t>
+                      </a:r>
+                      <a:endParaRPr lang="en-US" sz="1200" dirty="0">
+                        <a:latin typeface="Arial" charset="0"/>
+                        <a:ea typeface="Arial" charset="0"/>
+                        <a:cs typeface="Arial" charset="0"/>
+                      </a:endParaRPr>
+                    </a:p>
+                  </a:txBody>
+                  <a:tcPr marL="91440" marR="91440" marT="0" marB="0" anchor="ctr">
+                    <a:lnL w="12700" cap="flat" cmpd="sng" algn="ctr">
+                      <a:solidFill>
+                        <a:srgbClr val="0F1115"/>
+                      </a:solidFill>
+                      <a:prstDash val="solid"/>
+                      <a:round/>
+                      <a:headEnd type="none" w="med" len="med"/>
+                      <a:tailEnd type="none" w="med" len="med"/>
+                    </a:lnL>
+                    <a:lnR w="12700" cap="flat" cmpd="sng" algn="ctr">
+                      <a:solidFill>
+                        <a:srgbClr val="0F1115"/>
+                      </a:solidFill>
+                      <a:prstDash val="solid"/>
+                      <a:round/>
+                      <a:headEnd type="none" w="med" len="med"/>
+                      <a:tailEnd type="none" w="med" len="med"/>
+                    </a:lnR>
+                    <a:lnT w="12700" cap="flat" cmpd="sng" algn="ctr">
+                      <a:solidFill>
+                        <a:srgbClr val="0F1115"/>
+                      </a:solidFill>
+                      <a:prstDash val="solid"/>
+                      <a:round/>
+                      <a:headEnd type="none" w="med" len="med"/>
+                      <a:tailEnd type="none" w="med" len="med"/>
+                    </a:lnT>
+                    <a:lnB w="12700" cap="flat" cmpd="sng" algn="ctr">
+                      <a:solidFill>
+                        <a:srgbClr val="0F1115"/>
+                      </a:solidFill>
+                      <a:prstDash val="solid"/>
+                      <a:round/>
+                      <a:headEnd type="none" w="med" len="med"/>
+                      <a:tailEnd type="none" w="med" len="med"/>
+                    </a:lnB>
+                    <a:solidFill>
+                      <a:srgbClr val="181B23"/>
+                    </a:solidFill>
+                  </a:tcPr>
+                </a:tc>
+              </a:tr>
+              <a:tr h="365760">
+                <a:tc>
+                  <a:txBody>
+                    <a:bodyPr/>
+                    <a:lstStyle/>
+                    <a:p>
+                      <a:pPr algn="l" indent="0" marL="0">
+                        <a:buNone/>
+                      </a:pPr>
+                      <a:r>
+                        <a:rPr lang="en-US" sz="1200" b="1" dirty="0">
+                          <a:solidFill>
+                            <a:srgbClr val="9AA3B5"/>
+                          </a:solidFill>
+                          <a:latin typeface="Arial" pitchFamily="34" charset="0"/>
+                          <a:ea typeface="Arial" pitchFamily="34" charset="-122"/>
+                          <a:cs typeface="Arial" pitchFamily="34" charset="-120"/>
+                        </a:rPr>
+                        <a:t>Gider</a:t>
+                      </a:r>
+                      <a:endParaRPr lang="en-US" sz="1200" dirty="0">
+                        <a:latin typeface="Arial" charset="0"/>
+                        <a:ea typeface="Arial" charset="0"/>
+                        <a:cs typeface="Arial" charset="0"/>
+                      </a:endParaRPr>
+                    </a:p>
+                  </a:txBody>
+                  <a:tcPr marL="91440" marR="91440" marT="0" marB="0" anchor="ctr">
+                    <a:lnL w="12700" cap="flat" cmpd="sng" algn="ctr">
+                      <a:solidFill>
+                        <a:srgbClr val="0F1115"/>
+                      </a:solidFill>
+                      <a:prstDash val="solid"/>
+                      <a:round/>
+                      <a:headEnd type="none" w="med" len="med"/>
+                      <a:tailEnd type="none" w="med" len="med"/>
+                    </a:lnL>
+                    <a:lnR w="12700" cap="flat" cmpd="sng" algn="ctr">
+                      <a:solidFill>
+                        <a:srgbClr val="0F1115"/>
+                      </a:solidFill>
+                      <a:prstDash val="solid"/>
+                      <a:round/>
+                      <a:headEnd type="none" w="med" len="med"/>
+                      <a:tailEnd type="none" w="med" len="med"/>
+                    </a:lnR>
+                    <a:lnT w="12700" cap="flat" cmpd="sng" algn="ctr">
+                      <a:solidFill>
+                        <a:srgbClr val="0F1115"/>
+                      </a:solidFill>
+                      <a:prstDash val="solid"/>
+                      <a:round/>
+                      <a:headEnd type="none" w="med" len="med"/>
+                      <a:tailEnd type="none" w="med" len="med"/>
+                    </a:lnT>
+                    <a:lnB w="12700" cap="flat" cmpd="sng" algn="ctr">
+                      <a:solidFill>
+                        <a:srgbClr val="0F1115"/>
+                      </a:solidFill>
+                      <a:prstDash val="solid"/>
+                      <a:round/>
+                      <a:headEnd type="none" w="med" len="med"/>
+                      <a:tailEnd type="none" w="med" len="med"/>
+                    </a:lnB>
+                    <a:solidFill>
+                      <a:srgbClr val="181B23"/>
+                    </a:solidFill>
+                  </a:tcPr>
+                </a:tc>
+                <a:tc>
+                  <a:txBody>
+                    <a:bodyPr/>
+                    <a:lstStyle/>
+                    <a:p>
+                      <a:pPr algn="r" indent="0" marL="0">
+                        <a:buNone/>
+                      </a:pPr>
+                      <a:r>
+                        <a:rPr lang="en-US" sz="1200" dirty="0">
+                          <a:solidFill>
+                            <a:srgbClr val="FFFFFF"/>
+                          </a:solidFill>
+                          <a:latin typeface="Arial" pitchFamily="34" charset="0"/>
+                          <a:ea typeface="Arial" pitchFamily="34" charset="-122"/>
+                          <a:cs typeface="Arial" pitchFamily="34" charset="-120"/>
+                        </a:rPr>
+                        <a:t>166</a:t>
+                      </a:r>
+                      <a:endParaRPr lang="en-US" sz="1200" dirty="0">
+                        <a:latin typeface="Arial" charset="0"/>
+                        <a:ea typeface="Arial" charset="0"/>
+                        <a:cs typeface="Arial" charset="0"/>
+                      </a:endParaRPr>
+                    </a:p>
+                  </a:txBody>
+                  <a:tcPr marL="91440" marR="91440" marT="0" marB="0" anchor="ctr">
+                    <a:lnL w="12700" cap="flat" cmpd="sng" algn="ctr">
+                      <a:solidFill>
+                        <a:srgbClr val="0F1115"/>
+                      </a:solidFill>
+                      <a:prstDash val="solid"/>
+                      <a:round/>
+                      <a:headEnd type="none" w="med" len="med"/>
+                      <a:tailEnd type="none" w="med" len="med"/>
+                    </a:lnL>
+                    <a:lnR w="12700" cap="flat" cmpd="sng" algn="ctr">
+                      <a:solidFill>
+                        <a:srgbClr val="0F1115"/>
+                      </a:solidFill>
+                      <a:prstDash val="solid"/>
+                      <a:round/>
+                      <a:headEnd type="none" w="med" len="med"/>
+                      <a:tailEnd type="none" w="med" len="med"/>
+                    </a:lnR>
+                    <a:lnT w="12700" cap="flat" cmpd="sng" algn="ctr">
+                      <a:solidFill>
+                        <a:srgbClr val="0F1115"/>
+                      </a:solidFill>
+                      <a:prstDash val="solid"/>
+                      <a:round/>
+                      <a:headEnd type="none" w="med" len="med"/>
+                      <a:tailEnd type="none" w="med" len="med"/>
+                    </a:lnT>
+                    <a:lnB w="12700" cap="flat" cmpd="sng" algn="ctr">
+                      <a:solidFill>
+                        <a:srgbClr val="0F1115"/>
+                      </a:solidFill>
+                      <a:prstDash val="solid"/>
+                      <a:round/>
+                      <a:headEnd type="none" w="med" len="med"/>
+                      <a:tailEnd type="none" w="med" len="med"/>
+                    </a:lnB>
+                    <a:solidFill>
+                      <a:srgbClr val="181B23"/>
+                    </a:solidFill>
+                  </a:tcPr>
+                </a:tc>
+                <a:tc>
+                  <a:txBody>
+                    <a:bodyPr/>
+                    <a:lstStyle/>
+                    <a:p>
+                      <a:pPr algn="r" indent="0" marL="0">
+                        <a:buNone/>
+                      </a:pPr>
+                      <a:r>
+                        <a:rPr lang="en-US" sz="1200" dirty="0">
+                          <a:solidFill>
+                            <a:srgbClr val="FFFFFF"/>
+                          </a:solidFill>
+                          <a:latin typeface="Arial" pitchFamily="34" charset="0"/>
+                          <a:ea typeface="Arial" pitchFamily="34" charset="-122"/>
+                          <a:cs typeface="Arial" pitchFamily="34" charset="-120"/>
+                        </a:rPr>
+                        <a:t>295</a:t>
+                      </a:r>
+                      <a:endParaRPr lang="en-US" sz="1200" dirty="0">
+                        <a:latin typeface="Arial" charset="0"/>
+                        <a:ea typeface="Arial" charset="0"/>
+                        <a:cs typeface="Arial" charset="0"/>
+                      </a:endParaRPr>
+                    </a:p>
+                  </a:txBody>
+                  <a:tcPr marL="91440" marR="91440" marT="0" marB="0" anchor="ctr">
+                    <a:lnL w="12700" cap="flat" cmpd="sng" algn="ctr">
+                      <a:solidFill>
+                        <a:srgbClr val="0F1115"/>
+                      </a:solidFill>
+                      <a:prstDash val="solid"/>
+                      <a:round/>
+                      <a:headEnd type="none" w="med" len="med"/>
+                      <a:tailEnd type="none" w="med" len="med"/>
+                    </a:lnL>
+                    <a:lnR w="12700" cap="flat" cmpd="sng" algn="ctr">
+                      <a:solidFill>
+                        <a:srgbClr val="0F1115"/>
+                      </a:solidFill>
+                      <a:prstDash val="solid"/>
+                      <a:round/>
+                      <a:headEnd type="none" w="med" len="med"/>
+                      <a:tailEnd type="none" w="med" len="med"/>
+                    </a:lnR>
+                    <a:lnT w="12700" cap="flat" cmpd="sng" algn="ctr">
+                      <a:solidFill>
+                        <a:srgbClr val="0F1115"/>
+                      </a:solidFill>
+                      <a:prstDash val="solid"/>
+                      <a:round/>
+                      <a:headEnd type="none" w="med" len="med"/>
+                      <a:tailEnd type="none" w="med" len="med"/>
+                    </a:lnT>
+                    <a:lnB w="12700" cap="flat" cmpd="sng" algn="ctr">
+                      <a:solidFill>
+                        <a:srgbClr val="0F1115"/>
+                      </a:solidFill>
+                      <a:prstDash val="solid"/>
+                      <a:round/>
+                      <a:headEnd type="none" w="med" len="med"/>
+                      <a:tailEnd type="none" w="med" len="med"/>
+                    </a:lnB>
+                    <a:solidFill>
+                      <a:srgbClr val="181B23"/>
+                    </a:solidFill>
+                  </a:tcPr>
+                </a:tc>
+                <a:tc>
+                  <a:txBody>
+                    <a:bodyPr/>
+                    <a:lstStyle/>
+                    <a:p>
+                      <a:pPr algn="r" indent="0" marL="0">
+                        <a:buNone/>
+                      </a:pPr>
+                      <a:r>
+                        <a:rPr lang="en-US" sz="1200" dirty="0">
+                          <a:solidFill>
+                            <a:srgbClr val="FFFFFF"/>
+                          </a:solidFill>
+                          <a:latin typeface="Arial" pitchFamily="34" charset="0"/>
+                          <a:ea typeface="Arial" pitchFamily="34" charset="-122"/>
+                          <a:cs typeface="Arial" pitchFamily="34" charset="-120"/>
+                        </a:rPr>
+                        <a:t>710</a:t>
+                      </a:r>
+                      <a:endParaRPr lang="en-US" sz="1200" dirty="0">
+                        <a:latin typeface="Arial" charset="0"/>
+                        <a:ea typeface="Arial" charset="0"/>
+                        <a:cs typeface="Arial" charset="0"/>
+                      </a:endParaRPr>
+                    </a:p>
+                  </a:txBody>
+                  <a:tcPr marL="91440" marR="91440" marT="0" marB="0" anchor="ctr">
+                    <a:lnL w="12700" cap="flat" cmpd="sng" algn="ctr">
+                      <a:solidFill>
+                        <a:srgbClr val="0F1115"/>
+                      </a:solidFill>
+                      <a:prstDash val="solid"/>
+                      <a:round/>
+                      <a:headEnd type="none" w="med" len="med"/>
+                      <a:tailEnd type="none" w="med" len="med"/>
+                    </a:lnL>
+                    <a:lnR w="12700" cap="flat" cmpd="sng" algn="ctr">
+                      <a:solidFill>
+                        <a:srgbClr val="0F1115"/>
+                      </a:solidFill>
+                      <a:prstDash val="solid"/>
+                      <a:round/>
+                      <a:headEnd type="none" w="med" len="med"/>
+                      <a:tailEnd type="none" w="med" len="med"/>
+                    </a:lnR>
+                    <a:lnT w="12700" cap="flat" cmpd="sng" algn="ctr">
+                      <a:solidFill>
+                        <a:srgbClr val="0F1115"/>
+                      </a:solidFill>
+                      <a:prstDash val="solid"/>
+                      <a:round/>
+                      <a:headEnd type="none" w="med" len="med"/>
+                      <a:tailEnd type="none" w="med" len="med"/>
+                    </a:lnT>
+                    <a:lnB w="12700" cap="flat" cmpd="sng" algn="ctr">
+                      <a:solidFill>
+                        <a:srgbClr val="0F1115"/>
+                      </a:solidFill>
+                      <a:prstDash val="solid"/>
+                      <a:round/>
+                      <a:headEnd type="none" w="med" len="med"/>
+                      <a:tailEnd type="none" w="med" len="med"/>
+                    </a:lnB>
+                    <a:solidFill>
+                      <a:srgbClr val="181B23"/>
+                    </a:solidFill>
+                  </a:tcPr>
+                </a:tc>
+                <a:tc>
+                  <a:txBody>
+                    <a:bodyPr/>
+                    <a:lstStyle/>
+                    <a:p>
+                      <a:pPr algn="r" indent="0" marL="0">
+                        <a:buNone/>
+                      </a:pPr>
+                      <a:r>
+                        <a:rPr lang="en-US" sz="1200" dirty="0">
+                          <a:solidFill>
+                            <a:srgbClr val="FFFFFF"/>
+                          </a:solidFill>
+                          <a:latin typeface="Arial" pitchFamily="34" charset="0"/>
+                          <a:ea typeface="Arial" pitchFamily="34" charset="-122"/>
+                          <a:cs typeface="Arial" pitchFamily="34" charset="-120"/>
+                        </a:rPr>
+                        <a:t>1.065</a:t>
+                      </a:r>
+                      <a:endParaRPr lang="en-US" sz="1200" dirty="0">
+                        <a:latin typeface="Arial" charset="0"/>
+                        <a:ea typeface="Arial" charset="0"/>
+                        <a:cs typeface="Arial" charset="0"/>
+                      </a:endParaRPr>
+                    </a:p>
+                  </a:txBody>
+                  <a:tcPr marL="91440" marR="91440" marT="0" marB="0" anchor="ctr">
+                    <a:lnL w="12700" cap="flat" cmpd="sng" algn="ctr">
+                      <a:solidFill>
+                        <a:srgbClr val="0F1115"/>
+                      </a:solidFill>
+                      <a:prstDash val="solid"/>
+                      <a:round/>
+                      <a:headEnd type="none" w="med" len="med"/>
+                      <a:tailEnd type="none" w="med" len="med"/>
+                    </a:lnL>
+                    <a:lnR w="12700" cap="flat" cmpd="sng" algn="ctr">
+                      <a:solidFill>
+                        <a:srgbClr val="0F1115"/>
+                      </a:solidFill>
+                      <a:prstDash val="solid"/>
+                      <a:round/>
+                      <a:headEnd type="none" w="med" len="med"/>
+                      <a:tailEnd type="none" w="med" len="med"/>
+                    </a:lnR>
+                    <a:lnT w="12700" cap="flat" cmpd="sng" algn="ctr">
+                      <a:solidFill>
+                        <a:srgbClr val="0F1115"/>
+                      </a:solidFill>
+                      <a:prstDash val="solid"/>
+                      <a:round/>
+                      <a:headEnd type="none" w="med" len="med"/>
+                      <a:tailEnd type="none" w="med" len="med"/>
+                    </a:lnT>
+                    <a:lnB w="12700" cap="flat" cmpd="sng" algn="ctr">
+                      <a:solidFill>
+                        <a:srgbClr val="0F1115"/>
+                      </a:solidFill>
+                      <a:prstDash val="solid"/>
+                      <a:round/>
+                      <a:headEnd type="none" w="med" len="med"/>
+                      <a:tailEnd type="none" w="med" len="med"/>
+                    </a:lnB>
+                    <a:solidFill>
+                      <a:srgbClr val="181B23"/>
+                    </a:solidFill>
+                  </a:tcPr>
+                </a:tc>
+                <a:tc>
+                  <a:txBody>
+                    <a:bodyPr/>
+                    <a:lstStyle/>
+                    <a:p>
+                      <a:pPr algn="r" indent="0" marL="0">
+                        <a:buNone/>
+                      </a:pPr>
+                      <a:r>
+                        <a:rPr lang="en-US" sz="1200" dirty="0">
+                          <a:solidFill>
+                            <a:srgbClr val="FFFFFF"/>
+                          </a:solidFill>
+                          <a:latin typeface="Arial" pitchFamily="34" charset="0"/>
+                          <a:ea typeface="Arial" pitchFamily="34" charset="-122"/>
+                          <a:cs typeface="Arial" pitchFamily="34" charset="-120"/>
+                        </a:rPr>
+                        <a:t>1.491</a:t>
+                      </a:r>
+                      <a:endParaRPr lang="en-US" sz="1200" dirty="0">
+                        <a:latin typeface="Arial" charset="0"/>
+                        <a:ea typeface="Arial" charset="0"/>
+                        <a:cs typeface="Arial" charset="0"/>
+                      </a:endParaRPr>
+                    </a:p>
+                  </a:txBody>
+                  <a:tcPr marL="91440" marR="91440" marT="0" marB="0" anchor="ctr">
+                    <a:lnL w="12700" cap="flat" cmpd="sng" algn="ctr">
+                      <a:solidFill>
+                        <a:srgbClr val="0F1115"/>
+                      </a:solidFill>
+                      <a:prstDash val="solid"/>
+                      <a:round/>
+                      <a:headEnd type="none" w="med" len="med"/>
+                      <a:tailEnd type="none" w="med" len="med"/>
+                    </a:lnL>
+                    <a:lnR w="12700" cap="flat" cmpd="sng" algn="ctr">
+                      <a:solidFill>
+                        <a:srgbClr val="0F1115"/>
+                      </a:solidFill>
+                      <a:prstDash val="solid"/>
+                      <a:round/>
+                      <a:headEnd type="none" w="med" len="med"/>
+                      <a:tailEnd type="none" w="med" len="med"/>
+                    </a:lnR>
+                    <a:lnT w="12700" cap="flat" cmpd="sng" algn="ctr">
+                      <a:solidFill>
+                        <a:srgbClr val="0F1115"/>
+                      </a:solidFill>
+                      <a:prstDash val="solid"/>
+                      <a:round/>
+                      <a:headEnd type="none" w="med" len="med"/>
+                      <a:tailEnd type="none" w="med" len="med"/>
+                    </a:lnT>
+                    <a:lnB w="12700" cap="flat" cmpd="sng" algn="ctr">
+                      <a:solidFill>
+                        <a:srgbClr val="0F1115"/>
+                      </a:solidFill>
+                      <a:prstDash val="solid"/>
+                      <a:round/>
+                      <a:headEnd type="none" w="med" len="med"/>
+                      <a:tailEnd type="none" w="med" len="med"/>
+                    </a:lnB>
+                    <a:solidFill>
+                      <a:srgbClr val="181B23"/>
+                    </a:solidFill>
+                  </a:tcPr>
+                </a:tc>
+              </a:tr>
+              <a:tr h="365760">
+                <a:tc>
+                  <a:txBody>
+                    <a:bodyPr/>
+                    <a:lstStyle/>
+                    <a:p>
+                      <a:pPr algn="l" indent="0" marL="0">
+                        <a:buNone/>
+                      </a:pPr>
+                      <a:r>
+                        <a:rPr lang="en-US" sz="1200" b="1" dirty="0">
+                          <a:solidFill>
+                            <a:srgbClr val="9AA3B5"/>
+                          </a:solidFill>
+                          <a:latin typeface="Arial" pitchFamily="34" charset="0"/>
+                          <a:ea typeface="Arial" pitchFamily="34" charset="-122"/>
+                          <a:cs typeface="Arial" pitchFamily="34" charset="-120"/>
+                        </a:rPr>
+                        <a:t>FAVÖK</a:t>
+                      </a:r>
+                      <a:endParaRPr lang="en-US" sz="1200" dirty="0">
+                        <a:latin typeface="Arial" charset="0"/>
+                        <a:ea typeface="Arial" charset="0"/>
+                        <a:cs typeface="Arial" charset="0"/>
+                      </a:endParaRPr>
+                    </a:p>
+                  </a:txBody>
+                  <a:tcPr marL="91440" marR="91440" marT="0" marB="0" anchor="ctr">
+                    <a:lnL w="12700" cap="flat" cmpd="sng" algn="ctr">
+                      <a:solidFill>
+                        <a:srgbClr val="0F1115"/>
+                      </a:solidFill>
+                      <a:prstDash val="solid"/>
+                      <a:round/>
+                      <a:headEnd type="none" w="med" len="med"/>
+                      <a:tailEnd type="none" w="med" len="med"/>
+                    </a:lnL>
+                    <a:lnR w="12700" cap="flat" cmpd="sng" algn="ctr">
+                      <a:solidFill>
+                        <a:srgbClr val="0F1115"/>
+                      </a:solidFill>
+                      <a:prstDash val="solid"/>
+                      <a:round/>
+                      <a:headEnd type="none" w="med" len="med"/>
+                      <a:tailEnd type="none" w="med" len="med"/>
+                    </a:lnR>
+                    <a:lnT w="12700" cap="flat" cmpd="sng" algn="ctr">
+                      <a:solidFill>
+                        <a:srgbClr val="0F1115"/>
+                      </a:solidFill>
+                      <a:prstDash val="solid"/>
+                      <a:round/>
+                      <a:headEnd type="none" w="med" len="med"/>
+                      <a:tailEnd type="none" w="med" len="med"/>
+                    </a:lnT>
+                    <a:lnB w="12700" cap="flat" cmpd="sng" algn="ctr">
+                      <a:solidFill>
+                        <a:srgbClr val="0F1115"/>
+                      </a:solidFill>
+                      <a:prstDash val="solid"/>
+                      <a:round/>
+                      <a:headEnd type="none" w="med" len="med"/>
+                      <a:tailEnd type="none" w="med" len="med"/>
+                    </a:lnB>
+                    <a:solidFill>
+                      <a:srgbClr val="2A1530"/>
+                    </a:solidFill>
+                  </a:tcPr>
+                </a:tc>
+                <a:tc>
+                  <a:txBody>
+                    <a:bodyPr/>
+                    <a:lstStyle/>
+                    <a:p>
+                      <a:pPr algn="r" indent="0" marL="0">
+                        <a:buNone/>
+                      </a:pPr>
+                      <a:r>
+                        <a:rPr lang="en-US" sz="1200" b="1" dirty="0">
+                          <a:solidFill>
+                            <a:srgbClr val="FF2D75"/>
+                          </a:solidFill>
+                          <a:latin typeface="Arial" pitchFamily="34" charset="0"/>
+                          <a:ea typeface="Arial" pitchFamily="34" charset="-122"/>
+                          <a:cs typeface="Arial" pitchFamily="34" charset="-120"/>
+                        </a:rPr>
+                        <a:t>−116</a:t>
+                      </a:r>
+                      <a:endParaRPr lang="en-US" sz="1200" dirty="0">
+                        <a:latin typeface="Arial" charset="0"/>
+                        <a:ea typeface="Arial" charset="0"/>
+                        <a:cs typeface="Arial" charset="0"/>
+                      </a:endParaRPr>
+                    </a:p>
+                  </a:txBody>
+                  <a:tcPr marL="91440" marR="91440" marT="0" marB="0" anchor="ctr">
+                    <a:lnL w="12700" cap="flat" cmpd="sng" algn="ctr">
+                      <a:solidFill>
+                        <a:srgbClr val="0F1115"/>
+                      </a:solidFill>
+                      <a:prstDash val="solid"/>
+                      <a:round/>
+                      <a:headEnd type="none" w="med" len="med"/>
+                      <a:tailEnd type="none" w="med" len="med"/>
+                    </a:lnL>
+                    <a:lnR w="12700" cap="flat" cmpd="sng" algn="ctr">
+                      <a:solidFill>
+                        <a:srgbClr val="0F1115"/>
+                      </a:solidFill>
+                      <a:prstDash val="solid"/>
+                      <a:round/>
+                      <a:headEnd type="none" w="med" len="med"/>
+                      <a:tailEnd type="none" w="med" len="med"/>
+                    </a:lnR>
+                    <a:lnT w="12700" cap="flat" cmpd="sng" algn="ctr">
+                      <a:solidFill>
+                        <a:srgbClr val="0F1115"/>
+                      </a:solidFill>
+                      <a:prstDash val="solid"/>
+                      <a:round/>
+                      <a:headEnd type="none" w="med" len="med"/>
+                      <a:tailEnd type="none" w="med" len="med"/>
+                    </a:lnT>
+                    <a:lnB w="12700" cap="flat" cmpd="sng" algn="ctr">
+                      <a:solidFill>
+                        <a:srgbClr val="0F1115"/>
+                      </a:solidFill>
+                      <a:prstDash val="solid"/>
+                      <a:round/>
+                      <a:headEnd type="none" w="med" len="med"/>
+                      <a:tailEnd type="none" w="med" len="med"/>
+                    </a:lnB>
+                    <a:solidFill>
+                      <a:srgbClr val="2A1530"/>
+                    </a:solidFill>
+                  </a:tcPr>
+                </a:tc>
+                <a:tc>
+                  <a:txBody>
+                    <a:bodyPr/>
+                    <a:lstStyle/>
+                    <a:p>
+                      <a:pPr algn="r" indent="0" marL="0">
+                        <a:buNone/>
+                      </a:pPr>
+                      <a:r>
+                        <a:rPr lang="en-US" sz="1200" b="1" dirty="0">
+                          <a:solidFill>
+                            <a:srgbClr val="FF2D75"/>
+                          </a:solidFill>
+                          <a:latin typeface="Arial" pitchFamily="34" charset="0"/>
+                          <a:ea typeface="Arial" pitchFamily="34" charset="-122"/>
+                          <a:cs typeface="Arial" pitchFamily="34" charset="-120"/>
+                        </a:rPr>
+                        <a:t>+41</a:t>
+                      </a:r>
+                      <a:endParaRPr lang="en-US" sz="1200" dirty="0">
+                        <a:latin typeface="Arial" charset="0"/>
+                        <a:ea typeface="Arial" charset="0"/>
+                        <a:cs typeface="Arial" charset="0"/>
+                      </a:endParaRPr>
+                    </a:p>
+                  </a:txBody>
+                  <a:tcPr marL="91440" marR="91440" marT="0" marB="0" anchor="ctr">
+                    <a:lnL w="12700" cap="flat" cmpd="sng" algn="ctr">
+                      <a:solidFill>
+                        <a:srgbClr val="0F1115"/>
+                      </a:solidFill>
+                      <a:prstDash val="solid"/>
+                      <a:round/>
+                      <a:headEnd type="none" w="med" len="med"/>
+                      <a:tailEnd type="none" w="med" len="med"/>
+                    </a:lnL>
+                    <a:lnR w="12700" cap="flat" cmpd="sng" algn="ctr">
+                      <a:solidFill>
+                        <a:srgbClr val="0F1115"/>
+                      </a:solidFill>
+                      <a:prstDash val="solid"/>
+                      <a:round/>
+                      <a:headEnd type="none" w="med" len="med"/>
+                      <a:tailEnd type="none" w="med" len="med"/>
+                    </a:lnR>
+                    <a:lnT w="12700" cap="flat" cmpd="sng" algn="ctr">
+                      <a:solidFill>
+                        <a:srgbClr val="0F1115"/>
+                      </a:solidFill>
+                      <a:prstDash val="solid"/>
+                      <a:round/>
+                      <a:headEnd type="none" w="med" len="med"/>
+                      <a:tailEnd type="none" w="med" len="med"/>
+                    </a:lnT>
+                    <a:lnB w="12700" cap="flat" cmpd="sng" algn="ctr">
+                      <a:solidFill>
+                        <a:srgbClr val="0F1115"/>
+                      </a:solidFill>
+                      <a:prstDash val="solid"/>
+                      <a:round/>
+                      <a:headEnd type="none" w="med" len="med"/>
+                      <a:tailEnd type="none" w="med" len="med"/>
+                    </a:lnB>
+                    <a:solidFill>
+                      <a:srgbClr val="2A1530"/>
+                    </a:solidFill>
+                  </a:tcPr>
+                </a:tc>
+                <a:tc>
+                  <a:txBody>
+                    <a:bodyPr/>
+                    <a:lstStyle/>
+                    <a:p>
+                      <a:pPr algn="r" indent="0" marL="0">
+                        <a:buNone/>
+                      </a:pPr>
+                      <a:r>
+                        <a:rPr lang="en-US" sz="1200" b="1" dirty="0">
+                          <a:solidFill>
+                            <a:srgbClr val="FF2D75"/>
+                          </a:solidFill>
+                          <a:latin typeface="Arial" pitchFamily="34" charset="0"/>
+                          <a:ea typeface="Arial" pitchFamily="34" charset="-122"/>
+                          <a:cs typeface="Arial" pitchFamily="34" charset="-120"/>
+                        </a:rPr>
+                        <a:t>+328</a:t>
+                      </a:r>
+                      <a:endParaRPr lang="en-US" sz="1200" dirty="0">
+                        <a:latin typeface="Arial" charset="0"/>
+                        <a:ea typeface="Arial" charset="0"/>
+                        <a:cs typeface="Arial" charset="0"/>
+                      </a:endParaRPr>
+                    </a:p>
+                  </a:txBody>
+                  <a:tcPr marL="91440" marR="91440" marT="0" marB="0" anchor="ctr">
+                    <a:lnL w="12700" cap="flat" cmpd="sng" algn="ctr">
+                      <a:solidFill>
+                        <a:srgbClr val="0F1115"/>
+                      </a:solidFill>
+                      <a:prstDash val="solid"/>
+                      <a:round/>
+                      <a:headEnd type="none" w="med" len="med"/>
+                      <a:tailEnd type="none" w="med" len="med"/>
+                    </a:lnL>
+                    <a:lnR w="12700" cap="flat" cmpd="sng" algn="ctr">
+                      <a:solidFill>
+                        <a:srgbClr val="0F1115"/>
+                      </a:solidFill>
+                      <a:prstDash val="solid"/>
+                      <a:round/>
+                      <a:headEnd type="none" w="med" len="med"/>
+                      <a:tailEnd type="none" w="med" len="med"/>
+                    </a:lnR>
+                    <a:lnT w="12700" cap="flat" cmpd="sng" algn="ctr">
+                      <a:solidFill>
+                        <a:srgbClr val="0F1115"/>
+                      </a:solidFill>
+                      <a:prstDash val="solid"/>
+                      <a:round/>
+                      <a:headEnd type="none" w="med" len="med"/>
+                      <a:tailEnd type="none" w="med" len="med"/>
+                    </a:lnT>
+                    <a:lnB w="12700" cap="flat" cmpd="sng" algn="ctr">
+                      <a:solidFill>
+                        <a:srgbClr val="0F1115"/>
+                      </a:solidFill>
+                      <a:prstDash val="solid"/>
+                      <a:round/>
+                      <a:headEnd type="none" w="med" len="med"/>
+                      <a:tailEnd type="none" w="med" len="med"/>
+                    </a:lnB>
+                    <a:solidFill>
+                      <a:srgbClr val="2A1530"/>
+                    </a:solidFill>
+                  </a:tcPr>
+                </a:tc>
+                <a:tc>
+                  <a:txBody>
+                    <a:bodyPr/>
+                    <a:lstStyle/>
+                    <a:p>
+                      <a:pPr algn="r" indent="0" marL="0">
+                        <a:buNone/>
+                      </a:pPr>
+                      <a:r>
+                        <a:rPr lang="en-US" sz="1200" b="1" dirty="0">
+                          <a:solidFill>
+                            <a:srgbClr val="FF2D75"/>
+                          </a:solidFill>
+                          <a:latin typeface="Arial" pitchFamily="34" charset="0"/>
+                          <a:ea typeface="Arial" pitchFamily="34" charset="-122"/>
+                          <a:cs typeface="Arial" pitchFamily="34" charset="-120"/>
+                        </a:rPr>
+                        <a:t>+919</a:t>
+                      </a:r>
+                      <a:endParaRPr lang="en-US" sz="1200" dirty="0">
+                        <a:latin typeface="Arial" charset="0"/>
+                        <a:ea typeface="Arial" charset="0"/>
+                        <a:cs typeface="Arial" charset="0"/>
+                      </a:endParaRPr>
+                    </a:p>
+                  </a:txBody>
+                  <a:tcPr marL="91440" marR="91440" marT="0" marB="0" anchor="ctr">
+                    <a:lnL w="12700" cap="flat" cmpd="sng" algn="ctr">
+                      <a:solidFill>
+                        <a:srgbClr val="0F1115"/>
+                      </a:solidFill>
+                      <a:prstDash val="solid"/>
+                      <a:round/>
+                      <a:headEnd type="none" w="med" len="med"/>
+                      <a:tailEnd type="none" w="med" len="med"/>
+                    </a:lnL>
+                    <a:lnR w="12700" cap="flat" cmpd="sng" algn="ctr">
+                      <a:solidFill>
+                        <a:srgbClr val="0F1115"/>
+                      </a:solidFill>
+                      <a:prstDash val="solid"/>
+                      <a:round/>
+                      <a:headEnd type="none" w="med" len="med"/>
+                      <a:tailEnd type="none" w="med" len="med"/>
+                    </a:lnR>
+                    <a:lnT w="12700" cap="flat" cmpd="sng" algn="ctr">
+                      <a:solidFill>
+                        <a:srgbClr val="0F1115"/>
+                      </a:solidFill>
+                      <a:prstDash val="solid"/>
+                      <a:round/>
+                      <a:headEnd type="none" w="med" len="med"/>
+                      <a:tailEnd type="none" w="med" len="med"/>
+                    </a:lnT>
+                    <a:lnB w="12700" cap="flat" cmpd="sng" algn="ctr">
+                      <a:solidFill>
+                        <a:srgbClr val="0F1115"/>
+                      </a:solidFill>
+                      <a:prstDash val="solid"/>
+                      <a:round/>
+                      <a:headEnd type="none" w="med" len="med"/>
+                      <a:tailEnd type="none" w="med" len="med"/>
+                    </a:lnB>
+                    <a:solidFill>
+                      <a:srgbClr val="2A1530"/>
+                    </a:solidFill>
+                  </a:tcPr>
+                </a:tc>
+                <a:tc>
+                  <a:txBody>
+                    <a:bodyPr/>
+                    <a:lstStyle/>
+                    <a:p>
+                      <a:pPr algn="r" indent="0" marL="0">
+                        <a:buNone/>
+                      </a:pPr>
+                      <a:r>
+                        <a:rPr lang="en-US" sz="1200" b="1" dirty="0">
+                          <a:solidFill>
+                            <a:srgbClr val="FF2D75"/>
+                          </a:solidFill>
+                          <a:latin typeface="Arial" pitchFamily="34" charset="0"/>
+                          <a:ea typeface="Arial" pitchFamily="34" charset="-122"/>
+                          <a:cs typeface="Arial" pitchFamily="34" charset="-120"/>
+                        </a:rPr>
+                        <a:t>+1.661</a:t>
+                      </a:r>
+                      <a:endParaRPr lang="en-US" sz="1200" dirty="0">
+                        <a:latin typeface="Arial" charset="0"/>
+                        <a:ea typeface="Arial" charset="0"/>
+                        <a:cs typeface="Arial" charset="0"/>
+                      </a:endParaRPr>
+                    </a:p>
+                  </a:txBody>
+                  <a:tcPr marL="91440" marR="91440" marT="0" marB="0" anchor="ctr">
+                    <a:lnL w="12700" cap="flat" cmpd="sng" algn="ctr">
+                      <a:solidFill>
+                        <a:srgbClr val="0F1115"/>
+                      </a:solidFill>
+                      <a:prstDash val="solid"/>
+                      <a:round/>
+                      <a:headEnd type="none" w="med" len="med"/>
+                      <a:tailEnd type="none" w="med" len="med"/>
+                    </a:lnL>
+                    <a:lnR w="12700" cap="flat" cmpd="sng" algn="ctr">
+                      <a:solidFill>
+                        <a:srgbClr val="0F1115"/>
+                      </a:solidFill>
+                      <a:prstDash val="solid"/>
+                      <a:round/>
+                      <a:headEnd type="none" w="med" len="med"/>
+                      <a:tailEnd type="none" w="med" len="med"/>
+                    </a:lnR>
+                    <a:lnT w="12700" cap="flat" cmpd="sng" algn="ctr">
+                      <a:solidFill>
+                        <a:srgbClr val="0F1115"/>
+                      </a:solidFill>
+                      <a:prstDash val="solid"/>
+                      <a:round/>
+                      <a:headEnd type="none" w="med" len="med"/>
+                      <a:tailEnd type="none" w="med" len="med"/>
+                    </a:lnT>
+                    <a:lnB w="12700" cap="flat" cmpd="sng" algn="ctr">
+                      <a:solidFill>
+                        <a:srgbClr val="0F1115"/>
+                      </a:solidFill>
+                      <a:prstDash val="solid"/>
+                      <a:round/>
+                      <a:headEnd type="none" w="med" len="med"/>
+                      <a:tailEnd type="none" w="med" len="med"/>
+                    </a:lnB>
+                    <a:solidFill>
+                      <a:srgbClr val="2A1530"/>
+                    </a:solidFill>
+                  </a:tcPr>
+                </a:tc>
+              </a:tr>
+              <a:tr h="365760">
+                <a:tc>
+                  <a:txBody>
+                    <a:bodyPr/>
+                    <a:lstStyle/>
+                    <a:p>
+                      <a:pPr algn="l" indent="0" marL="0">
+                        <a:buNone/>
+                      </a:pPr>
+                      <a:r>
+                        <a:rPr lang="en-US" sz="1200" b="1" dirty="0">
+                          <a:solidFill>
+                            <a:srgbClr val="9AA3B5"/>
+                          </a:solidFill>
+                          <a:latin typeface="Arial" pitchFamily="34" charset="0"/>
+                          <a:ea typeface="Arial" pitchFamily="34" charset="-122"/>
+                          <a:cs typeface="Arial" pitchFamily="34" charset="-120"/>
+                        </a:rPr>
+                        <a:t>Yıl sonu nakit</a:t>
+                      </a:r>
+                      <a:endParaRPr lang="en-US" sz="1200" dirty="0">
+                        <a:latin typeface="Arial" charset="0"/>
+                        <a:ea typeface="Arial" charset="0"/>
+                        <a:cs typeface="Arial" charset="0"/>
+                      </a:endParaRPr>
+                    </a:p>
+                  </a:txBody>
+                  <a:tcPr marL="91440" marR="91440" marT="0" marB="0" anchor="ctr">
+                    <a:lnL w="12700" cap="flat" cmpd="sng" algn="ctr">
+                      <a:solidFill>
+                        <a:srgbClr val="0F1115"/>
+                      </a:solidFill>
+                      <a:prstDash val="solid"/>
+                      <a:round/>
+                      <a:headEnd type="none" w="med" len="med"/>
+                      <a:tailEnd type="none" w="med" len="med"/>
+                    </a:lnL>
+                    <a:lnR w="12700" cap="flat" cmpd="sng" algn="ctr">
+                      <a:solidFill>
+                        <a:srgbClr val="0F1115"/>
+                      </a:solidFill>
+                      <a:prstDash val="solid"/>
+                      <a:round/>
+                      <a:headEnd type="none" w="med" len="med"/>
+                      <a:tailEnd type="none" w="med" len="med"/>
+                    </a:lnR>
+                    <a:lnT w="12700" cap="flat" cmpd="sng" algn="ctr">
+                      <a:solidFill>
+                        <a:srgbClr val="0F1115"/>
+                      </a:solidFill>
+                      <a:prstDash val="solid"/>
+                      <a:round/>
+                      <a:headEnd type="none" w="med" len="med"/>
+                      <a:tailEnd type="none" w="med" len="med"/>
+                    </a:lnT>
+                    <a:lnB w="12700" cap="flat" cmpd="sng" algn="ctr">
+                      <a:solidFill>
+                        <a:srgbClr val="0F1115"/>
+                      </a:solidFill>
+                      <a:prstDash val="solid"/>
+                      <a:round/>
+                      <a:headEnd type="none" w="med" len="med"/>
+                      <a:tailEnd type="none" w="med" len="med"/>
+                    </a:lnB>
+                    <a:solidFill>
+                      <a:srgbClr val="181B23"/>
+                    </a:solidFill>
+                  </a:tcPr>
+                </a:tc>
+                <a:tc>
+                  <a:txBody>
+                    <a:bodyPr/>
+                    <a:lstStyle/>
+                    <a:p>
+                      <a:pPr algn="r" indent="0" marL="0">
+                        <a:buNone/>
+                      </a:pPr>
+                      <a:r>
+                        <a:rPr lang="en-US" sz="1200" dirty="0">
+                          <a:solidFill>
+                            <a:srgbClr val="FFFFFF"/>
+                          </a:solidFill>
+                          <a:latin typeface="Arial" pitchFamily="34" charset="0"/>
+                          <a:ea typeface="Arial" pitchFamily="34" charset="-122"/>
+                          <a:cs typeface="Arial" pitchFamily="34" charset="-120"/>
+                        </a:rPr>
+                        <a:t>134</a:t>
+                      </a:r>
+                      <a:endParaRPr lang="en-US" sz="1200" dirty="0">
+                        <a:latin typeface="Arial" charset="0"/>
+                        <a:ea typeface="Arial" charset="0"/>
+                        <a:cs typeface="Arial" charset="0"/>
+                      </a:endParaRPr>
+                    </a:p>
+                  </a:txBody>
+                  <a:tcPr marL="91440" marR="91440" marT="0" marB="0" anchor="ctr">
+                    <a:lnL w="12700" cap="flat" cmpd="sng" algn="ctr">
+                      <a:solidFill>
+                        <a:srgbClr val="0F1115"/>
+                      </a:solidFill>
+                      <a:prstDash val="solid"/>
+                      <a:round/>
+                      <a:headEnd type="none" w="med" len="med"/>
+                      <a:tailEnd type="none" w="med" len="med"/>
+                    </a:lnL>
+                    <a:lnR w="12700" cap="flat" cmpd="sng" algn="ctr">
+                      <a:solidFill>
+                        <a:srgbClr val="0F1115"/>
+                      </a:solidFill>
+                      <a:prstDash val="solid"/>
+                      <a:round/>
+                      <a:headEnd type="none" w="med" len="med"/>
+                      <a:tailEnd type="none" w="med" len="med"/>
+                    </a:lnR>
+                    <a:lnT w="12700" cap="flat" cmpd="sng" algn="ctr">
+                      <a:solidFill>
+                        <a:srgbClr val="0F1115"/>
+                      </a:solidFill>
+                      <a:prstDash val="solid"/>
+                      <a:round/>
+                      <a:headEnd type="none" w="med" len="med"/>
+                      <a:tailEnd type="none" w="med" len="med"/>
+                    </a:lnT>
+                    <a:lnB w="12700" cap="flat" cmpd="sng" algn="ctr">
+                      <a:solidFill>
+                        <a:srgbClr val="0F1115"/>
+                      </a:solidFill>
+                      <a:prstDash val="solid"/>
+                      <a:round/>
+                      <a:headEnd type="none" w="med" len="med"/>
+                      <a:tailEnd type="none" w="med" len="med"/>
+                    </a:lnB>
+                    <a:solidFill>
+                      <a:srgbClr val="181B23"/>
+                    </a:solidFill>
+                  </a:tcPr>
+                </a:tc>
+                <a:tc>
+                  <a:txBody>
+                    <a:bodyPr/>
+                    <a:lstStyle/>
+                    <a:p>
+                      <a:pPr algn="r" indent="0" marL="0">
+                        <a:buNone/>
+                      </a:pPr>
+                      <a:r>
+                        <a:rPr lang="en-US" sz="1200" dirty="0">
+                          <a:solidFill>
+                            <a:srgbClr val="FFFFFF"/>
+                          </a:solidFill>
+                          <a:latin typeface="Arial" pitchFamily="34" charset="0"/>
+                          <a:ea typeface="Arial" pitchFamily="34" charset="-122"/>
+                          <a:cs typeface="Arial" pitchFamily="34" charset="-120"/>
+                        </a:rPr>
+                        <a:t>175</a:t>
+                      </a:r>
+                      <a:endParaRPr lang="en-US" sz="1200" dirty="0">
+                        <a:latin typeface="Arial" charset="0"/>
+                        <a:ea typeface="Arial" charset="0"/>
+                        <a:cs typeface="Arial" charset="0"/>
+                      </a:endParaRPr>
+                    </a:p>
+                  </a:txBody>
+                  <a:tcPr marL="91440" marR="91440" marT="0" marB="0" anchor="ctr">
+                    <a:lnL w="12700" cap="flat" cmpd="sng" algn="ctr">
+                      <a:solidFill>
+                        <a:srgbClr val="0F1115"/>
+                      </a:solidFill>
+                      <a:prstDash val="solid"/>
+                      <a:round/>
+                      <a:headEnd type="none" w="med" len="med"/>
+                      <a:tailEnd type="none" w="med" len="med"/>
+                    </a:lnL>
+                    <a:lnR w="12700" cap="flat" cmpd="sng" algn="ctr">
+                      <a:solidFill>
+                        <a:srgbClr val="0F1115"/>
+                      </a:solidFill>
+                      <a:prstDash val="solid"/>
+                      <a:round/>
+                      <a:headEnd type="none" w="med" len="med"/>
+                      <a:tailEnd type="none" w="med" len="med"/>
+                    </a:lnR>
+                    <a:lnT w="12700" cap="flat" cmpd="sng" algn="ctr">
+                      <a:solidFill>
+                        <a:srgbClr val="0F1115"/>
+                      </a:solidFill>
+                      <a:prstDash val="solid"/>
+                      <a:round/>
+                      <a:headEnd type="none" w="med" len="med"/>
+                      <a:tailEnd type="none" w="med" len="med"/>
+                    </a:lnT>
+                    <a:lnB w="12700" cap="flat" cmpd="sng" algn="ctr">
+                      <a:solidFill>
+                        <a:srgbClr val="0F1115"/>
+                      </a:solidFill>
+                      <a:prstDash val="solid"/>
+                      <a:round/>
+                      <a:headEnd type="none" w="med" len="med"/>
+                      <a:tailEnd type="none" w="med" len="med"/>
+                    </a:lnB>
+                    <a:solidFill>
+                      <a:srgbClr val="181B23"/>
+                    </a:solidFill>
+                  </a:tcPr>
+                </a:tc>
+                <a:tc>
+                  <a:txBody>
+                    <a:bodyPr/>
+                    <a:lstStyle/>
+                    <a:p>
+                      <a:pPr algn="r" indent="0" marL="0">
+                        <a:buNone/>
+                      </a:pPr>
+                      <a:r>
+                        <a:rPr lang="en-US" sz="1200" dirty="0">
+                          <a:solidFill>
+                            <a:srgbClr val="FFFFFF"/>
+                          </a:solidFill>
+                          <a:latin typeface="Arial" pitchFamily="34" charset="0"/>
+                          <a:ea typeface="Arial" pitchFamily="34" charset="-122"/>
+                          <a:cs typeface="Arial" pitchFamily="34" charset="-120"/>
+                        </a:rPr>
+                        <a:t>503</a:t>
+                      </a:r>
+                      <a:endParaRPr lang="en-US" sz="1200" dirty="0">
+                        <a:latin typeface="Arial" charset="0"/>
+                        <a:ea typeface="Arial" charset="0"/>
+                        <a:cs typeface="Arial" charset="0"/>
+                      </a:endParaRPr>
+                    </a:p>
+                  </a:txBody>
+                  <a:tcPr marL="91440" marR="91440" marT="0" marB="0" anchor="ctr">
+                    <a:lnL w="12700" cap="flat" cmpd="sng" algn="ctr">
+                      <a:solidFill>
+                        <a:srgbClr val="0F1115"/>
+                      </a:solidFill>
+                      <a:prstDash val="solid"/>
+                      <a:round/>
+                      <a:headEnd type="none" w="med" len="med"/>
+                      <a:tailEnd type="none" w="med" len="med"/>
+                    </a:lnL>
+                    <a:lnR w="12700" cap="flat" cmpd="sng" algn="ctr">
+                      <a:solidFill>
+                        <a:srgbClr val="0F1115"/>
+                      </a:solidFill>
+                      <a:prstDash val="solid"/>
+                      <a:round/>
+                      <a:headEnd type="none" w="med" len="med"/>
+                      <a:tailEnd type="none" w="med" len="med"/>
+                    </a:lnR>
+                    <a:lnT w="12700" cap="flat" cmpd="sng" algn="ctr">
+                      <a:solidFill>
+                        <a:srgbClr val="0F1115"/>
+                      </a:solidFill>
+                      <a:prstDash val="solid"/>
+                      <a:round/>
+                      <a:headEnd type="none" w="med" len="med"/>
+                      <a:tailEnd type="none" w="med" len="med"/>
+                    </a:lnT>
+                    <a:lnB w="12700" cap="flat" cmpd="sng" algn="ctr">
+                      <a:solidFill>
+                        <a:srgbClr val="0F1115"/>
+                      </a:solidFill>
+                      <a:prstDash val="solid"/>
+                      <a:round/>
+                      <a:headEnd type="none" w="med" len="med"/>
+                      <a:tailEnd type="none" w="med" len="med"/>
+                    </a:lnB>
+                    <a:solidFill>
+                      <a:srgbClr val="181B23"/>
+                    </a:solidFill>
+                  </a:tcPr>
+                </a:tc>
+                <a:tc>
+                  <a:txBody>
+                    <a:bodyPr/>
+                    <a:lstStyle/>
+                    <a:p>
+                      <a:pPr algn="r" indent="0" marL="0">
+                        <a:buNone/>
+                      </a:pPr>
+                      <a:r>
+                        <a:rPr lang="en-US" sz="1200" dirty="0">
+                          <a:solidFill>
+                            <a:srgbClr val="FFFFFF"/>
+                          </a:solidFill>
+                          <a:latin typeface="Arial" pitchFamily="34" charset="0"/>
+                          <a:ea typeface="Arial" pitchFamily="34" charset="-122"/>
+                          <a:cs typeface="Arial" pitchFamily="34" charset="-120"/>
+                        </a:rPr>
+                        <a:t>1.422</a:t>
+                      </a:r>
+                      <a:endParaRPr lang="en-US" sz="1200" dirty="0">
+                        <a:latin typeface="Arial" charset="0"/>
+                        <a:ea typeface="Arial" charset="0"/>
+                        <a:cs typeface="Arial" charset="0"/>
+                      </a:endParaRPr>
+                    </a:p>
+                  </a:txBody>
+                  <a:tcPr marL="91440" marR="91440" marT="0" marB="0" anchor="ctr">
+                    <a:lnL w="12700" cap="flat" cmpd="sng" algn="ctr">
+                      <a:solidFill>
+                        <a:srgbClr val="0F1115"/>
+                      </a:solidFill>
+                      <a:prstDash val="solid"/>
+                      <a:round/>
+                      <a:headEnd type="none" w="med" len="med"/>
+                      <a:tailEnd type="none" w="med" len="med"/>
+                    </a:lnL>
+                    <a:lnR w="12700" cap="flat" cmpd="sng" algn="ctr">
+                      <a:solidFill>
+                        <a:srgbClr val="0F1115"/>
+                      </a:solidFill>
+                      <a:prstDash val="solid"/>
+                      <a:round/>
+                      <a:headEnd type="none" w="med" len="med"/>
+                      <a:tailEnd type="none" w="med" len="med"/>
+                    </a:lnR>
+                    <a:lnT w="12700" cap="flat" cmpd="sng" algn="ctr">
+                      <a:solidFill>
+                        <a:srgbClr val="0F1115"/>
+                      </a:solidFill>
+                      <a:prstDash val="solid"/>
+                      <a:round/>
+                      <a:headEnd type="none" w="med" len="med"/>
+                      <a:tailEnd type="none" w="med" len="med"/>
+                    </a:lnT>
+                    <a:lnB w="12700" cap="flat" cmpd="sng" algn="ctr">
+                      <a:solidFill>
+                        <a:srgbClr val="0F1115"/>
+                      </a:solidFill>
+                      <a:prstDash val="solid"/>
+                      <a:round/>
+                      <a:headEnd type="none" w="med" len="med"/>
+                      <a:tailEnd type="none" w="med" len="med"/>
+                    </a:lnB>
+                    <a:solidFill>
+                      <a:srgbClr val="181B23"/>
+                    </a:solidFill>
+                  </a:tcPr>
+                </a:tc>
+                <a:tc>
+                  <a:txBody>
+                    <a:bodyPr/>
+                    <a:lstStyle/>
+                    <a:p>
+                      <a:pPr algn="r" indent="0" marL="0">
+                        <a:buNone/>
+                      </a:pPr>
+                      <a:r>
+                        <a:rPr lang="en-US" sz="1200" dirty="0">
+                          <a:solidFill>
+                            <a:srgbClr val="FFFFFF"/>
+                          </a:solidFill>
+                          <a:latin typeface="Arial" pitchFamily="34" charset="0"/>
+                          <a:ea typeface="Arial" pitchFamily="34" charset="-122"/>
+                          <a:cs typeface="Arial" pitchFamily="34" charset="-120"/>
+                        </a:rPr>
+                        <a:t>3.083</a:t>
+                      </a:r>
+                      <a:endParaRPr lang="en-US" sz="1200" dirty="0">
+                        <a:latin typeface="Arial" charset="0"/>
+                        <a:ea typeface="Arial" charset="0"/>
+                        <a:cs typeface="Arial" charset="0"/>
+                      </a:endParaRPr>
+                    </a:p>
+                  </a:txBody>
+                  <a:tcPr marL="91440" marR="91440" marT="0" marB="0" anchor="ctr">
+                    <a:lnL w="12700" cap="flat" cmpd="sng" algn="ctr">
+                      <a:solidFill>
+                        <a:srgbClr val="0F1115"/>
+                      </a:solidFill>
+                      <a:prstDash val="solid"/>
+                      <a:round/>
+                      <a:headEnd type="none" w="med" len="med"/>
+                      <a:tailEnd type="none" w="med" len="med"/>
+                    </a:lnL>
+                    <a:lnR w="12700" cap="flat" cmpd="sng" algn="ctr">
+                      <a:solidFill>
+                        <a:srgbClr val="0F1115"/>
+                      </a:solidFill>
+                      <a:prstDash val="solid"/>
+                      <a:round/>
+                      <a:headEnd type="none" w="med" len="med"/>
+                      <a:tailEnd type="none" w="med" len="med"/>
+                    </a:lnR>
+                    <a:lnT w="12700" cap="flat" cmpd="sng" algn="ctr">
+                      <a:solidFill>
+                        <a:srgbClr val="0F1115"/>
+                      </a:solidFill>
+                      <a:prstDash val="solid"/>
+                      <a:round/>
+                      <a:headEnd type="none" w="med" len="med"/>
+                      <a:tailEnd type="none" w="med" len="med"/>
+                    </a:lnT>
+                    <a:lnB w="12700" cap="flat" cmpd="sng" algn="ctr">
+                      <a:solidFill>
+                        <a:srgbClr val="0F1115"/>
+                      </a:solidFill>
+                      <a:prstDash val="solid"/>
+                      <a:round/>
+                      <a:headEnd type="none" w="med" len="med"/>
+                      <a:tailEnd type="none" w="med" len="med"/>
+                    </a:lnB>
+                    <a:solidFill>
+                      <a:srgbClr val="181B23"/>
+                    </a:solidFill>
+                  </a:tcPr>
+                </a:tc>
+              </a:tr>
+            </a:tbl>
+          </a:graphicData>
+        </a:graphic>
+      </p:graphicFrame>
+      <p:sp>
+        <p:nvSpPr>
+          <p:cNvPr id="8" name="Text 4"/>
+          <p:cNvSpPr txBox="1"/>
+          <p:nvPr/>
+        </p:nvSpPr>
+        <p:spPr>
+          <a:xfrm>
+            <a:off x="548640" y="3529584"/>
+            <a:ext cx="6583680" cy="384048"/>
+          </a:xfrm>
+          <a:prstGeom prst="rect">
+            <a:avLst/>
+          </a:prstGeom>
+          <a:noFill/>
+          <a:ln/>
+        </p:spPr>
+        <p:txBody>
+          <a:bodyPr wrap="square" lIns="0" tIns="0" rIns="0" bIns="0" rtlCol="0" anchor="t">
+            <a:normAutofit/>
+          </a:bodyPr>
+          <a:lstStyle/>
+          <a:p>
+            <a:pPr indent="0" marL="0">
+              <a:buNone/>
+            </a:pPr>
+            <a:r>
+              <a:rPr lang="en-US" sz="1000" i="1" dirty="0">
+                <a:solidFill>
+                  <a:srgbClr val="9AA3B5"/>
+                </a:solidFill>
+                <a:latin typeface="Arial" pitchFamily="34" charset="0"/>
+                <a:ea typeface="Arial" pitchFamily="34" charset="-122"/>
+                <a:cs typeface="Arial" pitchFamily="34" charset="-120"/>
+              </a:rPr>
+              <a:t>2031 geliri: temkinli 602 bin € · iyimser 7,44 milyon €. 4.–5. yıllar ileriye taşındı; henüz gelir yok.</a:t>
+            </a:r>
+            <a:endParaRPr lang="en-US" sz="1000" dirty="0"/>
+          </a:p>
+        </p:txBody>
+      </p:sp>
+      <p:sp>
+        <p:nvSpPr>
+          <p:cNvPr id="9" name="Shape 5"/>
+          <p:cNvSpPr/>
+          <p:nvPr/>
+        </p:nvSpPr>
+        <p:spPr>
+          <a:xfrm>
+            <a:off x="548640" y="4160520"/>
+            <a:ext cx="2103120" cy="1417320"/>
+          </a:xfrm>
+          <a:prstGeom prst="roundRect">
+            <a:avLst>
+              <a:gd name="adj" fmla="val 7742"/>
+            </a:avLst>
+          </a:prstGeom>
+          <a:solidFill>
+            <a:srgbClr val="181B23"/>
+          </a:solidFill>
+          <a:ln w="12700">
+            <a:solidFill>
+              <a:srgbClr val="181B23"/>
+            </a:solidFill>
+            <a:prstDash val="solid"/>
+          </a:ln>
+        </p:spPr>
+      </p:sp>
+      <p:sp>
+        <p:nvSpPr>
+          <p:cNvPr id="10" name="Text 6"/>
+          <p:cNvSpPr txBox="1"/>
+          <p:nvPr/>
+        </p:nvSpPr>
+        <p:spPr>
+          <a:xfrm>
+            <a:off x="713232" y="4270248"/>
+            <a:ext cx="1773936" cy="502920"/>
+          </a:xfrm>
+          <a:prstGeom prst="rect">
+            <a:avLst/>
+          </a:prstGeom>
+          <a:noFill/>
+          <a:ln/>
+        </p:spPr>
+        <p:txBody>
+          <a:bodyPr wrap="square" lIns="0" tIns="0" rIns="0" bIns="0" rtlCol="0" anchor="t">
+            <a:normAutofit/>
+          </a:bodyPr>
+          <a:lstStyle/>
+          <a:p>
+            <a:pPr indent="0" marL="0">
+              <a:buNone/>
+            </a:pPr>
+            <a:r>
+              <a:rPr lang="en-US" sz="2200" b="1" dirty="0">
+                <a:solidFill>
+                  <a:srgbClr val="2DFFB5"/>
+                </a:solidFill>
+                <a:latin typeface="Arial" pitchFamily="34" charset="0"/>
+                <a:ea typeface="Arial" pitchFamily="34" charset="-122"/>
+                <a:cs typeface="Arial" pitchFamily="34" charset="-120"/>
+              </a:rPr>
+              <a:t>18 ay</a:t>
+            </a:r>
+            <a:endParaRPr lang="en-US" sz="2200" dirty="0"/>
+          </a:p>
+        </p:txBody>
+      </p:sp>
+      <p:sp>
+        <p:nvSpPr>
+          <p:cNvPr id="11" name="Text 7"/>
+          <p:cNvSpPr txBox="1"/>
+          <p:nvPr/>
+        </p:nvSpPr>
+        <p:spPr>
+          <a:xfrm>
+            <a:off x="713232" y="4818888"/>
+            <a:ext cx="1773936" cy="694944"/>
+          </a:xfrm>
+          <a:prstGeom prst="rect">
+            <a:avLst/>
+          </a:prstGeom>
+          <a:noFill/>
+          <a:ln/>
+        </p:spPr>
+        <p:txBody>
+          <a:bodyPr wrap="square" lIns="0" tIns="0" rIns="0" bIns="0" rtlCol="0" anchor="t">
+            <a:normAutofit/>
+          </a:bodyPr>
+          <a:lstStyle/>
+          <a:p>
+            <a:pPr indent="0" marL="0">
+              <a:buNone/>
+            </a:pPr>
+            <a:r>
+              <a:rPr lang="en-US" sz="1100" dirty="0">
+                <a:solidFill>
+                  <a:srgbClr val="9AA3B5"/>
+                </a:solidFill>
+                <a:latin typeface="Arial" pitchFamily="34" charset="0"/>
+                <a:ea typeface="Arial" pitchFamily="34" charset="-122"/>
+                <a:cs typeface="Arial" pitchFamily="34" charset="-120"/>
+              </a:rPr>
+              <a:t>hiç gelir olmadan nakit ömrü – ortalama gider ayda 13.444 €</a:t>
+            </a:r>
+            <a:endParaRPr lang="en-US" sz="1100" dirty="0"/>
+          </a:p>
+        </p:txBody>
+      </p:sp>
+      <p:sp>
+        <p:nvSpPr>
+          <p:cNvPr id="12" name="Shape 8"/>
+          <p:cNvSpPr/>
+          <p:nvPr/>
+        </p:nvSpPr>
+        <p:spPr>
+          <a:xfrm>
+            <a:off x="2788920" y="4160520"/>
+            <a:ext cx="2103120" cy="1417320"/>
+          </a:xfrm>
+          <a:prstGeom prst="roundRect">
+            <a:avLst>
+              <a:gd name="adj" fmla="val 7742"/>
+            </a:avLst>
+          </a:prstGeom>
+          <a:solidFill>
+            <a:srgbClr val="181B23"/>
+          </a:solidFill>
+          <a:ln w="12700">
+            <a:solidFill>
+              <a:srgbClr val="181B23"/>
+            </a:solidFill>
+            <a:prstDash val="solid"/>
+          </a:ln>
+        </p:spPr>
+      </p:sp>
+      <p:sp>
+        <p:nvSpPr>
+          <p:cNvPr id="13" name="Text 9"/>
+          <p:cNvSpPr txBox="1"/>
+          <p:nvPr/>
+        </p:nvSpPr>
+        <p:spPr>
+          <a:xfrm>
+            <a:off x="2953512" y="4270248"/>
+            <a:ext cx="1773936" cy="502920"/>
+          </a:xfrm>
+          <a:prstGeom prst="rect">
+            <a:avLst/>
+          </a:prstGeom>
+          <a:noFill/>
+          <a:ln/>
+        </p:spPr>
+        <p:txBody>
+          <a:bodyPr wrap="square" lIns="0" tIns="0" rIns="0" bIns="0" rtlCol="0" anchor="t">
+            <a:normAutofit/>
+          </a:bodyPr>
+          <a:lstStyle/>
+          <a:p>
+            <a:pPr indent="0" marL="0">
+              <a:buNone/>
+            </a:pPr>
+            <a:r>
+              <a:rPr lang="en-US" sz="2100" b="1" dirty="0">
+                <a:solidFill>
+                  <a:srgbClr val="5AD1FF"/>
+                </a:solidFill>
+                <a:latin typeface="Arial" pitchFamily="34" charset="0"/>
+                <a:ea typeface="Arial" pitchFamily="34" charset="-122"/>
+                <a:cs typeface="Arial" pitchFamily="34" charset="-120"/>
+              </a:rPr>
+              <a:t>49 · 146 · 369</a:t>
+            </a:r>
+            <a:endParaRPr lang="en-US" sz="2100" dirty="0"/>
+          </a:p>
+        </p:txBody>
+      </p:sp>
+      <p:sp>
+        <p:nvSpPr>
+          <p:cNvPr id="14" name="Text 10"/>
+          <p:cNvSpPr txBox="1"/>
+          <p:nvPr/>
+        </p:nvSpPr>
+        <p:spPr>
+          <a:xfrm>
+            <a:off x="2953512" y="4818888"/>
+            <a:ext cx="1773936" cy="694944"/>
+          </a:xfrm>
+          <a:prstGeom prst="rect">
+            <a:avLst/>
+          </a:prstGeom>
+          <a:noFill/>
+          <a:ln/>
+        </p:spPr>
+        <p:txBody>
+          <a:bodyPr wrap="square" lIns="0" tIns="0" rIns="0" bIns="0" rtlCol="0" anchor="t">
+            <a:normAutofit/>
+          </a:bodyPr>
+          <a:lstStyle/>
+          <a:p>
+            <a:pPr indent="0" marL="0">
+              <a:buNone/>
+            </a:pPr>
+            <a:r>
+              <a:rPr lang="en-US" sz="1100" dirty="0">
+                <a:solidFill>
+                  <a:srgbClr val="9AA3B5"/>
+                </a:solidFill>
+                <a:latin typeface="Arial" pitchFamily="34" charset="0"/>
+                <a:ea typeface="Arial" pitchFamily="34" charset="-122"/>
+                <a:cs typeface="Arial" pitchFamily="34" charset="-120"/>
+              </a:rPr>
+              <a:t>bin € nakit, 18. ay: temkinli · temel · iyimser</a:t>
+            </a:r>
+            <a:endParaRPr lang="en-US" sz="1100" dirty="0"/>
+          </a:p>
+        </p:txBody>
+      </p:sp>
+      <p:sp>
+        <p:nvSpPr>
+          <p:cNvPr id="15" name="Shape 11"/>
+          <p:cNvSpPr/>
+          <p:nvPr/>
+        </p:nvSpPr>
+        <p:spPr>
+          <a:xfrm>
+            <a:off x="5029200" y="4160520"/>
+            <a:ext cx="2103120" cy="1417320"/>
+          </a:xfrm>
+          <a:prstGeom prst="roundRect">
+            <a:avLst>
+              <a:gd name="adj" fmla="val 7742"/>
+            </a:avLst>
+          </a:prstGeom>
+          <a:solidFill>
+            <a:srgbClr val="181B23"/>
+          </a:solidFill>
+          <a:ln w="12700">
+            <a:solidFill>
+              <a:srgbClr val="181B23"/>
+            </a:solidFill>
+            <a:prstDash val="solid"/>
+          </a:ln>
+        </p:spPr>
+      </p:sp>
+      <p:sp>
+        <p:nvSpPr>
+          <p:cNvPr id="16" name="Text 12"/>
+          <p:cNvSpPr txBox="1"/>
+          <p:nvPr/>
+        </p:nvSpPr>
+        <p:spPr>
+          <a:xfrm>
+            <a:off x="5193792" y="4270248"/>
+            <a:ext cx="1773936" cy="502920"/>
+          </a:xfrm>
+          <a:prstGeom prst="rect">
+            <a:avLst/>
+          </a:prstGeom>
+          <a:noFill/>
+          <a:ln/>
+        </p:spPr>
+        <p:txBody>
+          <a:bodyPr wrap="square" lIns="0" tIns="0" rIns="0" bIns="0" rtlCol="0" anchor="t">
+            <a:normAutofit/>
+          </a:bodyPr>
+          <a:lstStyle/>
+          <a:p>
+            <a:pPr indent="0" marL="0">
+              <a:buNone/>
+            </a:pPr>
+            <a:r>
+              <a:rPr lang="en-US" sz="2200" b="1" dirty="0">
+                <a:solidFill>
+                  <a:srgbClr val="FF2D75"/>
+                </a:solidFill>
+                <a:latin typeface="Arial" pitchFamily="34" charset="0"/>
+                <a:ea typeface="Arial" pitchFamily="34" charset="-122"/>
+                <a:cs typeface="Arial" pitchFamily="34" charset="-120"/>
+              </a:rPr>
+              <a:t>~350 bin €</a:t>
+            </a:r>
+            <a:endParaRPr lang="en-US" sz="2200" dirty="0"/>
+          </a:p>
+        </p:txBody>
+      </p:sp>
+      <p:sp>
+        <p:nvSpPr>
+          <p:cNvPr id="17" name="Text 13"/>
+          <p:cNvSpPr txBox="1"/>
+          <p:nvPr/>
+        </p:nvSpPr>
+        <p:spPr>
+          <a:xfrm>
+            <a:off x="5193792" y="4818888"/>
+            <a:ext cx="1773936" cy="694944"/>
+          </a:xfrm>
+          <a:prstGeom prst="rect">
+            <a:avLst/>
+          </a:prstGeom>
+          <a:noFill/>
+          <a:ln/>
+        </p:spPr>
+        <p:txBody>
+          <a:bodyPr wrap="square" lIns="0" tIns="0" rIns="0" bIns="0" rtlCol="0" anchor="t">
+            <a:normAutofit/>
+          </a:bodyPr>
+          <a:lstStyle/>
+          <a:p>
+            <a:pPr indent="0" marL="0">
+              <a:buNone/>
+            </a:pPr>
+            <a:r>
+              <a:rPr lang="en-US" sz="1100" dirty="0">
+                <a:solidFill>
+                  <a:srgbClr val="9AA3B5"/>
+                </a:solidFill>
+                <a:latin typeface="Arial" pitchFamily="34" charset="0"/>
+                <a:ea typeface="Arial" pitchFamily="34" charset="-122"/>
+                <a:cs typeface="Arial" pitchFamily="34" charset="-120"/>
+              </a:rPr>
+              <a:t>2. kapıdan sonra tohum turu (15.–18. ay)</a:t>
+            </a:r>
+            <a:endParaRPr lang="en-US" sz="1100" dirty="0"/>
+          </a:p>
+        </p:txBody>
+      </p:sp>
+      <p:sp>
+        <p:nvSpPr>
+          <p:cNvPr id="18" name="Text 14"/>
+          <p:cNvSpPr txBox="1"/>
+          <p:nvPr/>
+        </p:nvSpPr>
+        <p:spPr>
+          <a:xfrm>
+            <a:off x="7406640" y="1298448"/>
+            <a:ext cx="4236415" cy="292608"/>
+          </a:xfrm>
+          <a:prstGeom prst="rect">
+            <a:avLst/>
+          </a:prstGeom>
+          <a:noFill/>
+          <a:ln/>
+        </p:spPr>
+        <p:txBody>
+          <a:bodyPr wrap="square" lIns="0" tIns="0" rIns="0" bIns="0" rtlCol="0" anchor="t">
+            <a:normAutofit/>
+          </a:bodyPr>
+          <a:lstStyle/>
+          <a:p>
+            <a:pPr indent="0" marL="0">
+              <a:buNone/>
+            </a:pPr>
+            <a:r>
+              <a:rPr lang="en-US" sz="1300" b="1" dirty="0">
+                <a:solidFill>
+                  <a:srgbClr val="FFD166"/>
+                </a:solidFill>
+                <a:latin typeface="Arial" pitchFamily="34" charset="0"/>
+                <a:ea typeface="Arial" pitchFamily="34" charset="-122"/>
+                <a:cs typeface="Arial" pitchFamily="34" charset="-120"/>
+              </a:rPr>
+              <a:t>Referans yöntemleri (yatırım öncesi değer)</a:t>
+            </a:r>
+            <a:endParaRPr lang="en-US" sz="1300" dirty="0"/>
+          </a:p>
+        </p:txBody>
+      </p:sp>
+      <p:sp>
+        <p:nvSpPr>
+          <p:cNvPr id="19" name="Text 15"/>
+          <p:cNvSpPr txBox="1"/>
+          <p:nvPr/>
+        </p:nvSpPr>
+        <p:spPr>
+          <a:xfrm>
+            <a:off x="7406640" y="1691640"/>
+            <a:ext cx="1143000" cy="292608"/>
+          </a:xfrm>
+          <a:prstGeom prst="rect">
+            <a:avLst/>
+          </a:prstGeom>
+          <a:noFill/>
+          <a:ln/>
+        </p:spPr>
+        <p:txBody>
+          <a:bodyPr wrap="square" lIns="0" tIns="0" rIns="0" bIns="0" rtlCol="0" anchor="ctr">
+            <a:normAutofit/>
+          </a:bodyPr>
+          <a:lstStyle/>
+          <a:p>
+            <a:pPr indent="0" marL="0">
+              <a:buNone/>
+            </a:pPr>
+            <a:r>
+              <a:rPr lang="en-US" sz="1100" dirty="0">
+                <a:solidFill>
+                  <a:srgbClr val="FFFFFF"/>
+                </a:solidFill>
+                <a:latin typeface="Arial" pitchFamily="34" charset="0"/>
+                <a:ea typeface="Arial" pitchFamily="34" charset="-122"/>
+                <a:cs typeface="Arial" pitchFamily="34" charset="-120"/>
+              </a:rPr>
+              <a:t>Berkus</a:t>
+            </a:r>
+            <a:endParaRPr lang="en-US" sz="1100" dirty="0"/>
+          </a:p>
+        </p:txBody>
+      </p:sp>
+      <p:sp>
+        <p:nvSpPr>
+          <p:cNvPr id="20" name="Shape 16"/>
+          <p:cNvSpPr/>
+          <p:nvPr/>
+        </p:nvSpPr>
+        <p:spPr>
+          <a:xfrm>
+            <a:off x="8641080" y="1737360"/>
+            <a:ext cx="1671081" cy="201168"/>
+          </a:xfrm>
+          <a:prstGeom prst="rect">
+            <a:avLst/>
+          </a:prstGeom>
+          <a:solidFill>
+            <a:srgbClr val="2DFFB5"/>
+          </a:solidFill>
+          <a:ln/>
+        </p:spPr>
+      </p:sp>
+      <p:sp>
+        <p:nvSpPr>
+          <p:cNvPr id="21" name="Text 17"/>
+          <p:cNvSpPr txBox="1"/>
+          <p:nvPr/>
+        </p:nvSpPr>
+        <p:spPr>
+          <a:xfrm>
+            <a:off x="10385313" y="1691640"/>
+            <a:ext cx="822960" cy="292608"/>
+          </a:xfrm>
+          <a:prstGeom prst="rect">
+            <a:avLst/>
+          </a:prstGeom>
+          <a:noFill/>
+          <a:ln/>
+        </p:spPr>
+        <p:txBody>
+          <a:bodyPr wrap="square" lIns="0" tIns="0" rIns="0" bIns="0" rtlCol="0" anchor="ctr">
+            <a:normAutofit/>
+          </a:bodyPr>
+          <a:lstStyle/>
+          <a:p>
+            <a:pPr indent="0" marL="0">
+              <a:buNone/>
+            </a:pPr>
+            <a:r>
+              <a:rPr lang="en-US" sz="1000" b="1" dirty="0">
+                <a:solidFill>
+                  <a:srgbClr val="2DFFB5"/>
+                </a:solidFill>
+                <a:latin typeface="Arial" pitchFamily="34" charset="0"/>
+                <a:ea typeface="Arial" pitchFamily="34" charset="-122"/>
+                <a:cs typeface="Arial" pitchFamily="34" charset="-120"/>
+              </a:rPr>
+              <a:t>2,35 milyon €</a:t>
+            </a:r>
+            <a:endParaRPr lang="en-US" sz="1000" dirty="0"/>
+          </a:p>
+        </p:txBody>
+      </p:sp>
+      <p:sp>
+        <p:nvSpPr>
+          <p:cNvPr id="22" name="Text 18"/>
+          <p:cNvSpPr txBox="1"/>
+          <p:nvPr/>
+        </p:nvSpPr>
+        <p:spPr>
+          <a:xfrm>
+            <a:off x="7406640" y="2075688"/>
+            <a:ext cx="1143000" cy="292608"/>
+          </a:xfrm>
+          <a:prstGeom prst="rect">
+            <a:avLst/>
+          </a:prstGeom>
+          <a:noFill/>
+          <a:ln/>
+        </p:spPr>
+        <p:txBody>
+          <a:bodyPr wrap="square" lIns="0" tIns="0" rIns="0" bIns="0" rtlCol="0" anchor="ctr">
+            <a:normAutofit/>
+          </a:bodyPr>
+          <a:lstStyle/>
+          <a:p>
+            <a:pPr indent="0" marL="0">
+              <a:buNone/>
+            </a:pPr>
+            <a:r>
+              <a:rPr lang="en-US" sz="1100" dirty="0">
+                <a:solidFill>
+                  <a:srgbClr val="FFFFFF"/>
+                </a:solidFill>
+                <a:latin typeface="Arial" pitchFamily="34" charset="0"/>
+                <a:ea typeface="Arial" pitchFamily="34" charset="-122"/>
+                <a:cs typeface="Arial" pitchFamily="34" charset="-120"/>
+              </a:rPr>
+              <a:t>Scorecard</a:t>
+            </a:r>
+            <a:endParaRPr lang="en-US" sz="1100" dirty="0"/>
+          </a:p>
+        </p:txBody>
+      </p:sp>
+      <p:sp>
+        <p:nvSpPr>
+          <p:cNvPr id="23" name="Shape 19"/>
+          <p:cNvSpPr/>
+          <p:nvPr/>
+        </p:nvSpPr>
+        <p:spPr>
+          <a:xfrm>
+            <a:off x="8641080" y="2121408"/>
+            <a:ext cx="2097740" cy="201168"/>
+          </a:xfrm>
+          <a:prstGeom prst="rect">
+            <a:avLst/>
+          </a:prstGeom>
+          <a:solidFill>
+            <a:srgbClr val="5AD1FF"/>
+          </a:solidFill>
+          <a:ln/>
+        </p:spPr>
+      </p:sp>
+      <p:sp>
+        <p:nvSpPr>
+          <p:cNvPr id="24" name="Text 20"/>
+          <p:cNvSpPr txBox="1"/>
+          <p:nvPr/>
+        </p:nvSpPr>
+        <p:spPr>
+          <a:xfrm>
+            <a:off x="10811972" y="2075688"/>
+            <a:ext cx="822960" cy="292608"/>
+          </a:xfrm>
+          <a:prstGeom prst="rect">
+            <a:avLst/>
+          </a:prstGeom>
+          <a:noFill/>
+          <a:ln/>
+        </p:spPr>
+        <p:txBody>
+          <a:bodyPr wrap="square" lIns="0" tIns="0" rIns="0" bIns="0" rtlCol="0" anchor="ctr">
+            <a:normAutofit/>
+          </a:bodyPr>
+          <a:lstStyle/>
+          <a:p>
+            <a:pPr indent="0" marL="0">
+              <a:buNone/>
+            </a:pPr>
+            <a:r>
+              <a:rPr lang="en-US" sz="1000" b="1" dirty="0">
+                <a:solidFill>
+                  <a:srgbClr val="5AD1FF"/>
+                </a:solidFill>
+                <a:latin typeface="Arial" pitchFamily="34" charset="0"/>
+                <a:ea typeface="Arial" pitchFamily="34" charset="-122"/>
+                <a:cs typeface="Arial" pitchFamily="34" charset="-120"/>
+              </a:rPr>
+              <a:t>2,95 milyon €</a:t>
+            </a:r>
+            <a:endParaRPr lang="en-US" sz="1000" dirty="0"/>
+          </a:p>
+        </p:txBody>
+      </p:sp>
+      <p:sp>
+        <p:nvSpPr>
+          <p:cNvPr id="25" name="Text 21"/>
+          <p:cNvSpPr txBox="1"/>
+          <p:nvPr/>
+        </p:nvSpPr>
+        <p:spPr>
+          <a:xfrm>
+            <a:off x="7406640" y="2459736"/>
+            <a:ext cx="1143000" cy="292608"/>
+          </a:xfrm>
+          <a:prstGeom prst="rect">
+            <a:avLst/>
+          </a:prstGeom>
+          <a:noFill/>
+          <a:ln/>
+        </p:spPr>
+        <p:txBody>
+          <a:bodyPr wrap="square" lIns="0" tIns="0" rIns="0" bIns="0" rtlCol="0" anchor="ctr">
+            <a:normAutofit/>
+          </a:bodyPr>
+          <a:lstStyle/>
+          <a:p>
+            <a:pPr indent="0" marL="0">
+              <a:buNone/>
+            </a:pPr>
+            <a:r>
+              <a:rPr lang="en-US" sz="1100" dirty="0">
+                <a:solidFill>
+                  <a:srgbClr val="FFFFFF"/>
+                </a:solidFill>
+                <a:latin typeface="Arial" pitchFamily="34" charset="0"/>
+                <a:ea typeface="Arial" pitchFamily="34" charset="-122"/>
+                <a:cs typeface="Arial" pitchFamily="34" charset="-120"/>
+              </a:rPr>
+              <a:t>VC yöntemi</a:t>
+            </a:r>
+            <a:endParaRPr lang="en-US" sz="1100" dirty="0"/>
+          </a:p>
+        </p:txBody>
+      </p:sp>
+      <p:sp>
+        <p:nvSpPr>
+          <p:cNvPr id="26" name="Shape 22"/>
+          <p:cNvSpPr/>
+          <p:nvPr/>
+        </p:nvSpPr>
+        <p:spPr>
+          <a:xfrm>
+            <a:off x="8641080" y="2505456"/>
+            <a:ext cx="1727969" cy="201168"/>
+          </a:xfrm>
+          <a:prstGeom prst="rect">
+            <a:avLst/>
+          </a:prstGeom>
+          <a:solidFill>
+            <a:srgbClr val="9AA3B5"/>
+          </a:solidFill>
+          <a:ln/>
+        </p:spPr>
+      </p:sp>
+      <p:sp>
+        <p:nvSpPr>
+          <p:cNvPr id="27" name="Text 23"/>
+          <p:cNvSpPr txBox="1"/>
+          <p:nvPr/>
+        </p:nvSpPr>
+        <p:spPr>
+          <a:xfrm>
+            <a:off x="10442201" y="2459736"/>
+            <a:ext cx="822960" cy="292608"/>
+          </a:xfrm>
+          <a:prstGeom prst="rect">
+            <a:avLst/>
+          </a:prstGeom>
+          <a:noFill/>
+          <a:ln/>
+        </p:spPr>
+        <p:txBody>
+          <a:bodyPr wrap="square" lIns="0" tIns="0" rIns="0" bIns="0" rtlCol="0" anchor="ctr">
+            <a:normAutofit/>
+          </a:bodyPr>
+          <a:lstStyle/>
+          <a:p>
+            <a:pPr indent="0" marL="0">
+              <a:buNone/>
+            </a:pPr>
+            <a:r>
+              <a:rPr lang="en-US" sz="1000" b="1" dirty="0">
+                <a:solidFill>
+                  <a:srgbClr val="9AA3B5"/>
+                </a:solidFill>
+                <a:latin typeface="Arial" pitchFamily="34" charset="0"/>
+                <a:ea typeface="Arial" pitchFamily="34" charset="-122"/>
+                <a:cs typeface="Arial" pitchFamily="34" charset="-120"/>
+              </a:rPr>
+              <a:t>2,43 milyon €</a:t>
+            </a:r>
+            <a:endParaRPr lang="en-US" sz="1000" dirty="0"/>
+          </a:p>
+        </p:txBody>
+      </p:sp>
+      <p:sp>
+        <p:nvSpPr>
+          <p:cNvPr id="28" name="Text 24"/>
+          <p:cNvSpPr txBox="1"/>
+          <p:nvPr/>
+        </p:nvSpPr>
+        <p:spPr>
+          <a:xfrm>
+            <a:off x="7406640" y="2843784"/>
+            <a:ext cx="1143000" cy="292608"/>
+          </a:xfrm>
+          <a:prstGeom prst="rect">
+            <a:avLst/>
+          </a:prstGeom>
+          <a:noFill/>
+          <a:ln/>
+        </p:spPr>
+        <p:txBody>
+          <a:bodyPr wrap="square" lIns="0" tIns="0" rIns="0" bIns="0" rtlCol="0" anchor="ctr">
+            <a:normAutofit/>
+          </a:bodyPr>
+          <a:lstStyle/>
+          <a:p>
+            <a:pPr indent="0" marL="0">
+              <a:buNone/>
+            </a:pPr>
+            <a:r>
+              <a:rPr lang="en-US" sz="1100" dirty="0">
+                <a:solidFill>
+                  <a:srgbClr val="FFFFFF"/>
+                </a:solidFill>
+                <a:latin typeface="Arial" pitchFamily="34" charset="0"/>
+                <a:ea typeface="Arial" pitchFamily="34" charset="-122"/>
+                <a:cs typeface="Arial" pitchFamily="34" charset="-120"/>
+              </a:rPr>
+              <a:t>Risk faktörü top.</a:t>
+            </a:r>
+            <a:endParaRPr lang="en-US" sz="1100" dirty="0"/>
+          </a:p>
+        </p:txBody>
+      </p:sp>
+      <p:sp>
+        <p:nvSpPr>
+          <p:cNvPr id="29" name="Shape 25"/>
+          <p:cNvSpPr/>
+          <p:nvPr/>
+        </p:nvSpPr>
+        <p:spPr>
+          <a:xfrm>
+            <a:off x="8641080" y="2889504"/>
+            <a:ext cx="2133295" cy="201168"/>
+          </a:xfrm>
+          <a:prstGeom prst="rect">
+            <a:avLst/>
+          </a:prstGeom>
+          <a:solidFill>
+            <a:srgbClr val="2DFFB5"/>
+          </a:solidFill>
+          <a:ln/>
+        </p:spPr>
+      </p:sp>
+      <p:sp>
+        <p:nvSpPr>
+          <p:cNvPr id="30" name="Text 26"/>
+          <p:cNvSpPr txBox="1"/>
+          <p:nvPr/>
+        </p:nvSpPr>
+        <p:spPr>
+          <a:xfrm>
+            <a:off x="10847527" y="2843784"/>
+            <a:ext cx="822960" cy="292608"/>
+          </a:xfrm>
+          <a:prstGeom prst="rect">
+            <a:avLst/>
+          </a:prstGeom>
+          <a:noFill/>
+          <a:ln/>
+        </p:spPr>
+        <p:txBody>
+          <a:bodyPr wrap="square" lIns="0" tIns="0" rIns="0" bIns="0" rtlCol="0" anchor="ctr">
+            <a:normAutofit/>
+          </a:bodyPr>
+          <a:lstStyle/>
+          <a:p>
+            <a:pPr indent="0" marL="0">
+              <a:buNone/>
+            </a:pPr>
+            <a:r>
+              <a:rPr lang="en-US" sz="1000" b="1" dirty="0">
+                <a:solidFill>
+                  <a:srgbClr val="2DFFB5"/>
+                </a:solidFill>
+                <a:latin typeface="Arial" pitchFamily="34" charset="0"/>
+                <a:ea typeface="Arial" pitchFamily="34" charset="-122"/>
+                <a:cs typeface="Arial" pitchFamily="34" charset="-120"/>
+              </a:rPr>
+              <a:t>3,0 milyon €</a:t>
+            </a:r>
+            <a:endParaRPr lang="en-US" sz="1000" dirty="0"/>
+          </a:p>
+        </p:txBody>
+      </p:sp>
+      <p:sp>
+        <p:nvSpPr>
+          <p:cNvPr id="31" name="Shape 27"/>
+          <p:cNvSpPr/>
+          <p:nvPr/>
+        </p:nvSpPr>
+        <p:spPr>
+          <a:xfrm>
+            <a:off x="7406640" y="3337560"/>
+            <a:ext cx="4236415" cy="1325880"/>
+          </a:xfrm>
+          <a:prstGeom prst="roundRect">
+            <a:avLst>
+              <a:gd name="adj" fmla="val 8276"/>
+            </a:avLst>
+          </a:prstGeom>
+          <a:solidFill>
+            <a:srgbClr val="1F2330"/>
+          </a:solidFill>
+          <a:ln w="15875">
+            <a:solidFill>
+              <a:srgbClr val="FF2D75"/>
+            </a:solidFill>
+            <a:prstDash val="solid"/>
+          </a:ln>
+        </p:spPr>
+      </p:sp>
+      <p:sp>
+        <p:nvSpPr>
+          <p:cNvPr id="32" name="Text 28"/>
+          <p:cNvSpPr txBox="1"/>
+          <p:nvPr/>
+        </p:nvSpPr>
+        <p:spPr>
+          <a:xfrm>
+            <a:off x="7607808" y="3429000"/>
+            <a:ext cx="3834079" cy="274320"/>
+          </a:xfrm>
+          <a:prstGeom prst="rect">
+            <a:avLst/>
+          </a:prstGeom>
+          <a:noFill/>
+          <a:ln/>
+        </p:spPr>
+        <p:txBody>
+          <a:bodyPr wrap="square" lIns="0" tIns="0" rIns="0" bIns="0" rtlCol="0" anchor="t">
+            <a:normAutofit/>
+          </a:bodyPr>
+          <a:lstStyle/>
+          <a:p>
+            <a:pPr indent="0" marL="0">
+              <a:buNone/>
+            </a:pPr>
+            <a:r>
+              <a:rPr lang="en-US" sz="1100" b="1" dirty="0">
+                <a:solidFill>
+                  <a:srgbClr val="9AA3B5"/>
+                </a:solidFill>
+                <a:latin typeface="Arial" pitchFamily="34" charset="0"/>
+                <a:ea typeface="Arial" pitchFamily="34" charset="-122"/>
+                <a:cs typeface="Arial" pitchFamily="34" charset="-120"/>
+              </a:rPr>
+              <a:t>Kurucunun teklifi · her referans yönteminin altında</a:t>
+            </a:r>
+            <a:endParaRPr lang="en-US" sz="1100" dirty="0"/>
+          </a:p>
+        </p:txBody>
+      </p:sp>
+      <p:sp>
+        <p:nvSpPr>
+          <p:cNvPr id="33" name="Text 29"/>
+          <p:cNvSpPr txBox="1"/>
+          <p:nvPr/>
+        </p:nvSpPr>
+        <p:spPr>
+          <a:xfrm>
+            <a:off x="7607808" y="3685032"/>
+            <a:ext cx="3834079" cy="548640"/>
+          </a:xfrm>
+          <a:prstGeom prst="rect">
+            <a:avLst/>
+          </a:prstGeom>
+          <a:noFill/>
+          <a:ln/>
+        </p:spPr>
+        <p:txBody>
+          <a:bodyPr wrap="square" lIns="0" tIns="0" rIns="0" bIns="0" rtlCol="0" anchor="t">
+            <a:normAutofit/>
+          </a:bodyPr>
+          <a:lstStyle/>
+          <a:p>
+            <a:pPr indent="0" marL="0">
+              <a:buNone/>
+            </a:pPr>
+            <a:r>
+              <a:rPr lang="en-US" sz="3200" b="1" dirty="0">
+                <a:solidFill>
+                  <a:srgbClr val="FF2D75"/>
+                </a:solidFill>
+                <a:latin typeface="Arial" pitchFamily="34" charset="0"/>
+                <a:ea typeface="Arial" pitchFamily="34" charset="-122"/>
+                <a:cs typeface="Arial" pitchFamily="34" charset="-120"/>
+              </a:rPr>
+              <a:t>2,25 milyon €</a:t>
+            </a:r>
+            <a:endParaRPr lang="en-US" sz="3200" dirty="0"/>
+          </a:p>
+        </p:txBody>
+      </p:sp>
+      <p:sp>
+        <p:nvSpPr>
+          <p:cNvPr id="34" name="Text 30"/>
+          <p:cNvSpPr txBox="1"/>
+          <p:nvPr/>
+        </p:nvSpPr>
+        <p:spPr>
+          <a:xfrm>
+            <a:off x="7607808" y="4233672"/>
+            <a:ext cx="3834079" cy="365760"/>
+          </a:xfrm>
+          <a:prstGeom prst="rect">
+            <a:avLst/>
+          </a:prstGeom>
+          <a:noFill/>
+          <a:ln/>
+        </p:spPr>
+        <p:txBody>
+          <a:bodyPr wrap="square" lIns="0" tIns="0" rIns="0" bIns="0" rtlCol="0" anchor="t">
+            <a:normAutofit/>
+          </a:bodyPr>
+          <a:lstStyle/>
+          <a:p>
+            <a:pPr indent="0" marL="0">
+              <a:buNone/>
+            </a:pPr>
+            <a:r>
+              <a:rPr lang="en-US" sz="1200" b="1" dirty="0">
+                <a:solidFill>
+                  <a:srgbClr val="FFFFFF"/>
+                </a:solidFill>
+                <a:latin typeface="Arial" pitchFamily="34" charset="0"/>
+                <a:ea typeface="Arial" pitchFamily="34" charset="-122"/>
+                <a:cs typeface="Arial" pitchFamily="34" charset="-120"/>
+              </a:rPr>
+              <a:t>yatırım öncesi · %10,0 için 250 bin € · sonrası 2,5 milyon €</a:t>
+            </a:r>
+            <a:endParaRPr lang="en-US" sz="1200" dirty="0"/>
+          </a:p>
+        </p:txBody>
+      </p:sp>
+      <p:sp>
+        <p:nvSpPr>
+          <p:cNvPr id="35" name="Shape 31"/>
+          <p:cNvSpPr/>
+          <p:nvPr/>
+        </p:nvSpPr>
+        <p:spPr>
+          <a:xfrm>
+            <a:off x="7406640" y="4800600"/>
+            <a:ext cx="4236415" cy="777240"/>
+          </a:xfrm>
+          <a:prstGeom prst="roundRect">
+            <a:avLst>
+              <a:gd name="adj" fmla="val 14118"/>
+            </a:avLst>
+          </a:prstGeom>
+          <a:solidFill>
+            <a:srgbClr val="181B23"/>
+          </a:solidFill>
+          <a:ln w="12700">
+            <a:solidFill>
+              <a:srgbClr val="181B23"/>
+            </a:solidFill>
+            <a:prstDash val="solid"/>
+          </a:ln>
+        </p:spPr>
+      </p:sp>
+      <p:sp>
+        <p:nvSpPr>
+          <p:cNvPr id="36" name="Text 32"/>
+          <p:cNvSpPr txBox="1"/>
+          <p:nvPr/>
+        </p:nvSpPr>
+        <p:spPr>
+          <a:xfrm>
+            <a:off x="7607808" y="4892040"/>
+            <a:ext cx="3834079" cy="274320"/>
+          </a:xfrm>
+          <a:prstGeom prst="rect">
+            <a:avLst/>
+          </a:prstGeom>
+          <a:noFill/>
+          <a:ln/>
+        </p:spPr>
+        <p:txBody>
+          <a:bodyPr wrap="square" lIns="0" tIns="0" rIns="0" bIns="0" rtlCol="0" anchor="t">
+            <a:normAutofit/>
+          </a:bodyPr>
+          <a:lstStyle/>
+          <a:p>
+            <a:pPr indent="0" marL="0">
+              <a:buNone/>
+            </a:pPr>
+            <a:r>
+              <a:rPr lang="en-US" sz="1200" b="1" dirty="0">
+                <a:solidFill>
+                  <a:srgbClr val="5AD1FF"/>
+                </a:solidFill>
+                <a:latin typeface="Arial" pitchFamily="34" charset="0"/>
+                <a:ea typeface="Arial" pitchFamily="34" charset="-122"/>
+                <a:cs typeface="Arial" pitchFamily="34" charset="-120"/>
+              </a:rPr>
+              <a:t>Alternatif: SAFE / dönüştürülebilir kredi</a:t>
+            </a:r>
+            <a:endParaRPr lang="en-US" sz="1200" dirty="0"/>
+          </a:p>
+        </p:txBody>
+      </p:sp>
+      <p:sp>
+        <p:nvSpPr>
+          <p:cNvPr id="37" name="Text 33"/>
+          <p:cNvSpPr txBox="1"/>
+          <p:nvPr/>
+        </p:nvSpPr>
+        <p:spPr>
+          <a:xfrm>
+            <a:off x="7607808" y="5184648"/>
+            <a:ext cx="3834079" cy="320040"/>
+          </a:xfrm>
+          <a:prstGeom prst="rect">
+            <a:avLst/>
+          </a:prstGeom>
+          <a:noFill/>
+          <a:ln/>
+        </p:spPr>
+        <p:txBody>
+          <a:bodyPr wrap="square" lIns="0" tIns="0" rIns="0" bIns="0" rtlCol="0" anchor="t">
+            <a:normAutofit/>
+          </a:bodyPr>
+          <a:lstStyle/>
+          <a:p>
+            <a:pPr indent="0" marL="0">
+              <a:buNone/>
+            </a:pPr>
+            <a:r>
+              <a:rPr lang="en-US" sz="1000" dirty="0">
+                <a:solidFill>
+                  <a:srgbClr val="FFFFFF"/>
+                </a:solidFill>
+                <a:latin typeface="Arial" pitchFamily="34" charset="0"/>
+                <a:ea typeface="Arial" pitchFamily="34" charset="-122"/>
+                <a:cs typeface="Arial" pitchFamily="34" charset="-120"/>
+              </a:rPr>
+              <a:t>Değerleme tavanı 2,25 milyon € · %20 iskonto (%15–20 müzakere edilebilir) · faizsiz · tohum turunda dönüşüm – en fazla %10</a:t>
+            </a:r>
+            <a:endParaRPr lang="en-US" sz="1000" dirty="0"/>
+          </a:p>
+        </p:txBody>
+      </p:sp>
+      <p:sp>
+        <p:nvSpPr>
+          <p:cNvPr id="38" name="Text 34"/>
+          <p:cNvSpPr txBox="1"/>
+          <p:nvPr/>
+        </p:nvSpPr>
+        <p:spPr>
+          <a:xfrm>
+            <a:off x="548640" y="5760720"/>
+            <a:ext cx="9997135" cy="457200"/>
+          </a:xfrm>
+          <a:prstGeom prst="rect">
+            <a:avLst/>
+          </a:prstGeom>
+          <a:noFill/>
+          <a:ln/>
+        </p:spPr>
+        <p:txBody>
+          <a:bodyPr wrap="square" lIns="0" tIns="0" rIns="0" bIns="0" rtlCol="0" anchor="t">
+            <a:normAutofit/>
+          </a:bodyPr>
+          <a:lstStyle/>
+          <a:p>
+            <a:pPr indent="0" marL="0">
+              <a:buNone/>
+            </a:pPr>
+            <a:r>
+              <a:rPr lang="en-US" sz="1000" i="1" dirty="0">
+                <a:solidFill>
+                  <a:srgbClr val="FFD166"/>
+                </a:solidFill>
+                <a:latin typeface="Arial" pitchFamily="34" charset="0"/>
+                <a:ea typeface="Arial" pitchFamily="34" charset="-122"/>
+                <a:cs typeface="Arial" pitchFamily="34" charset="-120"/>
+              </a:rPr>
+              <a:t>Müzakere temeli – vergi/hukuk danışmanıyla kontrol edin. Tüm rakamlar LiveFX_Finanzmodell.xlsx'ten tahminlerdir (ağırlıklı referans değer 2,71 milyon €).</a:t>
+            </a:r>
+            <a:endParaRPr lang="en-US" sz="1000" dirty="0"/>
+          </a:p>
+        </p:txBody>
+      </p:sp>
+    </p:spTree>
+  </p:cSld>
+  <p:clrMapOvr>
+    <a:masterClrMapping/>
+  </p:clrMapOvr>
+</p:sld>
+</file>
+
+<file path=ppt/slides/slide18.xml><?xml version="1.0" encoding="utf-8"?>
+<p:sld xmlns:a="http://schemas.openxmlformats.org/drawingml/2006/main" xmlns:r="http://schemas.openxmlformats.org/officeDocument/2006/relationships" xmlns:p="http://schemas.openxmlformats.org/presentationml/2006/main">
+  <p:cSld name="Slide 18">
+    <p:bg>
+      <p:bgPr>
+        <a:solidFill>
+          <a:srgbClr val="0F1115"/>
+        </a:solidFill>
+      </p:bgPr>
+    </p:bg>
+    <p:spTree>
+      <p:nvGrpSpPr>
+        <p:cNvPr id="1" name=""/>
+        <p:cNvGrpSpPr/>
+        <p:nvPr/>
+      </p:nvGrpSpPr>
+      <p:grpSpPr>
+        <a:xfrm>
+          <a:off x="0" y="0"/>
+          <a:ext cx="0" cy="0"/>
+          <a:chOff x="0" y="0"/>
+          <a:chExt cx="0" cy="0"/>
+        </a:xfrm>
+      </p:grpSpPr>
+      <p:sp>
+        <p:nvSpPr>
+          <p:cNvPr id="2" name="Kicker"/>
+          <p:cNvSpPr txBox="1"/>
+          <p:nvPr/>
+        </p:nvSpPr>
+        <p:spPr>
+          <a:xfrm>
+            <a:off x="548640" y="182880"/>
+            <a:ext cx="8229600" cy="237744"/>
+          </a:xfrm>
+          <a:prstGeom prst="rect">
+            <a:avLst/>
+          </a:prstGeom>
+          <a:noFill/>
+          <a:ln/>
+        </p:spPr>
+        <p:txBody>
+          <a:bodyPr wrap="square" lIns="0" tIns="0" rIns="0" bIns="0" rtlCol="0" anchor="ctr"/>
+          <a:lstStyle/>
+          <a:p>
+            <a:pPr indent="0" marL="0">
+              <a:buNone/>
+            </a:pPr>
+            <a:r>
+              <a:rPr lang="en-US" sz="1000" b="1" spc="300" kern="0" dirty="0">
+                <a:solidFill>
+                  <a:srgbClr val="2DFFB5"/>
+                </a:solidFill>
+                <a:latin typeface="Arial" pitchFamily="34" charset="0"/>
+                <a:ea typeface="Arial" pitchFamily="34" charset="-122"/>
+                <a:cs typeface="Arial" pitchFamily="34" charset="-120"/>
+              </a:rPr>
+              <a:t>KILOMETRE TAŞLARI · 18 AY</a:t>
+            </a:r>
+            <a:endParaRPr lang="en-US" sz="1000" dirty="0"/>
+          </a:p>
+        </p:txBody>
+      </p:sp>
+      <p:sp>
+        <p:nvSpPr>
+          <p:cNvPr id="3" name="Titel"/>
+          <p:cNvSpPr txBox="1"/>
+          <p:nvPr/>
+        </p:nvSpPr>
+        <p:spPr>
+          <a:xfrm>
+            <a:off x="548640" y="438912"/>
+            <a:ext cx="11094415" cy="777240"/>
+          </a:xfrm>
+          <a:prstGeom prst="rect">
+            <a:avLst/>
+          </a:prstGeom>
+          <a:noFill/>
+          <a:ln/>
+        </p:spPr>
+        <p:txBody>
+          <a:bodyPr wrap="square" lIns="0" tIns="0" rIns="0" bIns="0" rtlCol="0" anchor="t">
+            <a:normAutofit/>
+          </a:bodyPr>
+          <a:lstStyle/>
+          <a:p>
+            <a:pPr indent="0" marL="0">
+              <a:buNone/>
+            </a:pPr>
+            <a:r>
+              <a:rPr lang="en-US" sz="3200" b="1" dirty="0">
+                <a:solidFill>
+                  <a:srgbClr val="FFFFFF"/>
+                </a:solidFill>
+                <a:latin typeface="Arial" pitchFamily="34" charset="0"/>
+                <a:ea typeface="Arial" pitchFamily="34" charset="-122"/>
+                <a:cs typeface="Arial" pitchFamily="34" charset="-120"/>
+              </a:rPr>
+              <a:t>Kapılar: 250 bin €'nun kanıtlaması gerekenler</a:t>
+            </a:r>
+            <a:endParaRPr lang="en-US" sz="3200" dirty="0"/>
+          </a:p>
+        </p:txBody>
+      </p:sp>
+      <p:sp>
+        <p:nvSpPr>
+          <p:cNvPr id="4" name="Fuß"/>
+          <p:cNvSpPr txBox="1"/>
+          <p:nvPr/>
+        </p:nvSpPr>
+        <p:spPr>
+          <a:xfrm>
+            <a:off x="7071055" y="6473952"/>
+            <a:ext cx="4572000" cy="228600"/>
+          </a:xfrm>
+          <a:prstGeom prst="rect">
+            <a:avLst/>
+          </a:prstGeom>
+          <a:noFill/>
+          <a:ln/>
+        </p:spPr>
+        <p:txBody>
+          <a:bodyPr wrap="square" lIns="0" tIns="0" rIns="0" bIns="0" rtlCol="0" anchor="ctr"/>
+          <a:lstStyle/>
+          <a:p>
+            <a:pPr algn="r" indent="0" marL="0">
+              <a:buNone/>
+            </a:pPr>
+            <a:r>
+              <a:rPr lang="en-US" sz="900" dirty="0">
+                <a:solidFill>
+                  <a:srgbClr val="6B7280"/>
+                </a:solidFill>
+                <a:latin typeface="Arial" pitchFamily="34" charset="0"/>
+                <a:ea typeface="Arial" pitchFamily="34" charset="-122"/>
+                <a:cs typeface="Arial" pitchFamily="34" charset="-120"/>
+              </a:rPr>
+              <a:t>Gizli · Ekim 2026  ·  LiveFX  ·  18</a:t>
+            </a:r>
+            <a:endParaRPr lang="en-US" sz="900" dirty="0"/>
+          </a:p>
+        </p:txBody>
+      </p:sp>
+      <p:sp>
+        <p:nvSpPr>
+          <p:cNvPr id="6" name="Shape 3"/>
+          <p:cNvSpPr/>
+          <p:nvPr/>
+        </p:nvSpPr>
+        <p:spPr>
+          <a:xfrm>
+            <a:off x="822960" y="1618488"/>
+            <a:ext cx="10545775" cy="0"/>
+          </a:xfrm>
+          <a:prstGeom prst="line">
+            <a:avLst/>
+          </a:prstGeom>
+          <a:noFill/>
+          <a:ln w="25400">
+            <a:solidFill>
+              <a:srgbClr val="2A2F3C"/>
+            </a:solidFill>
+            <a:prstDash val="solid"/>
+          </a:ln>
+        </p:spPr>
+      </p:sp>
+      <p:sp>
+        <p:nvSpPr>
+          <p:cNvPr id="7" name="Shape 4"/>
+          <p:cNvSpPr/>
+          <p:nvPr/>
+        </p:nvSpPr>
+        <p:spPr>
+          <a:xfrm>
+            <a:off x="640080" y="1444752"/>
+            <a:ext cx="2487854" cy="347472"/>
+          </a:xfrm>
+          <a:prstGeom prst="roundRect">
+            <a:avLst>
+              <a:gd name="adj" fmla="val 50000"/>
+            </a:avLst>
+          </a:prstGeom>
+          <a:solidFill>
+            <a:srgbClr val="1F2330"/>
+          </a:solidFill>
+          <a:ln w="12700">
+            <a:solidFill>
+              <a:srgbClr val="FF2D75"/>
+            </a:solidFill>
+            <a:prstDash val="solid"/>
+          </a:ln>
+        </p:spPr>
+      </p:sp>
+      <p:sp>
+        <p:nvSpPr>
+          <p:cNvPr id="8" name="Text 5"/>
+          <p:cNvSpPr txBox="1"/>
+          <p:nvPr/>
+        </p:nvSpPr>
+        <p:spPr>
+          <a:xfrm>
+            <a:off x="640080" y="1444752"/>
+            <a:ext cx="2487854" cy="347472"/>
+          </a:xfrm>
+          <a:prstGeom prst="rect">
+            <a:avLst/>
+          </a:prstGeom>
+          <a:noFill/>
+          <a:ln/>
+        </p:spPr>
+        <p:txBody>
+          <a:bodyPr wrap="square" lIns="0" tIns="0" rIns="0" bIns="0" rtlCol="0" anchor="ctr">
+            <a:normAutofit/>
+          </a:bodyPr>
+          <a:lstStyle/>
+          <a:p>
+            <a:pPr algn="ctr" indent="0" marL="0">
+              <a:buNone/>
+            </a:pPr>
+            <a:r>
+              <a:rPr lang="en-US" sz="1200" b="1" dirty="0">
+                <a:solidFill>
+                  <a:srgbClr val="FF2D75"/>
+                </a:solidFill>
+                <a:latin typeface="Arial" pitchFamily="34" charset="0"/>
+                <a:ea typeface="Arial" pitchFamily="34" charset="-122"/>
+                <a:cs typeface="Arial" pitchFamily="34" charset="-120"/>
+              </a:rPr>
+              <a:t>G0  ·  3. ay</a:t>
+            </a:r>
+            <a:endParaRPr lang="en-US" sz="1200" dirty="0"/>
+          </a:p>
+        </p:txBody>
+      </p:sp>
+      <p:sp>
+        <p:nvSpPr>
+          <p:cNvPr id="9" name="Shape 6"/>
+          <p:cNvSpPr/>
+          <p:nvPr/>
+        </p:nvSpPr>
+        <p:spPr>
+          <a:xfrm>
+            <a:off x="548640" y="1938528"/>
+            <a:ext cx="2670734" cy="3703320"/>
+          </a:xfrm>
+          <a:prstGeom prst="roundRect">
+            <a:avLst>
+              <a:gd name="adj" fmla="val 4109"/>
+            </a:avLst>
+          </a:prstGeom>
+          <a:solidFill>
+            <a:srgbClr val="181B23"/>
+          </a:solidFill>
+          <a:ln w="12700">
+            <a:solidFill>
+              <a:srgbClr val="181B23"/>
+            </a:solidFill>
+            <a:prstDash val="solid"/>
+          </a:ln>
+        </p:spPr>
+      </p:sp>
+      <p:sp>
+        <p:nvSpPr>
+          <p:cNvPr id="10" name="Text 7"/>
+          <p:cNvSpPr txBox="1"/>
+          <p:nvPr/>
+        </p:nvSpPr>
+        <p:spPr>
+          <a:xfrm>
+            <a:off x="749808" y="2048256"/>
+            <a:ext cx="2268398" cy="365760"/>
+          </a:xfrm>
+          <a:prstGeom prst="rect">
+            <a:avLst/>
+          </a:prstGeom>
+          <a:noFill/>
+          <a:ln/>
+        </p:spPr>
+        <p:txBody>
+          <a:bodyPr wrap="square" lIns="0" tIns="0" rIns="0" bIns="0" rtlCol="0" anchor="t">
+            <a:normAutofit/>
+          </a:bodyPr>
+          <a:lstStyle/>
+          <a:p>
+            <a:pPr indent="0" marL="0">
+              <a:buNone/>
+            </a:pPr>
+            <a:r>
+              <a:rPr lang="en-US" sz="1500" b="1" dirty="0">
+                <a:solidFill>
+                  <a:srgbClr val="FF2D75"/>
+                </a:solidFill>
+                <a:latin typeface="Arial" pitchFamily="34" charset="0"/>
+                <a:ea typeface="Arial" pitchFamily="34" charset="-122"/>
+                <a:cs typeface="Arial" pitchFamily="34" charset="-120"/>
+              </a:rPr>
+              <a:t>Başlangıç</a:t>
+            </a:r>
+            <a:endParaRPr lang="en-US" sz="1500" dirty="0"/>
+          </a:p>
+        </p:txBody>
+      </p:sp>
+      <p:sp>
+        <p:nvSpPr>
+          <p:cNvPr id="11" name="Text 8"/>
+          <p:cNvSpPr txBox="1"/>
+          <p:nvPr/>
+        </p:nvSpPr>
+        <p:spPr>
+          <a:xfrm>
+            <a:off x="749808" y="2468880"/>
+            <a:ext cx="2268398" cy="2286000"/>
+          </a:xfrm>
+          <a:prstGeom prst="rect">
+            <a:avLst/>
+          </a:prstGeom>
+          <a:noFill/>
+          <a:ln/>
+        </p:spPr>
+        <p:txBody>
+          <a:bodyPr wrap="square" lIns="0" tIns="0" rIns="0" bIns="0" rtlCol="0" anchor="t">
+            <a:normAutofit/>
+          </a:bodyPr>
+          <a:lstStyle/>
+          <a:p>
+            <a:pPr marL="203200" indent="-203200">
+              <a:spcAft>
+                <a:spcPts val="500"/>
+              </a:spcAft>
+              <a:buSzPct val="100000"/>
+              <a:buChar char="•"/>
+            </a:pPr>
+            <a:r>
+              <a:rPr lang="en-US" sz="1150" dirty="0">
+                <a:solidFill>
+                  <a:srgbClr val="FFFFFF"/>
+                </a:solidFill>
+                <a:latin typeface="Arial" pitchFamily="34" charset="0"/>
+                <a:ea typeface="Arial" pitchFamily="34" charset="-122"/>
+                <a:cs typeface="Arial" pitchFamily="34" charset="-120"/>
+              </a:rPr>
+              <a:t>Pro aboneliği yayında (ödeme)</a:t>
+            </a:r>
+            <a:endParaRPr lang="en-US" sz="1150" dirty="0"/>
+          </a:p>
+          <a:p>
+            <a:pPr marL="203200" indent="-203200">
+              <a:spcAft>
+                <a:spcPts val="500"/>
+              </a:spcAft>
+              <a:buSzPct val="100000"/>
+              <a:buChar char="•"/>
+            </a:pPr>
+            <a:r>
+              <a:rPr lang="en-US" sz="1150" dirty="0">
+                <a:solidFill>
+                  <a:srgbClr val="FFFFFF"/>
+                </a:solidFill>
+                <a:latin typeface="Arial" pitchFamily="34" charset="0"/>
+                <a:ea typeface="Arial" pitchFamily="34" charset="-122"/>
+                <a:cs typeface="Arial" pitchFamily="34" charset="-120"/>
+              </a:rPr>
+              <a:t>Mobil/web geliştirici ekipte</a:t>
+            </a:r>
+            <a:endParaRPr lang="en-US" sz="1150" dirty="0"/>
+          </a:p>
+        </p:txBody>
+      </p:sp>
+      <p:sp>
+        <p:nvSpPr>
+          <p:cNvPr id="12" name="Shape 9"/>
+          <p:cNvSpPr/>
+          <p:nvPr/>
+        </p:nvSpPr>
+        <p:spPr>
+          <a:xfrm>
+            <a:off x="749808" y="4846320"/>
+            <a:ext cx="2268398" cy="0"/>
+          </a:xfrm>
+          <a:prstGeom prst="line">
+            <a:avLst/>
+          </a:prstGeom>
+          <a:noFill/>
+          <a:ln w="12700">
+            <a:solidFill>
+              <a:srgbClr val="2A2F3C"/>
+            </a:solidFill>
+            <a:prstDash val="solid"/>
+          </a:ln>
+        </p:spPr>
+      </p:sp>
+      <p:sp>
+        <p:nvSpPr>
+          <p:cNvPr id="13" name="Text 10"/>
+          <p:cNvSpPr txBox="1"/>
+          <p:nvPr/>
+        </p:nvSpPr>
+        <p:spPr>
+          <a:xfrm>
+            <a:off x="749808" y="4910328"/>
+            <a:ext cx="2268398" cy="219456"/>
+          </a:xfrm>
+          <a:prstGeom prst="rect">
+            <a:avLst/>
+          </a:prstGeom>
+          <a:noFill/>
+          <a:ln/>
+        </p:spPr>
+        <p:txBody>
+          <a:bodyPr wrap="square" lIns="0" tIns="0" rIns="0" bIns="0" rtlCol="0" anchor="t">
+            <a:normAutofit/>
+          </a:bodyPr>
+          <a:lstStyle/>
+          <a:p>
+            <a:pPr indent="0" marL="0">
+              <a:buNone/>
+            </a:pPr>
+            <a:r>
+              <a:rPr lang="en-US" sz="950" b="1" spc="100" kern="0" dirty="0">
+                <a:solidFill>
+                  <a:srgbClr val="9AA3B5"/>
+                </a:solidFill>
+                <a:latin typeface="Arial" pitchFamily="34" charset="0"/>
+                <a:ea typeface="Arial" pitchFamily="34" charset="-122"/>
+                <a:cs typeface="Arial" pitchFamily="34" charset="-120"/>
+              </a:rPr>
+              <a:t>AÇTIĞI ADIM</a:t>
+            </a:r>
+            <a:endParaRPr lang="en-US" sz="950" dirty="0"/>
+          </a:p>
+        </p:txBody>
+      </p:sp>
+      <p:sp>
+        <p:nvSpPr>
+          <p:cNvPr id="14" name="Text 11"/>
+          <p:cNvSpPr txBox="1"/>
+          <p:nvPr/>
+        </p:nvSpPr>
+        <p:spPr>
+          <a:xfrm>
+            <a:off x="749808" y="5148072"/>
+            <a:ext cx="2268398" cy="457200"/>
+          </a:xfrm>
+          <a:prstGeom prst="rect">
+            <a:avLst/>
+          </a:prstGeom>
+          <a:noFill/>
+          <a:ln/>
+        </p:spPr>
+        <p:txBody>
+          <a:bodyPr wrap="square" lIns="0" tIns="0" rIns="0" bIns="0" rtlCol="0" anchor="t">
+            <a:normAutofit/>
+          </a:bodyPr>
+          <a:lstStyle/>
+          <a:p>
+            <a:pPr indent="0" marL="0">
+              <a:buNone/>
+            </a:pPr>
+            <a:r>
+              <a:rPr lang="en-US" sz="1100" b="1" dirty="0">
+                <a:solidFill>
+                  <a:srgbClr val="FF2D75"/>
+                </a:solidFill>
+                <a:latin typeface="Arial" pitchFamily="34" charset="0"/>
+                <a:ea typeface="Arial" pitchFamily="34" charset="-122"/>
+                <a:cs typeface="Arial" pitchFamily="34" charset="-120"/>
+              </a:rPr>
+              <a:t>Pazara giriş 2. aşama bütçesi</a:t>
+            </a:r>
+            <a:endParaRPr lang="en-US" sz="1100" dirty="0"/>
+          </a:p>
+        </p:txBody>
+      </p:sp>
+      <p:sp>
+        <p:nvSpPr>
+          <p:cNvPr id="15" name="Shape 12"/>
+          <p:cNvSpPr/>
+          <p:nvPr/>
+        </p:nvSpPr>
+        <p:spPr>
+          <a:xfrm>
+            <a:off x="3447974" y="1444752"/>
+            <a:ext cx="2487854" cy="347472"/>
+          </a:xfrm>
+          <a:prstGeom prst="roundRect">
+            <a:avLst>
+              <a:gd name="adj" fmla="val 50000"/>
+            </a:avLst>
+          </a:prstGeom>
+          <a:solidFill>
+            <a:srgbClr val="1F2330"/>
+          </a:solidFill>
+          <a:ln w="12700">
+            <a:solidFill>
+              <a:srgbClr val="2DFFB5"/>
+            </a:solidFill>
+            <a:prstDash val="solid"/>
+          </a:ln>
+        </p:spPr>
+      </p:sp>
+      <p:sp>
+        <p:nvSpPr>
+          <p:cNvPr id="16" name="Text 13"/>
+          <p:cNvSpPr txBox="1"/>
+          <p:nvPr/>
+        </p:nvSpPr>
+        <p:spPr>
+          <a:xfrm>
+            <a:off x="3447974" y="1444752"/>
+            <a:ext cx="2487854" cy="347472"/>
+          </a:xfrm>
+          <a:prstGeom prst="rect">
+            <a:avLst/>
+          </a:prstGeom>
+          <a:noFill/>
+          <a:ln/>
+        </p:spPr>
+        <p:txBody>
+          <a:bodyPr wrap="square" lIns="0" tIns="0" rIns="0" bIns="0" rtlCol="0" anchor="ctr">
+            <a:normAutofit/>
+          </a:bodyPr>
+          <a:lstStyle/>
+          <a:p>
+            <a:pPr algn="ctr" indent="0" marL="0">
+              <a:buNone/>
+            </a:pPr>
+            <a:r>
+              <a:rPr lang="en-US" sz="1200" b="1" dirty="0">
+                <a:solidFill>
+                  <a:srgbClr val="2DFFB5"/>
+                </a:solidFill>
+                <a:latin typeface="Arial" pitchFamily="34" charset="0"/>
+                <a:ea typeface="Arial" pitchFamily="34" charset="-122"/>
+                <a:cs typeface="Arial" pitchFamily="34" charset="-120"/>
+              </a:rPr>
+              <a:t>G1  ·  6. ay</a:t>
+            </a:r>
+            <a:endParaRPr lang="en-US" sz="1200" dirty="0"/>
+          </a:p>
+        </p:txBody>
+      </p:sp>
+      <p:sp>
+        <p:nvSpPr>
+          <p:cNvPr id="17" name="Shape 14"/>
+          <p:cNvSpPr/>
+          <p:nvPr/>
+        </p:nvSpPr>
+        <p:spPr>
+          <a:xfrm>
+            <a:off x="3356534" y="1938528"/>
+            <a:ext cx="2670734" cy="3703320"/>
+          </a:xfrm>
+          <a:prstGeom prst="roundRect">
+            <a:avLst>
+              <a:gd name="adj" fmla="val 4109"/>
+            </a:avLst>
+          </a:prstGeom>
+          <a:solidFill>
+            <a:srgbClr val="181B23"/>
+          </a:solidFill>
+          <a:ln w="12700">
+            <a:solidFill>
+              <a:srgbClr val="181B23"/>
+            </a:solidFill>
+            <a:prstDash val="solid"/>
+          </a:ln>
+        </p:spPr>
+      </p:sp>
+      <p:sp>
+        <p:nvSpPr>
+          <p:cNvPr id="18" name="Text 15"/>
+          <p:cNvSpPr txBox="1"/>
+          <p:nvPr/>
+        </p:nvSpPr>
+        <p:spPr>
+          <a:xfrm>
+            <a:off x="3557702" y="2048256"/>
+            <a:ext cx="2268398" cy="365760"/>
+          </a:xfrm>
+          <a:prstGeom prst="rect">
+            <a:avLst/>
+          </a:prstGeom>
+          <a:noFill/>
+          <a:ln/>
+        </p:spPr>
+        <p:txBody>
+          <a:bodyPr wrap="square" lIns="0" tIns="0" rIns="0" bIns="0" rtlCol="0" anchor="t">
+            <a:normAutofit/>
+          </a:bodyPr>
+          <a:lstStyle/>
+          <a:p>
+            <a:pPr indent="0" marL="0">
+              <a:buNone/>
+            </a:pPr>
+            <a:r>
+              <a:rPr lang="en-US" sz="1500" b="1" dirty="0">
+                <a:solidFill>
+                  <a:srgbClr val="2DFFB5"/>
+                </a:solidFill>
+                <a:latin typeface="Arial" pitchFamily="34" charset="0"/>
+                <a:ea typeface="Arial" pitchFamily="34" charset="-122"/>
+                <a:cs typeface="Arial" pitchFamily="34" charset="-120"/>
+              </a:rPr>
+              <a:t>Aktivasyon</a:t>
+            </a:r>
+            <a:endParaRPr lang="en-US" sz="1500" dirty="0"/>
+          </a:p>
+        </p:txBody>
+      </p:sp>
+      <p:sp>
+        <p:nvSpPr>
+          <p:cNvPr id="19" name="Text 16"/>
+          <p:cNvSpPr txBox="1"/>
+          <p:nvPr/>
+        </p:nvSpPr>
+        <p:spPr>
+          <a:xfrm>
+            <a:off x="3557702" y="2468880"/>
+            <a:ext cx="2268398" cy="2286000"/>
+          </a:xfrm>
+          <a:prstGeom prst="rect">
+            <a:avLst/>
+          </a:prstGeom>
+          <a:noFill/>
+          <a:ln/>
+        </p:spPr>
+        <p:txBody>
+          <a:bodyPr wrap="square" lIns="0" tIns="0" rIns="0" bIns="0" rtlCol="0" anchor="t">
+            <a:normAutofit/>
+          </a:bodyPr>
+          <a:lstStyle/>
+          <a:p>
+            <a:pPr marL="203200" indent="-203200">
+              <a:spcAft>
+                <a:spcPts val="500"/>
+              </a:spcAft>
+              <a:buSzPct val="100000"/>
+              <a:buChar char="•"/>
+            </a:pPr>
+            <a:r>
+              <a:rPr lang="en-US" sz="1150" dirty="0">
+                <a:solidFill>
+                  <a:srgbClr val="FFFFFF"/>
+                </a:solidFill>
+                <a:latin typeface="Arial" pitchFamily="34" charset="0"/>
+                <a:ea typeface="Arial" pitchFamily="34" charset="-122"/>
+                <a:cs typeface="Arial" pitchFamily="34" charset="-120"/>
+              </a:rPr>
+              <a:t>10.000 kayıtlı kullanıcı (eşik 4.000)</a:t>
+            </a:r>
+            <a:endParaRPr lang="en-US" sz="1150" dirty="0"/>
+          </a:p>
+          <a:p>
+            <a:pPr marL="203200" indent="-203200">
+              <a:spcAft>
+                <a:spcPts val="500"/>
+              </a:spcAft>
+              <a:buSzPct val="100000"/>
+              <a:buChar char="•"/>
+            </a:pPr>
+            <a:r>
+              <a:rPr lang="en-US" sz="1150" dirty="0">
+                <a:solidFill>
+                  <a:srgbClr val="FFFFFF"/>
+                </a:solidFill>
+                <a:latin typeface="Arial" pitchFamily="34" charset="0"/>
+                <a:ea typeface="Arial" pitchFamily="34" charset="-122"/>
+                <a:cs typeface="Arial" pitchFamily="34" charset="-120"/>
+              </a:rPr>
+              <a:t>400 ödeme yapan Pro (eşik 120)</a:t>
+            </a:r>
+            <a:endParaRPr lang="en-US" sz="1150" dirty="0"/>
+          </a:p>
+          <a:p>
+            <a:pPr marL="203200" indent="-203200">
+              <a:spcAft>
+                <a:spcPts val="500"/>
+              </a:spcAft>
+              <a:buSzPct val="100000"/>
+              <a:buChar char="•"/>
+            </a:pPr>
+            <a:r>
+              <a:rPr lang="en-US" sz="1150" dirty="0">
+                <a:solidFill>
+                  <a:srgbClr val="FFFFFF"/>
+                </a:solidFill>
+                <a:latin typeface="Arial" pitchFamily="34" charset="0"/>
+                <a:ea typeface="Arial" pitchFamily="34" charset="-122"/>
+                <a:cs typeface="Arial" pitchFamily="34" charset="-120"/>
+              </a:rPr>
+              <a:t>20 beta içerik üreticisi TR/DE, 10–20 elçi</a:t>
+            </a:r>
+            <a:endParaRPr lang="en-US" sz="1150" dirty="0"/>
+          </a:p>
+          <a:p>
+            <a:pPr marL="203200" indent="-203200">
+              <a:spcAft>
+                <a:spcPts val="500"/>
+              </a:spcAft>
+              <a:buSzPct val="100000"/>
+              <a:buChar char="•"/>
+            </a:pPr>
+            <a:r>
+              <a:rPr lang="en-US" sz="1150" dirty="0">
+                <a:solidFill>
+                  <a:srgbClr val="FFFFFF"/>
+                </a:solidFill>
+                <a:latin typeface="Arial" pitchFamily="34" charset="0"/>
+                <a:ea typeface="Arial" pitchFamily="34" charset="-122"/>
+                <a:cs typeface="Arial" pitchFamily="34" charset="-120"/>
+              </a:rPr>
+              <a:t>300 kelimeli Kelime-Resim</a:t>
+            </a:r>
+            <a:endParaRPr lang="en-US" sz="1150" dirty="0"/>
+          </a:p>
+          <a:p>
+            <a:pPr marL="203200" indent="-203200">
+              <a:spcAft>
+                <a:spcPts val="500"/>
+              </a:spcAft>
+              <a:buSzPct val="100000"/>
+              <a:buChar char="•"/>
+            </a:pPr>
+            <a:r>
+              <a:rPr lang="en-US" sz="1150" dirty="0">
+                <a:solidFill>
+                  <a:srgbClr val="FFFFFF"/>
+                </a:solidFill>
+                <a:latin typeface="Arial" pitchFamily="34" charset="0"/>
+                <a:ea typeface="Arial" pitchFamily="34" charset="-122"/>
+                <a:cs typeface="Arial" pitchFamily="34" charset="-120"/>
+              </a:rPr>
+              <a:t>4. hafta elde tutma ≥ %30</a:t>
+            </a:r>
+            <a:endParaRPr lang="en-US" sz="1150" dirty="0"/>
+          </a:p>
+        </p:txBody>
+      </p:sp>
+      <p:sp>
+        <p:nvSpPr>
+          <p:cNvPr id="20" name="Shape 17"/>
+          <p:cNvSpPr/>
+          <p:nvPr/>
+        </p:nvSpPr>
+        <p:spPr>
+          <a:xfrm>
+            <a:off x="3557702" y="4846320"/>
+            <a:ext cx="2268398" cy="0"/>
+          </a:xfrm>
+          <a:prstGeom prst="line">
+            <a:avLst/>
+          </a:prstGeom>
+          <a:noFill/>
+          <a:ln w="12700">
+            <a:solidFill>
+              <a:srgbClr val="2A2F3C"/>
+            </a:solidFill>
+            <a:prstDash val="solid"/>
+          </a:ln>
+        </p:spPr>
+      </p:sp>
+      <p:sp>
+        <p:nvSpPr>
+          <p:cNvPr id="21" name="Text 18"/>
+          <p:cNvSpPr txBox="1"/>
+          <p:nvPr/>
+        </p:nvSpPr>
+        <p:spPr>
+          <a:xfrm>
+            <a:off x="3557702" y="4910328"/>
+            <a:ext cx="2268398" cy="219456"/>
+          </a:xfrm>
+          <a:prstGeom prst="rect">
+            <a:avLst/>
+          </a:prstGeom>
+          <a:noFill/>
+          <a:ln/>
+        </p:spPr>
+        <p:txBody>
+          <a:bodyPr wrap="square" lIns="0" tIns="0" rIns="0" bIns="0" rtlCol="0" anchor="t">
+            <a:normAutofit/>
+          </a:bodyPr>
+          <a:lstStyle/>
+          <a:p>
+            <a:pPr indent="0" marL="0">
+              <a:buNone/>
+            </a:pPr>
+            <a:r>
+              <a:rPr lang="en-US" sz="950" b="1" spc="100" kern="0" dirty="0">
+                <a:solidFill>
+                  <a:srgbClr val="9AA3B5"/>
+                </a:solidFill>
+                <a:latin typeface="Arial" pitchFamily="34" charset="0"/>
+                <a:ea typeface="Arial" pitchFamily="34" charset="-122"/>
+                <a:cs typeface="Arial" pitchFamily="34" charset="-120"/>
+              </a:rPr>
+              <a:t>AÇTIĞI ADIM</a:t>
+            </a:r>
+            <a:endParaRPr lang="en-US" sz="950" dirty="0"/>
+          </a:p>
+        </p:txBody>
+      </p:sp>
+      <p:sp>
+        <p:nvSpPr>
+          <p:cNvPr id="22" name="Text 19"/>
+          <p:cNvSpPr txBox="1"/>
+          <p:nvPr/>
+        </p:nvSpPr>
+        <p:spPr>
+          <a:xfrm>
+            <a:off x="3557702" y="5148072"/>
+            <a:ext cx="2268398" cy="457200"/>
+          </a:xfrm>
+          <a:prstGeom prst="rect">
+            <a:avLst/>
+          </a:prstGeom>
+          <a:noFill/>
+          <a:ln/>
+        </p:spPr>
+        <p:txBody>
+          <a:bodyPr wrap="square" lIns="0" tIns="0" rIns="0" bIns="0" rtlCol="0" anchor="t">
+            <a:normAutofit/>
+          </a:bodyPr>
+          <a:lstStyle/>
+          <a:p>
+            <a:pPr indent="0" marL="0">
+              <a:buNone/>
+            </a:pPr>
+            <a:r>
+              <a:rPr lang="en-US" sz="1100" b="1" dirty="0">
+                <a:solidFill>
+                  <a:srgbClr val="2DFFB5"/>
+                </a:solidFill>
+                <a:latin typeface="Arial" pitchFamily="34" charset="0"/>
+                <a:ea typeface="Arial" pitchFamily="34" charset="-122"/>
+                <a:cs typeface="Arial" pitchFamily="34" charset="-120"/>
+              </a:rPr>
+              <a:t>Mobil uygulama/PWA yayını</a:t>
+            </a:r>
+            <a:endParaRPr lang="en-US" sz="1100" dirty="0"/>
+          </a:p>
+        </p:txBody>
+      </p:sp>
+      <p:sp>
+        <p:nvSpPr>
+          <p:cNvPr id="23" name="Shape 20"/>
+          <p:cNvSpPr/>
+          <p:nvPr/>
+        </p:nvSpPr>
+        <p:spPr>
+          <a:xfrm>
+            <a:off x="6255868" y="1444752"/>
+            <a:ext cx="2487854" cy="347472"/>
+          </a:xfrm>
+          <a:prstGeom prst="roundRect">
+            <a:avLst>
+              <a:gd name="adj" fmla="val 50000"/>
+            </a:avLst>
+          </a:prstGeom>
+          <a:solidFill>
+            <a:srgbClr val="1F2330"/>
+          </a:solidFill>
+          <a:ln w="12700">
+            <a:solidFill>
+              <a:srgbClr val="FFD166"/>
+            </a:solidFill>
+            <a:prstDash val="solid"/>
+          </a:ln>
+        </p:spPr>
+      </p:sp>
+      <p:sp>
+        <p:nvSpPr>
+          <p:cNvPr id="24" name="Text 21"/>
+          <p:cNvSpPr txBox="1"/>
+          <p:nvPr/>
+        </p:nvSpPr>
+        <p:spPr>
+          <a:xfrm>
+            <a:off x="6255868" y="1444752"/>
+            <a:ext cx="2487854" cy="347472"/>
+          </a:xfrm>
+          <a:prstGeom prst="rect">
+            <a:avLst/>
+          </a:prstGeom>
+          <a:noFill/>
+          <a:ln/>
+        </p:spPr>
+        <p:txBody>
+          <a:bodyPr wrap="square" lIns="0" tIns="0" rIns="0" bIns="0" rtlCol="0" anchor="ctr">
+            <a:normAutofit/>
+          </a:bodyPr>
+          <a:lstStyle/>
+          <a:p>
+            <a:pPr algn="ctr" indent="0" marL="0">
+              <a:buNone/>
+            </a:pPr>
+            <a:r>
+              <a:rPr lang="en-US" sz="1200" b="1" dirty="0">
+                <a:solidFill>
+                  <a:srgbClr val="FFD166"/>
+                </a:solidFill>
+                <a:latin typeface="Arial" pitchFamily="34" charset="0"/>
+                <a:ea typeface="Arial" pitchFamily="34" charset="-122"/>
+                <a:cs typeface="Arial" pitchFamily="34" charset="-120"/>
+              </a:rPr>
+              <a:t>G2a  ·  12. ay</a:t>
+            </a:r>
+            <a:endParaRPr lang="en-US" sz="1200" dirty="0"/>
+          </a:p>
+        </p:txBody>
+      </p:sp>
+      <p:sp>
+        <p:nvSpPr>
+          <p:cNvPr id="25" name="Shape 22"/>
+          <p:cNvSpPr/>
+          <p:nvPr/>
+        </p:nvSpPr>
+        <p:spPr>
+          <a:xfrm>
+            <a:off x="6164428" y="1938528"/>
+            <a:ext cx="2670734" cy="3703320"/>
+          </a:xfrm>
+          <a:prstGeom prst="roundRect">
+            <a:avLst>
+              <a:gd name="adj" fmla="val 4109"/>
+            </a:avLst>
+          </a:prstGeom>
+          <a:solidFill>
+            <a:srgbClr val="181B23"/>
+          </a:solidFill>
+          <a:ln w="12700">
+            <a:solidFill>
+              <a:srgbClr val="181B23"/>
+            </a:solidFill>
+            <a:prstDash val="solid"/>
+          </a:ln>
+        </p:spPr>
+      </p:sp>
+      <p:sp>
+        <p:nvSpPr>
+          <p:cNvPr id="26" name="Text 23"/>
+          <p:cNvSpPr txBox="1"/>
+          <p:nvPr/>
+        </p:nvSpPr>
+        <p:spPr>
+          <a:xfrm>
+            <a:off x="6365596" y="2048256"/>
+            <a:ext cx="2268398" cy="365760"/>
+          </a:xfrm>
+          <a:prstGeom prst="rect">
+            <a:avLst/>
+          </a:prstGeom>
+          <a:noFill/>
+          <a:ln/>
+        </p:spPr>
+        <p:txBody>
+          <a:bodyPr wrap="square" lIns="0" tIns="0" rIns="0" bIns="0" rtlCol="0" anchor="t">
+            <a:normAutofit/>
+          </a:bodyPr>
+          <a:lstStyle/>
+          <a:p>
+            <a:pPr indent="0" marL="0">
+              <a:buNone/>
+            </a:pPr>
+            <a:r>
+              <a:rPr lang="en-US" sz="1500" b="1" dirty="0">
+                <a:solidFill>
+                  <a:srgbClr val="FFD166"/>
+                </a:solidFill>
+                <a:latin typeface="Arial" pitchFamily="34" charset="0"/>
+                <a:ea typeface="Arial" pitchFamily="34" charset="-122"/>
+                <a:cs typeface="Arial" pitchFamily="34" charset="-120"/>
+              </a:rPr>
+              <a:t>Çekiş</a:t>
+            </a:r>
+            <a:endParaRPr lang="en-US" sz="1500" dirty="0"/>
+          </a:p>
+        </p:txBody>
+      </p:sp>
+      <p:sp>
+        <p:nvSpPr>
+          <p:cNvPr id="27" name="Text 24"/>
+          <p:cNvSpPr txBox="1"/>
+          <p:nvPr/>
+        </p:nvSpPr>
+        <p:spPr>
+          <a:xfrm>
+            <a:off x="6365596" y="2468880"/>
+            <a:ext cx="2268398" cy="2286000"/>
+          </a:xfrm>
+          <a:prstGeom prst="rect">
+            <a:avLst/>
+          </a:prstGeom>
+          <a:noFill/>
+          <a:ln/>
+        </p:spPr>
+        <p:txBody>
+          <a:bodyPr wrap="square" lIns="0" tIns="0" rIns="0" bIns="0" rtlCol="0" anchor="t">
+            <a:normAutofit/>
+          </a:bodyPr>
+          <a:lstStyle/>
+          <a:p>
+            <a:pPr marL="203200" indent="-203200">
+              <a:spcAft>
+                <a:spcPts val="500"/>
+              </a:spcAft>
+              <a:buSzPct val="100000"/>
+              <a:buChar char="•"/>
+            </a:pPr>
+            <a:r>
+              <a:rPr lang="en-US" sz="1150" dirty="0">
+                <a:solidFill>
+                  <a:srgbClr val="FFFFFF"/>
+                </a:solidFill>
+                <a:latin typeface="Arial" pitchFamily="34" charset="0"/>
+                <a:ea typeface="Arial" pitchFamily="34" charset="-122"/>
+                <a:cs typeface="Arial" pitchFamily="34" charset="-120"/>
+              </a:rPr>
+              <a:t>20.000 kullanıcı (eşik 8.000)</a:t>
+            </a:r>
+            <a:endParaRPr lang="en-US" sz="1150" dirty="0"/>
+          </a:p>
+          <a:p>
+            <a:pPr marL="203200" indent="-203200">
+              <a:spcAft>
+                <a:spcPts val="500"/>
+              </a:spcAft>
+              <a:buSzPct val="100000"/>
+              <a:buChar char="•"/>
+            </a:pPr>
+            <a:r>
+              <a:rPr lang="en-US" sz="1150" dirty="0">
+                <a:solidFill>
+                  <a:srgbClr val="FFFFFF"/>
+                </a:solidFill>
+                <a:latin typeface="Arial" pitchFamily="34" charset="0"/>
+                <a:ea typeface="Arial" pitchFamily="34" charset="-122"/>
+                <a:cs typeface="Arial" pitchFamily="34" charset="-120"/>
+              </a:rPr>
+              <a:t>800 ödeme yapan Pro (eşik 240)</a:t>
+            </a:r>
+            <a:endParaRPr lang="en-US" sz="1150" dirty="0"/>
+          </a:p>
+          <a:p>
+            <a:pPr marL="203200" indent="-203200">
+              <a:spcAft>
+                <a:spcPts val="500"/>
+              </a:spcAft>
+              <a:buSzPct val="100000"/>
+              <a:buChar char="•"/>
+            </a:pPr>
+            <a:r>
+              <a:rPr lang="en-US" sz="1150" dirty="0">
+                <a:solidFill>
+                  <a:srgbClr val="FFFFFF"/>
+                </a:solidFill>
+                <a:latin typeface="Arial" pitchFamily="34" charset="0"/>
+                <a:ea typeface="Arial" pitchFamily="34" charset="-122"/>
+                <a:cs typeface="Arial" pitchFamily="34" charset="-120"/>
+              </a:rPr>
+              <a:t>MRR 8.073 € (eşik 2.500 €)</a:t>
+            </a:r>
+            <a:endParaRPr lang="en-US" sz="1150" dirty="0"/>
+          </a:p>
+          <a:p>
+            <a:pPr marL="203200" indent="-203200">
+              <a:spcAft>
+                <a:spcPts val="500"/>
+              </a:spcAft>
+              <a:buSzPct val="100000"/>
+              <a:buChar char="•"/>
+            </a:pPr>
+            <a:r>
+              <a:rPr lang="en-US" sz="1150" dirty="0">
+                <a:solidFill>
+                  <a:srgbClr val="FFFFFF"/>
+                </a:solidFill>
+                <a:latin typeface="Arial" pitchFamily="34" charset="0"/>
+                <a:ea typeface="Arial" pitchFamily="34" charset="-122"/>
+                <a:cs typeface="Arial" pitchFamily="34" charset="-120"/>
+              </a:rPr>
+              <a:t>1 platform ya da eğitim pilotu; ≥ 3 kurs/sınıfta Kelime-Resim</a:t>
+            </a:r>
+            <a:endParaRPr lang="en-US" sz="1150" dirty="0"/>
+          </a:p>
+        </p:txBody>
+      </p:sp>
+      <p:sp>
+        <p:nvSpPr>
+          <p:cNvPr id="28" name="Shape 25"/>
+          <p:cNvSpPr/>
+          <p:nvPr/>
+        </p:nvSpPr>
+        <p:spPr>
+          <a:xfrm>
+            <a:off x="6365596" y="4846320"/>
+            <a:ext cx="2268398" cy="0"/>
+          </a:xfrm>
+          <a:prstGeom prst="line">
+            <a:avLst/>
+          </a:prstGeom>
+          <a:noFill/>
+          <a:ln w="12700">
+            <a:solidFill>
+              <a:srgbClr val="2A2F3C"/>
+            </a:solidFill>
+            <a:prstDash val="solid"/>
+          </a:ln>
+        </p:spPr>
+      </p:sp>
+      <p:sp>
+        <p:nvSpPr>
+          <p:cNvPr id="29" name="Text 26"/>
+          <p:cNvSpPr txBox="1"/>
+          <p:nvPr/>
+        </p:nvSpPr>
+        <p:spPr>
+          <a:xfrm>
+            <a:off x="6365596" y="4910328"/>
+            <a:ext cx="2268398" cy="219456"/>
+          </a:xfrm>
+          <a:prstGeom prst="rect">
+            <a:avLst/>
+          </a:prstGeom>
+          <a:noFill/>
+          <a:ln/>
+        </p:spPr>
+        <p:txBody>
+          <a:bodyPr wrap="square" lIns="0" tIns="0" rIns="0" bIns="0" rtlCol="0" anchor="t">
+            <a:normAutofit/>
+          </a:bodyPr>
+          <a:lstStyle/>
+          <a:p>
+            <a:pPr indent="0" marL="0">
+              <a:buNone/>
+            </a:pPr>
+            <a:r>
+              <a:rPr lang="en-US" sz="950" b="1" spc="100" kern="0" dirty="0">
+                <a:solidFill>
+                  <a:srgbClr val="9AA3B5"/>
+                </a:solidFill>
+                <a:latin typeface="Arial" pitchFamily="34" charset="0"/>
+                <a:ea typeface="Arial" pitchFamily="34" charset="-122"/>
+                <a:cs typeface="Arial" pitchFamily="34" charset="-120"/>
+              </a:rPr>
+              <a:t>AÇTIĞI ADIM</a:t>
+            </a:r>
+            <a:endParaRPr lang="en-US" sz="950" dirty="0"/>
+          </a:p>
+        </p:txBody>
+      </p:sp>
+      <p:sp>
+        <p:nvSpPr>
+          <p:cNvPr id="30" name="Text 27"/>
+          <p:cNvSpPr txBox="1"/>
+          <p:nvPr/>
+        </p:nvSpPr>
+        <p:spPr>
+          <a:xfrm>
+            <a:off x="6365596" y="5148072"/>
+            <a:ext cx="2268398" cy="457200"/>
+          </a:xfrm>
+          <a:prstGeom prst="rect">
+            <a:avLst/>
+          </a:prstGeom>
+          <a:noFill/>
+          <a:ln/>
+        </p:spPr>
+        <p:txBody>
+          <a:bodyPr wrap="square" lIns="0" tIns="0" rIns="0" bIns="0" rtlCol="0" anchor="t">
+            <a:normAutofit/>
+          </a:bodyPr>
+          <a:lstStyle/>
+          <a:p>
+            <a:pPr indent="0" marL="0">
+              <a:buNone/>
+            </a:pPr>
+            <a:r>
+              <a:rPr lang="en-US" sz="1100" b="1" dirty="0">
+                <a:solidFill>
+                  <a:srgbClr val="FFD166"/>
+                </a:solidFill>
+                <a:latin typeface="Arial" pitchFamily="34" charset="0"/>
+                <a:ea typeface="Arial" pitchFamily="34" charset="-122"/>
+                <a:cs typeface="Arial" pitchFamily="34" charset="-120"/>
+              </a:rPr>
+              <a:t>DE/EN genişlemesi, platform görüşmeleri</a:t>
+            </a:r>
+            <a:endParaRPr lang="en-US" sz="1100" dirty="0"/>
+          </a:p>
+        </p:txBody>
+      </p:sp>
+      <p:sp>
+        <p:nvSpPr>
+          <p:cNvPr id="31" name="Shape 28"/>
+          <p:cNvSpPr/>
+          <p:nvPr/>
+        </p:nvSpPr>
+        <p:spPr>
+          <a:xfrm>
+            <a:off x="9063761" y="1444752"/>
+            <a:ext cx="2487854" cy="347472"/>
+          </a:xfrm>
+          <a:prstGeom prst="roundRect">
+            <a:avLst>
+              <a:gd name="adj" fmla="val 50000"/>
+            </a:avLst>
+          </a:prstGeom>
+          <a:solidFill>
+            <a:srgbClr val="1F2330"/>
+          </a:solidFill>
+          <a:ln w="12700">
+            <a:solidFill>
+              <a:srgbClr val="5AD1FF"/>
+            </a:solidFill>
+            <a:prstDash val="solid"/>
+          </a:ln>
+        </p:spPr>
+      </p:sp>
+      <p:sp>
+        <p:nvSpPr>
+          <p:cNvPr id="32" name="Text 29"/>
+          <p:cNvSpPr txBox="1"/>
+          <p:nvPr/>
+        </p:nvSpPr>
+        <p:spPr>
+          <a:xfrm>
+            <a:off x="9063761" y="1444752"/>
+            <a:ext cx="2487854" cy="347472"/>
+          </a:xfrm>
+          <a:prstGeom prst="rect">
+            <a:avLst/>
+          </a:prstGeom>
+          <a:noFill/>
+          <a:ln/>
+        </p:spPr>
+        <p:txBody>
+          <a:bodyPr wrap="square" lIns="0" tIns="0" rIns="0" bIns="0" rtlCol="0" anchor="ctr">
+            <a:normAutofit/>
+          </a:bodyPr>
+          <a:lstStyle/>
+          <a:p>
+            <a:pPr algn="ctr" indent="0" marL="0">
+              <a:buNone/>
+            </a:pPr>
+            <a:r>
+              <a:rPr lang="en-US" sz="1200" b="1" dirty="0">
+                <a:solidFill>
+                  <a:srgbClr val="5AD1FF"/>
+                </a:solidFill>
+                <a:latin typeface="Arial" pitchFamily="34" charset="0"/>
+                <a:ea typeface="Arial" pitchFamily="34" charset="-122"/>
+                <a:cs typeface="Arial" pitchFamily="34" charset="-120"/>
+              </a:rPr>
+              <a:t>G2  ·  18. ay</a:t>
+            </a:r>
+            <a:endParaRPr lang="en-US" sz="1200" dirty="0"/>
+          </a:p>
+        </p:txBody>
+      </p:sp>
+      <p:sp>
+        <p:nvSpPr>
+          <p:cNvPr id="33" name="Shape 30"/>
+          <p:cNvSpPr/>
+          <p:nvPr/>
+        </p:nvSpPr>
+        <p:spPr>
+          <a:xfrm>
+            <a:off x="8972321" y="1938528"/>
+            <a:ext cx="2670734" cy="3703320"/>
+          </a:xfrm>
+          <a:prstGeom prst="roundRect">
+            <a:avLst>
+              <a:gd name="adj" fmla="val 4109"/>
+            </a:avLst>
+          </a:prstGeom>
+          <a:solidFill>
+            <a:srgbClr val="181B23"/>
+          </a:solidFill>
+          <a:ln w="12700">
+            <a:solidFill>
+              <a:srgbClr val="181B23"/>
+            </a:solidFill>
+            <a:prstDash val="solid"/>
+          </a:ln>
+        </p:spPr>
+      </p:sp>
+      <p:sp>
+        <p:nvSpPr>
+          <p:cNvPr id="34" name="Text 31"/>
+          <p:cNvSpPr txBox="1"/>
+          <p:nvPr/>
+        </p:nvSpPr>
+        <p:spPr>
+          <a:xfrm>
+            <a:off x="9173489" y="2048256"/>
+            <a:ext cx="2268398" cy="365760"/>
+          </a:xfrm>
+          <a:prstGeom prst="rect">
+            <a:avLst/>
+          </a:prstGeom>
+          <a:noFill/>
+          <a:ln/>
+        </p:spPr>
+        <p:txBody>
+          <a:bodyPr wrap="square" lIns="0" tIns="0" rIns="0" bIns="0" rtlCol="0" anchor="t">
+            <a:normAutofit/>
+          </a:bodyPr>
+          <a:lstStyle/>
+          <a:p>
+            <a:pPr indent="0" marL="0">
+              <a:buNone/>
+            </a:pPr>
+            <a:r>
+              <a:rPr lang="en-US" sz="1500" b="1" dirty="0">
+                <a:solidFill>
+                  <a:srgbClr val="5AD1FF"/>
+                </a:solidFill>
+                <a:latin typeface="Arial" pitchFamily="34" charset="0"/>
+                <a:ea typeface="Arial" pitchFamily="34" charset="-122"/>
+                <a:cs typeface="Arial" pitchFamily="34" charset="-120"/>
+              </a:rPr>
+              <a:t>Sonraki tur</a:t>
+            </a:r>
+            <a:endParaRPr lang="en-US" sz="1500" dirty="0"/>
+          </a:p>
+        </p:txBody>
+      </p:sp>
+      <p:sp>
+        <p:nvSpPr>
+          <p:cNvPr id="35" name="Text 32"/>
+          <p:cNvSpPr txBox="1"/>
+          <p:nvPr/>
+        </p:nvSpPr>
+        <p:spPr>
+          <a:xfrm>
+            <a:off x="9173489" y="2468880"/>
+            <a:ext cx="2268398" cy="2286000"/>
+          </a:xfrm>
+          <a:prstGeom prst="rect">
+            <a:avLst/>
+          </a:prstGeom>
+          <a:noFill/>
+          <a:ln/>
+        </p:spPr>
+        <p:txBody>
+          <a:bodyPr wrap="square" lIns="0" tIns="0" rIns="0" bIns="0" rtlCol="0" anchor="t">
+            <a:normAutofit/>
+          </a:bodyPr>
+          <a:lstStyle/>
+          <a:p>
+            <a:pPr marL="203200" indent="-203200">
+              <a:spcAft>
+                <a:spcPts val="500"/>
+              </a:spcAft>
+              <a:buSzPct val="100000"/>
+              <a:buChar char="•"/>
+            </a:pPr>
+            <a:r>
+              <a:rPr lang="en-US" sz="1150" dirty="0">
+                <a:solidFill>
+                  <a:srgbClr val="FFFFFF"/>
+                </a:solidFill>
+                <a:latin typeface="Arial" pitchFamily="34" charset="0"/>
+                <a:ea typeface="Arial" pitchFamily="34" charset="-122"/>
+                <a:cs typeface="Arial" pitchFamily="34" charset="-120"/>
+              </a:rPr>
+              <a:t>50.000 kullanıcı (eşik 19.000)</a:t>
+            </a:r>
+            <a:endParaRPr lang="en-US" sz="1150" dirty="0"/>
+          </a:p>
+          <a:p>
+            <a:pPr marL="203200" indent="-203200">
+              <a:spcAft>
+                <a:spcPts val="500"/>
+              </a:spcAft>
+              <a:buSzPct val="100000"/>
+              <a:buChar char="•"/>
+            </a:pPr>
+            <a:r>
+              <a:rPr lang="en-US" sz="1150" dirty="0">
+                <a:solidFill>
+                  <a:srgbClr val="FFFFFF"/>
+                </a:solidFill>
+                <a:latin typeface="Arial" pitchFamily="34" charset="0"/>
+                <a:ea typeface="Arial" pitchFamily="34" charset="-122"/>
+                <a:cs typeface="Arial" pitchFamily="34" charset="-120"/>
+              </a:rPr>
+              <a:t>2.000 ödeme yapan Pro (eşik 570)</a:t>
+            </a:r>
+            <a:endParaRPr lang="en-US" sz="1150" dirty="0"/>
+          </a:p>
+          <a:p>
+            <a:pPr marL="203200" indent="-203200">
+              <a:spcAft>
+                <a:spcPts val="500"/>
+              </a:spcAft>
+              <a:buSzPct val="100000"/>
+              <a:buChar char="•"/>
+            </a:pPr>
+            <a:r>
+              <a:rPr lang="en-US" sz="1150" dirty="0">
+                <a:solidFill>
+                  <a:srgbClr val="FFFFFF"/>
+                </a:solidFill>
+                <a:latin typeface="Arial" pitchFamily="34" charset="0"/>
+                <a:ea typeface="Arial" pitchFamily="34" charset="-122"/>
+                <a:cs typeface="Arial" pitchFamily="34" charset="-120"/>
+              </a:rPr>
+              <a:t>MRR 22.586 € (eşik 6.495 €)</a:t>
+            </a:r>
+            <a:endParaRPr lang="en-US" sz="1150" dirty="0"/>
+          </a:p>
+          <a:p>
+            <a:pPr marL="203200" indent="-203200">
+              <a:spcAft>
+                <a:spcPts val="500"/>
+              </a:spcAft>
+              <a:buSzPct val="100000"/>
+              <a:buChar char="•"/>
+            </a:pPr>
+            <a:r>
+              <a:rPr lang="en-US" sz="1150" dirty="0">
+                <a:solidFill>
+                  <a:srgbClr val="FFFFFF"/>
+                </a:solidFill>
+                <a:latin typeface="Arial" pitchFamily="34" charset="0"/>
+                <a:ea typeface="Arial" pitchFamily="34" charset="-122"/>
+                <a:cs typeface="Arial" pitchFamily="34" charset="-120"/>
+              </a:rPr>
+              <a:t>Pro 3. ay elde tutma ≥ %75; dönüşüm ≥ %3 / %4</a:t>
+            </a:r>
+            <a:endParaRPr lang="en-US" sz="1150" dirty="0"/>
+          </a:p>
+          <a:p>
+            <a:pPr marL="203200" indent="-203200">
+              <a:spcAft>
+                <a:spcPts val="500"/>
+              </a:spcAft>
+              <a:buSzPct val="100000"/>
+              <a:buChar char="•"/>
+            </a:pPr>
+            <a:r>
+              <a:rPr lang="en-US" sz="1150" dirty="0">
+                <a:solidFill>
+                  <a:srgbClr val="FFFFFF"/>
+                </a:solidFill>
+                <a:latin typeface="Arial" pitchFamily="34" charset="0"/>
+                <a:ea typeface="Arial" pitchFamily="34" charset="-122"/>
+                <a:cs typeface="Arial" pitchFamily="34" charset="-120"/>
+              </a:rPr>
+              <a:t>≥ 5 ödeme yapan okul ya da kurs</a:t>
+            </a:r>
+            <a:endParaRPr lang="en-US" sz="1150" dirty="0"/>
+          </a:p>
+        </p:txBody>
+      </p:sp>
+      <p:sp>
+        <p:nvSpPr>
+          <p:cNvPr id="36" name="Shape 33"/>
+          <p:cNvSpPr/>
+          <p:nvPr/>
+        </p:nvSpPr>
+        <p:spPr>
+          <a:xfrm>
+            <a:off x="9173489" y="4846320"/>
+            <a:ext cx="2268398" cy="0"/>
+          </a:xfrm>
+          <a:prstGeom prst="line">
+            <a:avLst/>
+          </a:prstGeom>
+          <a:noFill/>
+          <a:ln w="12700">
+            <a:solidFill>
+              <a:srgbClr val="2A2F3C"/>
+            </a:solidFill>
+            <a:prstDash val="solid"/>
+          </a:ln>
+        </p:spPr>
+      </p:sp>
+      <p:sp>
+        <p:nvSpPr>
+          <p:cNvPr id="37" name="Text 34"/>
+          <p:cNvSpPr txBox="1"/>
+          <p:nvPr/>
+        </p:nvSpPr>
+        <p:spPr>
+          <a:xfrm>
+            <a:off x="9173489" y="4910328"/>
+            <a:ext cx="2268398" cy="219456"/>
+          </a:xfrm>
+          <a:prstGeom prst="rect">
+            <a:avLst/>
+          </a:prstGeom>
+          <a:noFill/>
+          <a:ln/>
+        </p:spPr>
+        <p:txBody>
+          <a:bodyPr wrap="square" lIns="0" tIns="0" rIns="0" bIns="0" rtlCol="0" anchor="t">
+            <a:normAutofit/>
+          </a:bodyPr>
+          <a:lstStyle/>
+          <a:p>
+            <a:pPr indent="0" marL="0">
+              <a:buNone/>
+            </a:pPr>
+            <a:r>
+              <a:rPr lang="en-US" sz="950" b="1" spc="100" kern="0" dirty="0">
+                <a:solidFill>
+                  <a:srgbClr val="9AA3B5"/>
+                </a:solidFill>
+                <a:latin typeface="Arial" pitchFamily="34" charset="0"/>
+                <a:ea typeface="Arial" pitchFamily="34" charset="-122"/>
+                <a:cs typeface="Arial" pitchFamily="34" charset="-120"/>
+              </a:rPr>
+              <a:t>AÇTIĞI ADIM</a:t>
+            </a:r>
+            <a:endParaRPr lang="en-US" sz="950" dirty="0"/>
+          </a:p>
+        </p:txBody>
+      </p:sp>
+      <p:sp>
+        <p:nvSpPr>
+          <p:cNvPr id="38" name="Text 35"/>
+          <p:cNvSpPr txBox="1"/>
+          <p:nvPr/>
+        </p:nvSpPr>
+        <p:spPr>
+          <a:xfrm>
+            <a:off x="9173489" y="5148072"/>
+            <a:ext cx="2268398" cy="457200"/>
+          </a:xfrm>
+          <a:prstGeom prst="rect">
+            <a:avLst/>
+          </a:prstGeom>
+          <a:noFill/>
+          <a:ln/>
+        </p:spPr>
+        <p:txBody>
+          <a:bodyPr wrap="square" lIns="0" tIns="0" rIns="0" bIns="0" rtlCol="0" anchor="t">
+            <a:normAutofit/>
+          </a:bodyPr>
+          <a:lstStyle/>
+          <a:p>
+            <a:pPr indent="0" marL="0">
+              <a:buNone/>
+            </a:pPr>
+            <a:r>
+              <a:rPr lang="en-US" sz="1050" b="1" dirty="0">
+                <a:solidFill>
+                  <a:srgbClr val="5AD1FF"/>
+                </a:solidFill>
+                <a:latin typeface="Arial" pitchFamily="34" charset="0"/>
+                <a:ea typeface="Arial" pitchFamily="34" charset="-122"/>
+                <a:cs typeface="Arial" pitchFamily="34" charset="-120"/>
+              </a:rPr>
+              <a:t>Tohum turu, 19. aydan itibaren büyüme ekibi, hikâye motoru/Studio</a:t>
+            </a:r>
+            <a:endParaRPr lang="en-US" sz="1050" dirty="0"/>
+          </a:p>
+        </p:txBody>
+      </p:sp>
+      <p:sp>
+        <p:nvSpPr>
+          <p:cNvPr id="39" name="Text 36"/>
+          <p:cNvSpPr txBox="1"/>
+          <p:nvPr/>
+        </p:nvSpPr>
+        <p:spPr>
+          <a:xfrm>
+            <a:off x="548640" y="5806440"/>
+            <a:ext cx="9997135" cy="457200"/>
+          </a:xfrm>
+          <a:prstGeom prst="rect">
+            <a:avLst/>
+          </a:prstGeom>
+          <a:noFill/>
+          <a:ln/>
+        </p:spPr>
+        <p:txBody>
+          <a:bodyPr wrap="square" lIns="0" tIns="0" rIns="0" bIns="0" rtlCol="0" anchor="t">
+            <a:normAutofit/>
+          </a:bodyPr>
+          <a:lstStyle/>
+          <a:p>
+            <a:pPr indent="0" marL="0">
+              <a:buNone/>
+            </a:pPr>
+            <a:r>
+              <a:rPr lang="en-US" sz="1100" i="1" dirty="0">
+                <a:solidFill>
+                  <a:srgbClr val="9AA3B5"/>
+                </a:solidFill>
+                <a:latin typeface="Arial" pitchFamily="34" charset="0"/>
+                <a:ea typeface="Arial" pitchFamily="34" charset="-122"/>
+                <a:cs typeface="Arial" pitchFamily="34" charset="-120"/>
+              </a:rPr>
+              <a:t>Tüm değerler hedeftir (henüz ulaşılmadı): hedef = temel senaryo, eşik = temkinli senaryo. Eşik yakalandığında kapı geçilmiş sayılır. Öneri – yatırımcılarla netleştirilecek.</a:t>
+            </a:r>
+            <a:endParaRPr lang="en-US" sz="1100" dirty="0"/>
+          </a:p>
+        </p:txBody>
+      </p:sp>
+    </p:spTree>
+  </p:cSld>
+  <p:clrMapOvr>
+    <a:masterClrMapping/>
+  </p:clrMapOvr>
+</p:sld>
+</file>
+
+<file path=ppt/slides/slide19.xml><?xml version="1.0" encoding="utf-8"?>
+<p:sld xmlns:a="http://schemas.openxmlformats.org/drawingml/2006/main" xmlns:r="http://schemas.openxmlformats.org/officeDocument/2006/relationships" xmlns:p="http://schemas.openxmlformats.org/presentationml/2006/main">
+  <p:cSld name="Slide 19">
+    <p:bg>
+      <p:bgPr>
+        <a:solidFill>
+          <a:srgbClr val="0F1115"/>
+        </a:solidFill>
+      </p:bgPr>
+    </p:bg>
+    <p:spTree>
+      <p:nvGrpSpPr>
+        <p:cNvPr id="1" name=""/>
+        <p:cNvGrpSpPr/>
+        <p:nvPr/>
+      </p:nvGrpSpPr>
+      <p:grpSpPr>
+        <a:xfrm>
+          <a:off x="0" y="0"/>
+          <a:ext cx="0" cy="0"/>
+          <a:chOff x="0" y="0"/>
+          <a:chExt cx="0" cy="0"/>
+        </a:xfrm>
+      </p:grpSpPr>
       <p:pic>
         <p:nvPicPr>
           <p:cNvPr id="2" name="Image 0" descr="/home/user/Notion/live-fx/business/video/stills/tr-16x9-6_9s.jpg">    </p:cNvPr>
@@ -16367,7 +21551,7 @@
                 <a:ea typeface="Arial" pitchFamily="34" charset="-122"/>
                 <a:cs typeface="Arial" pitchFamily="34" charset="-120"/>
               </a:rPr>
-              <a:t>Ön tohum: 500.000 €</a:t>
+              <a:t>Ön tohum: 250.000 €</a:t>
             </a:r>
             <a:endParaRPr lang="en-US" sz="1600" dirty="0"/>
           </a:p>
@@ -16408,7 +21592,7 @@
                 <a:ea typeface="Arial" pitchFamily="34" charset="-122"/>
                 <a:cs typeface="Arial" pitchFamily="34" charset="-120"/>
               </a:rPr>
-              <a:t>LiveFX 2.0 ve A–D vizyon hatları için (önce Kelime-Resim ve hikâye motoru), 24 ay. Paralelinde satın alma görüşmelerine açığız (teknoloji + ekip).</a:t>
+              <a:t>%10 karşılığında (yatırım öncesi 2,25 milyon €, sonrası 2,5 milyon €) ya da 2,25 milyon € tavanlı SAFE. 18 ay, yalın: Pro aboneliği, mobil uygulama/PWA, TR → DE/EN lansmanı, Kelime-Resim.</a:t>
             </a:r>
             <a:endParaRPr lang="en-US" sz="1250" dirty="0"/>
           </a:p>
@@ -16476,7 +21660,7 @@
                 <a:ea typeface="Arial" pitchFamily="34" charset="-122"/>
                 <a:cs typeface="Arial" pitchFamily="34" charset="-120"/>
               </a:rPr>
-              <a:t>500.000 € ön tohum (pre-seed) · 24 ay · fon kullanımı – Öneri – lütfen onaylayın</a:t>
+              <a:t>250.000 € ön tohum (pre-seed) · 18 ay · fon kullanımı – Öneri – vergi/hukuk danışmanıyla kontrol edin</a:t>
             </a:r>
             <a:endParaRPr lang="en-US" sz="1200" dirty="0"/>
           </a:p>
@@ -16667,7 +21851,7 @@
                 <a:ea typeface="Arial" pitchFamily="34" charset="-122"/>
                 <a:cs typeface="Arial" pitchFamily="34" charset="-120"/>
               </a:rPr>
-              <a:t>Ürün ve mühendislik</a:t>
+              <a:t>Ekip ve ürün</a:t>
             </a:r>
             <a:endParaRPr lang="en-US" sz="1000" dirty="0"/>
           </a:p>
@@ -16708,7 +21892,7 @@
                 <a:ea typeface="Arial" pitchFamily="34" charset="-122"/>
                 <a:cs typeface="Arial" pitchFamily="34" charset="-120"/>
               </a:rPr>
-              <a:t>250 bin € · %50</a:t>
+              <a:t>125 bin € · %50</a:t>
             </a:r>
             <a:endParaRPr lang="en-US" sz="1000" dirty="0"/>
           </a:p>
@@ -16774,7 +21958,7 @@
                 <a:ea typeface="Arial" pitchFamily="34" charset="-122"/>
                 <a:cs typeface="Arial" pitchFamily="34" charset="-120"/>
               </a:rPr>
-              <a:t>Vizyon hatları A–D</a:t>
+              <a:t>Pazara giriş ve pilotlar</a:t>
             </a:r>
             <a:endParaRPr lang="en-US" sz="1000" dirty="0"/>
           </a:p>
@@ -16815,7 +21999,7 @@
                 <a:ea typeface="Arial" pitchFamily="34" charset="-122"/>
                 <a:cs typeface="Arial" pitchFamily="34" charset="-120"/>
               </a:rPr>
-              <a:t>100 bin € · %20</a:t>
+              <a:t>50 bin € · %20</a:t>
             </a:r>
             <a:endParaRPr lang="en-US" sz="1000" dirty="0"/>
           </a:p>
@@ -16881,7 +22065,7 @@
                 <a:ea typeface="Arial" pitchFamily="34" charset="-122"/>
                 <a:cs typeface="Arial" pitchFamily="34" charset="-120"/>
               </a:rPr>
-              <a:t>Pazara giriş ve pilotlar</a:t>
+              <a:t>Kelime-Resim (B hattı)</a:t>
             </a:r>
             <a:endParaRPr lang="en-US" sz="1000" dirty="0"/>
           </a:p>
@@ -16922,7 +22106,7 @@
                 <a:ea typeface="Arial" pitchFamily="34" charset="-122"/>
                 <a:cs typeface="Arial" pitchFamily="34" charset="-120"/>
               </a:rPr>
-              <a:t>75 bin € · %15</a:t>
+              <a:t>37,5 bin € · %15</a:t>
             </a:r>
             <a:endParaRPr lang="en-US" sz="1000" dirty="0"/>
           </a:p>
@@ -17029,7 +22213,7 @@
                 <a:ea typeface="Arial" pitchFamily="34" charset="-122"/>
                 <a:cs typeface="Arial" pitchFamily="34" charset="-120"/>
               </a:rPr>
-              <a:t>50 bin € · %10</a:t>
+              <a:t>25 bin € · %10</a:t>
             </a:r>
             <a:endParaRPr lang="en-US" sz="1000" dirty="0"/>
           </a:p>
@@ -17095,7 +22279,7 @@
                 <a:ea typeface="Arial" pitchFamily="34" charset="-122"/>
                 <a:cs typeface="Arial" pitchFamily="34" charset="-120"/>
               </a:rPr>
-              <a:t>Rezerv</a:t>
+              <a:t>Yedek</a:t>
             </a:r>
             <a:endParaRPr lang="en-US" sz="1000" dirty="0"/>
           </a:p>
@@ -17136,7 +22320,7 @@
                 <a:ea typeface="Arial" pitchFamily="34" charset="-122"/>
                 <a:cs typeface="Arial" pitchFamily="34" charset="-120"/>
               </a:rPr>
-              <a:t>25 bin € · %5</a:t>
+              <a:t>12,5 bin € · %5</a:t>
             </a:r>
             <a:endParaRPr lang="en-US" sz="1000" dirty="0"/>
           </a:p>
@@ -17284,7 +22468,7 @@
                 <a:ea typeface="Arial" pitchFamily="34" charset="-122"/>
                 <a:cs typeface="Arial" pitchFamily="34" charset="-120"/>
               </a:rPr>
-              <a:t>Gizli · Ekim 2026  ·  LiveFX  ·  17</a:t>
+              <a:t>Gizli · Ekim 2026  ·  LiveFX  ·  19</a:t>
             </a:r>
             <a:endParaRPr lang="en-US" sz="900" dirty="0"/>
           </a:p>
@@ -20268,7 +25452,7 @@
                 <a:ea typeface="Arial" pitchFamily="34" charset="-122"/>
                 <a:cs typeface="Arial" pitchFamily="34" charset="-120"/>
               </a:rPr>
-              <a:t>Bugünkü ürün – sürüm 2.0</a:t>
+              <a:t>Bugünkü ürün – sürüm 2.1</a:t>
             </a:r>
             <a:endParaRPr lang="en-US" sz="3200" dirty="0"/>
           </a:p>
@@ -20455,7 +25639,7 @@
                 <a:ea typeface="Arial" pitchFamily="34" charset="-122"/>
                 <a:cs typeface="Arial" pitchFamily="34" charset="-120"/>
               </a:rPr>
-              <a:t>Tarayıcı ASR, otomatik dil DE/TR/EN, şive toleransı, öğrenme işlevi, kendi kendine test; harici Whisper/Deepgram, çevrimdışı Whisper (deneysel)</a:t>
+              <a:t>Tarayıcı ASR, otomatik dil DE/TR/EN, lehçe toleransı, öğrenme işlevi, öz test; Whisper/Deepgram ile harici, çevrimdışı Whisper (deneysel)</a:t>
             </a:r>
             <a:endParaRPr lang="en-US" sz="1100" dirty="0"/>
           </a:p>
@@ -20521,7 +25705,7 @@
                 <a:ea typeface="Arial" pitchFamily="34" charset="-122"/>
                 <a:cs typeface="Arial" pitchFamily="34" charset="-120"/>
               </a:rPr>
-              <a:t>✨</a:t>
+              <a:t>⚡</a:t>
             </a:r>
             <a:endParaRPr lang="en-US" sz="2000" dirty="0"/>
           </a:p>
@@ -20562,7 +25746,7 @@
                 <a:ea typeface="Arial" pitchFamily="34" charset="-122"/>
                 <a:cs typeface="Arial" pitchFamily="34" charset="-120"/>
               </a:rPr>
-              <a:t>Efekt motoru v2</a:t>
+              <a:t>Efektler ve performans</a:t>
             </a:r>
             <a:endParaRPr lang="en-US" sz="1400" dirty="0"/>
           </a:p>
@@ -20603,7 +25787,7 @@
                 <a:ea typeface="Arial" pitchFamily="34" charset="-122"/>
                 <a:cs typeface="Arial" pitchFamily="34" charset="-120"/>
               </a:rPr>
-              <a:t>Fizikli Canvas parçacıkları (60 fps), neon/glitch yazı, alt yazı bantları, kombolar, 4 tema</a:t>
+              <a:t>Canvas parçacıkları (60 fps), neon/glitch/çıkartma metni, alt bant, kombolar, 4 tema; performans modu: kare süresi −%63 ile −%69</a:t>
             </a:r>
             <a:endParaRPr lang="en-US" sz="1100" dirty="0"/>
           </a:p>
@@ -20899,7 +26083,7 @@
                 <a:ea typeface="Arial" pitchFamily="34" charset="-122"/>
                 <a:cs typeface="Arial" pitchFamily="34" charset="-120"/>
               </a:rPr>
-              <a:t>Türkçe 85 · Deutsch 49 · English 50 · Aile ve Çocuk 27 · Oyun 27 – artı GIF arama</a:t>
+              <a:t>Türkçe 85 · Deutsch 49 · English 50 · Aile ve Çocuk 27 · Gaming 27 – ayrıca TR/DE/EN metin çıkartma paketleri</a:t>
             </a:r>
             <a:endParaRPr lang="en-US" sz="1100" dirty="0"/>
           </a:p>
@@ -20965,7 +26149,7 @@
                 <a:ea typeface="Arial" pitchFamily="34" charset="-122"/>
                 <a:cs typeface="Arial" pitchFamily="34" charset="-120"/>
               </a:rPr>
-              <a:t>🔊</a:t>
+              <a:t>✨</a:t>
             </a:r>
             <a:endParaRPr lang="en-US" sz="2000" dirty="0"/>
           </a:p>
@@ -21006,7 +26190,7 @@
                 <a:ea typeface="Arial" pitchFamily="34" charset="-122"/>
                 <a:cs typeface="Arial" pitchFamily="34" charset="-120"/>
               </a:rPr>
-              <a:t>Ses motoru</a:t>
+              <a:t>Çıkartmalar ve GIF'ler</a:t>
             </a:r>
             <a:endParaRPr lang="en-US" sz="1400" dirty="0"/>
           </a:p>
@@ -21047,7 +26231,7 @@
                 <a:ea typeface="Arial" pitchFamily="34" charset="-122"/>
                 <a:cs typeface="Arial" pitchFamily="34" charset="-120"/>
               </a:rPr>
-              <a:t>38 sentetik ses (lisans ücreti yok), limiter, ducking, stereo ve yankılı mikser</a:t>
+              <a:t>143 ücretsiz çıkartma (MIT lisansı, 119 animasyonlu) · içerik filtreli güvenli GIF arama KLIPY/GIPHY, GIF'ler kaydedilmeden bağlantıyla</a:t>
             </a:r>
             <a:endParaRPr lang="en-US" sz="1100" dirty="0"/>
           </a:p>
@@ -21113,7 +26297,7 @@
                 <a:ea typeface="Arial" pitchFamily="34" charset="-122"/>
                 <a:cs typeface="Arial" pitchFamily="34" charset="-120"/>
               </a:rPr>
-              <a:t>💬</a:t>
+              <a:t>🔊</a:t>
             </a:r>
             <a:endParaRPr lang="en-US" sz="2000" dirty="0"/>
           </a:p>
@@ -21154,7 +26338,7 @@
                 <a:ea typeface="Arial" pitchFamily="34" charset="-122"/>
                 <a:cs typeface="Arial" pitchFamily="34" charset="-120"/>
               </a:rPr>
-              <a:t>İzleyici tetikleyicileri</a:t>
+              <a:t>Ses motoru</a:t>
             </a:r>
             <a:endParaRPr lang="en-US" sz="1400" dirty="0"/>
           </a:p>
@@ -21195,7 +26379,7 @@
                 <a:ea typeface="Arial" pitchFamily="34" charset="-122"/>
                 <a:cs typeface="Arial" pitchFamily="34" charset="-120"/>
               </a:rPr>
-              <a:t>Twitch sohbeti, YouTube sohbeti, hediye webhook'u (TikTok için TikFinity / Streamer.bot)</a:t>
+              <a:t>38 sentetik ses (lisans ücreti yok), limiter'lı mikser, ducking, stereo, yankı</a:t>
             </a:r>
             <a:endParaRPr lang="en-US" sz="1100" dirty="0"/>
           </a:p>
@@ -21343,7 +26527,7 @@
                 <a:ea typeface="Arial" pitchFamily="34" charset="-122"/>
                 <a:cs typeface="Arial" pitchFamily="34" charset="-120"/>
               </a:rPr>
-              <a:t>Telefondan kumanda (PWA), OBS/Streamlabs, TikTok LIVE Studio, IG Live Producer, OBS'siz demo</a:t>
+              <a:t>Telefon uzaktan kumandası (PWA), OBS/Streamlabs, TikTok LIVE Studio, IG Live Producer, OBS'siz demo</a:t>
             </a:r>
             <a:endParaRPr lang="en-US" sz="1100" dirty="0"/>
           </a:p>
@@ -21450,7 +26634,7 @@
                 <a:ea typeface="Arial" pitchFamily="34" charset="-122"/>
                 <a:cs typeface="Arial" pitchFamily="34" charset="-120"/>
               </a:rPr>
-              <a:t>Açık API</a:t>
+              <a:t>İzleyiciler ve açık API</a:t>
             </a:r>
             <a:endParaRPr lang="en-US" sz="1400" dirty="0"/>
           </a:p>
@@ -21491,7 +26675,7 @@
                 <a:ea typeface="Arial" pitchFamily="34" charset="-122"/>
                 <a:cs typeface="Arial" pitchFamily="34" charset="-120"/>
               </a:rPr>
-              <a:t>Token'lı HTTP API (Stream Deck, sohbet botları, harici ASR), 240+ otomatik test</a:t>
+              <a:t>Twitch/YouTube sohbeti, hediye webhook'u (TikFinity / Streamer.bot), token korumalı HTTP API, 575+ otomatik test</a:t>
             </a:r>
             <a:endParaRPr lang="en-US" sz="1100" dirty="0"/>
           </a:p>
@@ -24659,7 +29843,7 @@
                 <a:ea typeface="Arial" pitchFamily="34" charset="-122"/>
                 <a:cs typeface="Arial" pitchFamily="34" charset="-120"/>
               </a:rPr>
-              <a:t>2.0</a:t>
+              <a:t>2.1</a:t>
             </a:r>
             <a:endParaRPr lang="en-US" sz="3800" dirty="0"/>
           </a:p>
@@ -24700,7 +29884,7 @@
                 <a:ea typeface="Arial" pitchFamily="34" charset="-122"/>
                 <a:cs typeface="Arial" pitchFamily="34" charset="-120"/>
               </a:rPr>
-              <a:t>güncel sürüm (0.1 → 2.0), 240+ otomatik test, DE/TR kılavuzlar</a:t>
+              <a:t>güncel sürüm (0.1 → 2.1), 575+ otomatik test, DE/TR kılavuzlar</a:t>
             </a:r>
             <a:endParaRPr lang="en-US" sz="1200" dirty="0"/>
           </a:p>
@@ -24782,7 +29966,7 @@
                 <a:ea typeface="Arial" pitchFamily="34" charset="-122"/>
                 <a:cs typeface="Arial" pitchFamily="34" charset="-120"/>
               </a:rPr>
-              <a:t>tetikleyici, 5 pakette; 3 hikâye paketi, 38 ses, 13 sahne – 3 dilde</a:t>
+              <a:t>tetikleyici, 5 pakette + 143 ücretsiz çıkartma, 38 ses, 13 sahne – 3 dilde</a:t>
             </a:r>
             <a:endParaRPr lang="en-US" sz="1200" dirty="0"/>
           </a:p>

--- a/live-fx/business/LiveFX_Pitch_TR.pptx
+++ b/live-fx/business/LiveFX_Pitch_TR.pptx
@@ -125,7 +125,7 @@
   <p:extLst>
     <p:ext uri="{521415D9-36F7-43E2-AB2F-B90AF26B5E84}">
       <p14:sectionLst xmlns:p14="http://schemas.microsoft.com/office/powerpoint/2010/main">
-        <p14:section name="Bugün: LiveFX 2.1" id="{289d13c8-e197-a19e-330d-f765c58d7e57}">
+        <p14:section name="Bugün: LiveFX 2.1" id="{5e840e68-47cb-64e3-33d4-f2c396d6cc66}">
           <p14:sldIdLst>
             <p14:sldId id="256"/>
             <p14:sldId id="257"/>
@@ -140,7 +140,7 @@
             <p14:sldId id="266"/>
           </p14:sldIdLst>
         </p14:section>
-        <p14:section name="Vizyon 2027–2029" id="{1a17b2a7-b126-1fa3-18b3-661115ade20d}">
+        <p14:section name="Vizyon 2027–2029" id="{56d283c1-e611-007a-a069-288a2a49e5b8}">
           <p14:sldIdLst>
             <p14:sldId id="267"/>
             <p14:sldId id="268"/>
@@ -148,7 +148,7 @@
             <p14:sldId id="270"/>
           </p14:sldIdLst>
         </p14:section>
-        <p14:section name="Ekip ve talep" id="{7bb417d3-51e7-73e3-0228-de58a3d64c97}">
+        <p14:section name="Ekip ve talep" id="{63b7dbc7-ae2a-dd20-cc72-918d573de77e}">
           <p14:sldIdLst>
             <p14:sldId id="271"/>
             <p14:sldId id="272"/>
@@ -19255,7 +19255,7 @@
                 <a:ea typeface="Arial" pitchFamily="34" charset="-122"/>
                 <a:cs typeface="Arial" pitchFamily="34" charset="-120"/>
               </a:rPr>
-              <a:t>yatırım öncesi · %10,0 için 250 bin € · sonrası 2,5 milyon €</a:t>
+              <a:t>yatırım öncesi · %10,0 için 250 bin € · sonrası 2,5 milyon €</a:t>
             </a:r>
             <a:endParaRPr lang="en-US" sz="1200" dirty="0"/>
           </a:p>
@@ -21584,7 +21584,7 @@
               <a:buNone/>
             </a:pPr>
             <a:r>
-              <a:rPr lang="en-US" sz="1250" dirty="0">
+              <a:rPr lang="en-US" sz="1200" dirty="0">
                 <a:solidFill>
                   <a:srgbClr val="FFFFFF"/>
                 </a:solidFill>
@@ -21592,9 +21592,9 @@
                 <a:ea typeface="Arial" pitchFamily="34" charset="-122"/>
                 <a:cs typeface="Arial" pitchFamily="34" charset="-120"/>
               </a:rPr>
-              <a:t>%10 karşılığında (yatırım öncesi 2,25 milyon €, sonrası 2,5 milyon €) ya da 2,25 milyon € tavanlı SAFE. 18 ay, yalın: Pro aboneliği, mobil uygulama/PWA, TR → DE/EN lansmanı, Kelime-Resim.</a:t>
-            </a:r>
-            <a:endParaRPr lang="en-US" sz="1250" dirty="0"/>
+              <a:t>%10 karşılığında (yatırım öncesi 2,25 milyon €, sonrası 2,5 milyon €) ya da 2,25 milyon € tavanlı SAFE. 18 ay, yalın: Pro aboneliği, mobil uygulama/PWA, TR → DE/EN lansmanı, Kelime-Resim.</a:t>
+            </a:r>
+            <a:endParaRPr lang="en-US" sz="1200" dirty="0"/>
           </a:p>
         </p:txBody>
       </p:sp>
